--- a/docs/12_HoSiuHang_Final_Project_V05.pptx
+++ b/docs/12_HoSiuHang_Final_Project_V05.pptx
@@ -308,7 +308,7 @@
       </p:grpSpPr>
       <p:sp>
         <p:nvSpPr>
-          <p:cNvPr id="1608851463" name="Google Shape;3;n"/>
+          <p:cNvPr id="1893353696" name="Google Shape;3;n"/>
           <p:cNvSpPr txBox="1">
             <a:spLocks noGrp="1"/>
           </p:cNvSpPr>
@@ -507,7 +507,7 @@
       </p:sp>
       <p:sp>
         <p:nvSpPr>
-          <p:cNvPr id="1001125362" name="Google Shape;4;n"/>
+          <p:cNvPr id="1854710356" name="Google Shape;4;n"/>
           <p:cNvSpPr txBox="1">
             <a:spLocks noGrp="1"/>
           </p:cNvSpPr>
@@ -706,7 +706,7 @@
       </p:sp>
       <p:sp>
         <p:nvSpPr>
-          <p:cNvPr id="2057902307" name="Google Shape;5;n"/>
+          <p:cNvPr id="1929574430" name="Google Shape;5;n"/>
           <p:cNvSpPr>
             <a:spLocks noChangeAspect="1" noGrp="1" noRot="1"/>
           </p:cNvSpPr>
@@ -757,7 +757,7 @@
       </p:sp>
       <p:sp>
         <p:nvSpPr>
-          <p:cNvPr id="1512533545" name="Google Shape;6;n"/>
+          <p:cNvPr id="1625225724" name="Google Shape;6;n"/>
           <p:cNvSpPr txBox="1">
             <a:spLocks noGrp="1"/>
           </p:cNvSpPr>
@@ -956,7 +956,7 @@
       </p:sp>
       <p:sp>
         <p:nvSpPr>
-          <p:cNvPr id="837333708" name="Google Shape;7;n"/>
+          <p:cNvPr id="1138734450" name="Google Shape;7;n"/>
           <p:cNvSpPr txBox="1">
             <a:spLocks noGrp="1"/>
           </p:cNvSpPr>
@@ -1155,7 +1155,7 @@
       </p:sp>
       <p:sp>
         <p:nvSpPr>
-          <p:cNvPr id="939823904" name="Google Shape;8;n"/>
+          <p:cNvPr id="50017444" name="Google Shape;8;n"/>
           <p:cNvSpPr txBox="1">
             <a:spLocks noGrp="1"/>
           </p:cNvSpPr>
@@ -1453,7 +1453,7 @@
       </p:grpSpPr>
       <p:sp>
         <p:nvSpPr>
-          <p:cNvPr id="498353946" name="Google Shape;85;p1:notes"/>
+          <p:cNvPr id="103584185" name="Google Shape;85;p1:notes"/>
           <p:cNvSpPr>
             <a:spLocks noChangeAspect="1" noGrp="1" noRot="1"/>
           </p:cNvSpPr>
@@ -1504,7 +1504,7 @@
       </p:sp>
       <p:sp>
         <p:nvSpPr>
-          <p:cNvPr id="338865827" name="Google Shape;86;p1:notes"/>
+          <p:cNvPr id="1165243265" name="Google Shape;86;p1:notes"/>
           <p:cNvSpPr txBox="1">
             <a:spLocks noGrp="1"/>
           </p:cNvSpPr>
@@ -1540,7 +1540,7 @@
       </p:sp>
       <p:sp>
         <p:nvSpPr>
-          <p:cNvPr id="364684232" name="Google Shape;87;p1:notes"/>
+          <p:cNvPr id="225378596" name="Google Shape;87;p1:notes"/>
           <p:cNvSpPr txBox="1">
             <a:spLocks noGrp="1"/>
           </p:cNvSpPr>
@@ -1605,7 +1605,7 @@
       </p:grpSpPr>
       <p:sp>
         <p:nvSpPr>
-          <p:cNvPr id="1244584337" name="Google Shape;85;p1:notes"/>
+          <p:cNvPr id="11290332" name="Google Shape;85;p1:notes"/>
           <p:cNvSpPr>
             <a:spLocks noChangeAspect="1" noGrp="1" noRot="1"/>
           </p:cNvSpPr>
@@ -1656,7 +1656,7 @@
       </p:sp>
       <p:sp>
         <p:nvSpPr>
-          <p:cNvPr id="1154894294" name="Google Shape;86;p1:notes"/>
+          <p:cNvPr id="1139313081" name="Google Shape;86;p1:notes"/>
           <p:cNvSpPr txBox="1">
             <a:spLocks noGrp="1"/>
           </p:cNvSpPr>
@@ -1692,7 +1692,7 @@
       </p:sp>
       <p:sp>
         <p:nvSpPr>
-          <p:cNvPr id="86900954" name="Google Shape;87;p1:notes"/>
+          <p:cNvPr id="1161923824" name="Google Shape;87;p1:notes"/>
           <p:cNvSpPr txBox="1">
             <a:spLocks noGrp="1"/>
           </p:cNvSpPr>
@@ -1757,7 +1757,7 @@
       </p:grpSpPr>
       <p:sp>
         <p:nvSpPr>
-          <p:cNvPr id="2050834785" name="Google Shape;85;p1:notes"/>
+          <p:cNvPr id="837064956" name="Google Shape;85;p1:notes"/>
           <p:cNvSpPr>
             <a:spLocks noChangeAspect="1" noGrp="1" noRot="1"/>
           </p:cNvSpPr>
@@ -1808,7 +1808,7 @@
       </p:sp>
       <p:sp>
         <p:nvSpPr>
-          <p:cNvPr id="1071481454" name="Google Shape;86;p1:notes"/>
+          <p:cNvPr id="2120070884" name="Google Shape;86;p1:notes"/>
           <p:cNvSpPr txBox="1">
             <a:spLocks noGrp="1"/>
           </p:cNvSpPr>
@@ -1844,7 +1844,7 @@
       </p:sp>
       <p:sp>
         <p:nvSpPr>
-          <p:cNvPr id="1436904023" name="Google Shape;87;p1:notes"/>
+          <p:cNvPr id="895160456" name="Google Shape;87;p1:notes"/>
           <p:cNvSpPr txBox="1">
             <a:spLocks noGrp="1"/>
           </p:cNvSpPr>
@@ -1909,7 +1909,7 @@
       </p:grpSpPr>
       <p:sp>
         <p:nvSpPr>
-          <p:cNvPr id="368631789" name="Google Shape;85;p1:notes"/>
+          <p:cNvPr id="1817256119" name="Google Shape;85;p1:notes"/>
           <p:cNvSpPr>
             <a:spLocks noChangeAspect="1" noGrp="1" noRot="1"/>
           </p:cNvSpPr>
@@ -1960,7 +1960,7 @@
       </p:sp>
       <p:sp>
         <p:nvSpPr>
-          <p:cNvPr id="161191621" name="Google Shape;86;p1:notes"/>
+          <p:cNvPr id="456149348" name="Google Shape;86;p1:notes"/>
           <p:cNvSpPr txBox="1">
             <a:spLocks noGrp="1"/>
           </p:cNvSpPr>
@@ -1996,7 +1996,7 @@
       </p:sp>
       <p:sp>
         <p:nvSpPr>
-          <p:cNvPr id="1957452871" name="Google Shape;87;p1:notes"/>
+          <p:cNvPr id="1996421667" name="Google Shape;87;p1:notes"/>
           <p:cNvSpPr txBox="1">
             <a:spLocks noGrp="1"/>
           </p:cNvSpPr>
@@ -2061,7 +2061,7 @@
       </p:grpSpPr>
       <p:sp>
         <p:nvSpPr>
-          <p:cNvPr id="882066505" name="Google Shape;85;p1:notes"/>
+          <p:cNvPr id="2045285596" name="Google Shape;85;p1:notes"/>
           <p:cNvSpPr>
             <a:spLocks noChangeAspect="1" noGrp="1" noRot="1"/>
           </p:cNvSpPr>
@@ -2112,7 +2112,7 @@
       </p:sp>
       <p:sp>
         <p:nvSpPr>
-          <p:cNvPr id="1651035242" name="Google Shape;86;p1:notes"/>
+          <p:cNvPr id="105241539" name="Google Shape;86;p1:notes"/>
           <p:cNvSpPr txBox="1">
             <a:spLocks noGrp="1"/>
           </p:cNvSpPr>
@@ -2148,7 +2148,7 @@
       </p:sp>
       <p:sp>
         <p:nvSpPr>
-          <p:cNvPr id="1006206475" name="Google Shape;87;p1:notes"/>
+          <p:cNvPr id="1813015720" name="Google Shape;87;p1:notes"/>
           <p:cNvSpPr txBox="1">
             <a:spLocks noGrp="1"/>
           </p:cNvSpPr>
@@ -2213,7 +2213,7 @@
       </p:grpSpPr>
       <p:sp>
         <p:nvSpPr>
-          <p:cNvPr id="1975930223" name="Google Shape;85;p1:notes"/>
+          <p:cNvPr id="929316791" name="Google Shape;85;p1:notes"/>
           <p:cNvSpPr>
             <a:spLocks noChangeAspect="1" noGrp="1" noRot="1"/>
           </p:cNvSpPr>
@@ -2264,7 +2264,7 @@
       </p:sp>
       <p:sp>
         <p:nvSpPr>
-          <p:cNvPr id="466180901" name="Google Shape;86;p1:notes"/>
+          <p:cNvPr id="847285099" name="Google Shape;86;p1:notes"/>
           <p:cNvSpPr txBox="1">
             <a:spLocks noGrp="1"/>
           </p:cNvSpPr>
@@ -2300,7 +2300,7 @@
       </p:sp>
       <p:sp>
         <p:nvSpPr>
-          <p:cNvPr id="647705141" name="Google Shape;87;p1:notes"/>
+          <p:cNvPr id="398464739" name="Google Shape;87;p1:notes"/>
           <p:cNvSpPr txBox="1">
             <a:spLocks noGrp="1"/>
           </p:cNvSpPr>
@@ -2365,7 +2365,7 @@
       </p:grpSpPr>
       <p:sp>
         <p:nvSpPr>
-          <p:cNvPr id="1156430278" name="Google Shape;85;p1:notes"/>
+          <p:cNvPr id="679204682" name="Google Shape;85;p1:notes"/>
           <p:cNvSpPr>
             <a:spLocks noChangeAspect="1" noGrp="1" noRot="1"/>
           </p:cNvSpPr>
@@ -2416,7 +2416,7 @@
       </p:sp>
       <p:sp>
         <p:nvSpPr>
-          <p:cNvPr id="884087997" name="Google Shape;86;p1:notes"/>
+          <p:cNvPr id="1731337531" name="Google Shape;86;p1:notes"/>
           <p:cNvSpPr txBox="1">
             <a:spLocks noGrp="1"/>
           </p:cNvSpPr>
@@ -2452,7 +2452,7 @@
       </p:sp>
       <p:sp>
         <p:nvSpPr>
-          <p:cNvPr id="1658586130" name="Google Shape;87;p1:notes"/>
+          <p:cNvPr id="142921339" name="Google Shape;87;p1:notes"/>
           <p:cNvSpPr txBox="1">
             <a:spLocks noGrp="1"/>
           </p:cNvSpPr>
@@ -2517,7 +2517,7 @@
       </p:grpSpPr>
       <p:sp>
         <p:nvSpPr>
-          <p:cNvPr id="1779985998" name="Google Shape;85;p1:notes"/>
+          <p:cNvPr id="1121027995" name="Google Shape;85;p1:notes"/>
           <p:cNvSpPr>
             <a:spLocks noChangeAspect="1" noGrp="1" noRot="1"/>
           </p:cNvSpPr>
@@ -2568,7 +2568,7 @@
       </p:sp>
       <p:sp>
         <p:nvSpPr>
-          <p:cNvPr id="245528144" name="Google Shape;86;p1:notes"/>
+          <p:cNvPr id="185946242" name="Google Shape;86;p1:notes"/>
           <p:cNvSpPr txBox="1">
             <a:spLocks noGrp="1"/>
           </p:cNvSpPr>
@@ -2604,7 +2604,7 @@
       </p:sp>
       <p:sp>
         <p:nvSpPr>
-          <p:cNvPr id="216978834" name="Google Shape;87;p1:notes"/>
+          <p:cNvPr id="856759576" name="Google Shape;87;p1:notes"/>
           <p:cNvSpPr txBox="1">
             <a:spLocks noGrp="1"/>
           </p:cNvSpPr>
@@ -2669,7 +2669,7 @@
       </p:grpSpPr>
       <p:sp>
         <p:nvSpPr>
-          <p:cNvPr id="1748206310" name="Google Shape;85;p1:notes"/>
+          <p:cNvPr id="1433963781" name="Google Shape;85;p1:notes"/>
           <p:cNvSpPr>
             <a:spLocks noChangeAspect="1" noGrp="1" noRot="1"/>
           </p:cNvSpPr>
@@ -2720,7 +2720,7 @@
       </p:sp>
       <p:sp>
         <p:nvSpPr>
-          <p:cNvPr id="242640180" name="Google Shape;86;p1:notes"/>
+          <p:cNvPr id="769334210" name="Google Shape;86;p1:notes"/>
           <p:cNvSpPr txBox="1">
             <a:spLocks noGrp="1"/>
           </p:cNvSpPr>
@@ -2756,7 +2756,7 @@
       </p:sp>
       <p:sp>
         <p:nvSpPr>
-          <p:cNvPr id="1339154908" name="Google Shape;87;p1:notes"/>
+          <p:cNvPr id="565424770" name="Google Shape;87;p1:notes"/>
           <p:cNvSpPr txBox="1">
             <a:spLocks noGrp="1"/>
           </p:cNvSpPr>
@@ -2821,7 +2821,7 @@
       </p:grpSpPr>
       <p:sp>
         <p:nvSpPr>
-          <p:cNvPr id="1824397836" name="Google Shape;85;p1:notes"/>
+          <p:cNvPr id="469558813" name="Google Shape;85;p1:notes"/>
           <p:cNvSpPr>
             <a:spLocks noChangeAspect="1" noGrp="1" noRot="1"/>
           </p:cNvSpPr>
@@ -2872,7 +2872,7 @@
       </p:sp>
       <p:sp>
         <p:nvSpPr>
-          <p:cNvPr id="724340847" name="Google Shape;86;p1:notes"/>
+          <p:cNvPr id="468090000" name="Google Shape;86;p1:notes"/>
           <p:cNvSpPr txBox="1">
             <a:spLocks noGrp="1"/>
           </p:cNvSpPr>
@@ -2908,7 +2908,7 @@
       </p:sp>
       <p:sp>
         <p:nvSpPr>
-          <p:cNvPr id="146258269" name="Google Shape;87;p1:notes"/>
+          <p:cNvPr id="1206364879" name="Google Shape;87;p1:notes"/>
           <p:cNvSpPr txBox="1">
             <a:spLocks noGrp="1"/>
           </p:cNvSpPr>
@@ -2973,7 +2973,7 @@
       </p:grpSpPr>
       <p:sp>
         <p:nvSpPr>
-          <p:cNvPr id="809092072" name="Google Shape;85;p1:notes"/>
+          <p:cNvPr id="1019433444" name="Google Shape;85;p1:notes"/>
           <p:cNvSpPr>
             <a:spLocks noChangeAspect="1" noGrp="1" noRot="1"/>
           </p:cNvSpPr>
@@ -3024,7 +3024,7 @@
       </p:sp>
       <p:sp>
         <p:nvSpPr>
-          <p:cNvPr id="1449892126" name="Google Shape;86;p1:notes"/>
+          <p:cNvPr id="2007075519" name="Google Shape;86;p1:notes"/>
           <p:cNvSpPr txBox="1">
             <a:spLocks noGrp="1"/>
           </p:cNvSpPr>
@@ -3060,7 +3060,7 @@
       </p:sp>
       <p:sp>
         <p:nvSpPr>
-          <p:cNvPr id="1371041179" name="Google Shape;87;p1:notes"/>
+          <p:cNvPr id="976560527" name="Google Shape;87;p1:notes"/>
           <p:cNvSpPr txBox="1">
             <a:spLocks noGrp="1"/>
           </p:cNvSpPr>
@@ -3125,7 +3125,7 @@
       </p:grpSpPr>
       <p:sp>
         <p:nvSpPr>
-          <p:cNvPr id="949107289" name="Google Shape;85;p1:notes"/>
+          <p:cNvPr id="1152490366" name="Google Shape;85;p1:notes"/>
           <p:cNvSpPr>
             <a:spLocks noChangeAspect="1" noGrp="1" noRot="1"/>
           </p:cNvSpPr>
@@ -3176,7 +3176,7 @@
       </p:sp>
       <p:sp>
         <p:nvSpPr>
-          <p:cNvPr id="1476812084" name="Google Shape;86;p1:notes"/>
+          <p:cNvPr id="994658692" name="Google Shape;86;p1:notes"/>
           <p:cNvSpPr txBox="1">
             <a:spLocks noGrp="1"/>
           </p:cNvSpPr>
@@ -3212,7 +3212,7 @@
       </p:sp>
       <p:sp>
         <p:nvSpPr>
-          <p:cNvPr id="39317911" name="Google Shape;87;p1:notes"/>
+          <p:cNvPr id="518924921" name="Google Shape;87;p1:notes"/>
           <p:cNvSpPr txBox="1">
             <a:spLocks noGrp="1"/>
           </p:cNvSpPr>
@@ -3277,7 +3277,7 @@
       </p:grpSpPr>
       <p:sp>
         <p:nvSpPr>
-          <p:cNvPr id="1746350573" name="Google Shape;85;p1:notes"/>
+          <p:cNvPr id="1755143760" name="Google Shape;85;p1:notes"/>
           <p:cNvSpPr>
             <a:spLocks noChangeAspect="1" noGrp="1" noRot="1"/>
           </p:cNvSpPr>
@@ -3328,7 +3328,7 @@
       </p:sp>
       <p:sp>
         <p:nvSpPr>
-          <p:cNvPr id="1825801532" name="Google Shape;86;p1:notes"/>
+          <p:cNvPr id="1762923944" name="Google Shape;86;p1:notes"/>
           <p:cNvSpPr txBox="1">
             <a:spLocks noGrp="1"/>
           </p:cNvSpPr>
@@ -3364,7 +3364,7 @@
       </p:sp>
       <p:sp>
         <p:nvSpPr>
-          <p:cNvPr id="1284965063" name="Google Shape;87;p1:notes"/>
+          <p:cNvPr id="934636992" name="Google Shape;87;p1:notes"/>
           <p:cNvSpPr txBox="1">
             <a:spLocks noGrp="1"/>
           </p:cNvSpPr>
@@ -3429,7 +3429,7 @@
       </p:grpSpPr>
       <p:sp>
         <p:nvSpPr>
-          <p:cNvPr id="946688790" name="Google Shape;85;p1:notes"/>
+          <p:cNvPr id="1534314369" name="Google Shape;85;p1:notes"/>
           <p:cNvSpPr>
             <a:spLocks noChangeAspect="1" noGrp="1" noRot="1"/>
           </p:cNvSpPr>
@@ -3480,7 +3480,7 @@
       </p:sp>
       <p:sp>
         <p:nvSpPr>
-          <p:cNvPr id="1336577521" name="Google Shape;86;p1:notes"/>
+          <p:cNvPr id="1000987433" name="Google Shape;86;p1:notes"/>
           <p:cNvSpPr txBox="1">
             <a:spLocks noGrp="1"/>
           </p:cNvSpPr>
@@ -3516,7 +3516,7 @@
       </p:sp>
       <p:sp>
         <p:nvSpPr>
-          <p:cNvPr id="508875660" name="Google Shape;87;p1:notes"/>
+          <p:cNvPr id="911399505" name="Google Shape;87;p1:notes"/>
           <p:cNvSpPr txBox="1">
             <a:spLocks noGrp="1"/>
           </p:cNvSpPr>
@@ -3581,7 +3581,7 @@
       </p:grpSpPr>
       <p:sp>
         <p:nvSpPr>
-          <p:cNvPr id="1932419203" name="Google Shape;85;p1:notes"/>
+          <p:cNvPr id="1704039280" name="Google Shape;85;p1:notes"/>
           <p:cNvSpPr>
             <a:spLocks noChangeAspect="1" noGrp="1" noRot="1"/>
           </p:cNvSpPr>
@@ -3632,7 +3632,7 @@
       </p:sp>
       <p:sp>
         <p:nvSpPr>
-          <p:cNvPr id="1952759933" name="Google Shape;86;p1:notes"/>
+          <p:cNvPr id="640819570" name="Google Shape;86;p1:notes"/>
           <p:cNvSpPr txBox="1">
             <a:spLocks noGrp="1"/>
           </p:cNvSpPr>
@@ -3668,7 +3668,7 @@
       </p:sp>
       <p:sp>
         <p:nvSpPr>
-          <p:cNvPr id="937454284" name="Google Shape;87;p1:notes"/>
+          <p:cNvPr id="166982744" name="Google Shape;87;p1:notes"/>
           <p:cNvSpPr txBox="1">
             <a:spLocks noGrp="1"/>
           </p:cNvSpPr>
@@ -3733,7 +3733,7 @@
       </p:grpSpPr>
       <p:sp>
         <p:nvSpPr>
-          <p:cNvPr id="562733842" name="Google Shape;85;p1:notes"/>
+          <p:cNvPr id="755556298" name="Google Shape;85;p1:notes"/>
           <p:cNvSpPr>
             <a:spLocks noChangeAspect="1" noGrp="1" noRot="1"/>
           </p:cNvSpPr>
@@ -3784,7 +3784,7 @@
       </p:sp>
       <p:sp>
         <p:nvSpPr>
-          <p:cNvPr id="390472416" name="Google Shape;86;p1:notes"/>
+          <p:cNvPr id="208452295" name="Google Shape;86;p1:notes"/>
           <p:cNvSpPr txBox="1">
             <a:spLocks noGrp="1"/>
           </p:cNvSpPr>
@@ -3820,7 +3820,7 @@
       </p:sp>
       <p:sp>
         <p:nvSpPr>
-          <p:cNvPr id="296251772" name="Google Shape;87;p1:notes"/>
+          <p:cNvPr id="316046739" name="Google Shape;87;p1:notes"/>
           <p:cNvSpPr txBox="1">
             <a:spLocks noGrp="1"/>
           </p:cNvSpPr>
@@ -3885,7 +3885,7 @@
       </p:grpSpPr>
       <p:sp>
         <p:nvSpPr>
-          <p:cNvPr id="170273695" name="Google Shape;85;p1:notes"/>
+          <p:cNvPr id="1693068569" name="Google Shape;85;p1:notes"/>
           <p:cNvSpPr>
             <a:spLocks noChangeAspect="1" noGrp="1" noRot="1"/>
           </p:cNvSpPr>
@@ -3936,7 +3936,7 @@
       </p:sp>
       <p:sp>
         <p:nvSpPr>
-          <p:cNvPr id="1205999467" name="Google Shape;86;p1:notes"/>
+          <p:cNvPr id="634061979" name="Google Shape;86;p1:notes"/>
           <p:cNvSpPr txBox="1">
             <a:spLocks noGrp="1"/>
           </p:cNvSpPr>
@@ -3972,7 +3972,7 @@
       </p:sp>
       <p:sp>
         <p:nvSpPr>
-          <p:cNvPr id="1448603164" name="Google Shape;87;p1:notes"/>
+          <p:cNvPr id="1938053127" name="Google Shape;87;p1:notes"/>
           <p:cNvSpPr txBox="1">
             <a:spLocks noGrp="1"/>
           </p:cNvSpPr>
@@ -4037,7 +4037,7 @@
       </p:grpSpPr>
       <p:sp>
         <p:nvSpPr>
-          <p:cNvPr id="1363526877" name="Google Shape;85;p1:notes"/>
+          <p:cNvPr id="1096490107" name="Google Shape;85;p1:notes"/>
           <p:cNvSpPr>
             <a:spLocks noChangeAspect="1" noGrp="1" noRot="1"/>
           </p:cNvSpPr>
@@ -4088,7 +4088,7 @@
       </p:sp>
       <p:sp>
         <p:nvSpPr>
-          <p:cNvPr id="1201020339" name="Google Shape;86;p1:notes"/>
+          <p:cNvPr id="1581555369" name="Google Shape;86;p1:notes"/>
           <p:cNvSpPr txBox="1">
             <a:spLocks noGrp="1"/>
           </p:cNvSpPr>
@@ -4124,7 +4124,7 @@
       </p:sp>
       <p:sp>
         <p:nvSpPr>
-          <p:cNvPr id="1086486654" name="Google Shape;87;p1:notes"/>
+          <p:cNvPr id="1274265959" name="Google Shape;87;p1:notes"/>
           <p:cNvSpPr txBox="1">
             <a:spLocks noGrp="1"/>
           </p:cNvSpPr>
@@ -4189,7 +4189,7 @@
       </p:grpSpPr>
       <p:sp>
         <p:nvSpPr>
-          <p:cNvPr id="1686597804" name="Google Shape;85;p1:notes"/>
+          <p:cNvPr id="1232332349" name="Google Shape;85;p1:notes"/>
           <p:cNvSpPr>
             <a:spLocks noChangeAspect="1" noGrp="1" noRot="1"/>
           </p:cNvSpPr>
@@ -4240,7 +4240,7 @@
       </p:sp>
       <p:sp>
         <p:nvSpPr>
-          <p:cNvPr id="146233830" name="Google Shape;86;p1:notes"/>
+          <p:cNvPr id="608447644" name="Google Shape;86;p1:notes"/>
           <p:cNvSpPr txBox="1">
             <a:spLocks noGrp="1"/>
           </p:cNvSpPr>
@@ -4276,7 +4276,7 @@
       </p:sp>
       <p:sp>
         <p:nvSpPr>
-          <p:cNvPr id="248997741" name="Google Shape;87;p1:notes"/>
+          <p:cNvPr id="1320487895" name="Google Shape;87;p1:notes"/>
           <p:cNvSpPr txBox="1">
             <a:spLocks noGrp="1"/>
           </p:cNvSpPr>
@@ -4341,7 +4341,7 @@
       </p:grpSpPr>
       <p:sp>
         <p:nvSpPr>
-          <p:cNvPr id="1051264008" name="Google Shape;85;p1:notes"/>
+          <p:cNvPr id="1410544685" name="Google Shape;85;p1:notes"/>
           <p:cNvSpPr>
             <a:spLocks noChangeAspect="1" noGrp="1" noRot="1"/>
           </p:cNvSpPr>
@@ -4392,7 +4392,7 @@
       </p:sp>
       <p:sp>
         <p:nvSpPr>
-          <p:cNvPr id="1131283024" name="Google Shape;86;p1:notes"/>
+          <p:cNvPr id="943727688" name="Google Shape;86;p1:notes"/>
           <p:cNvSpPr txBox="1">
             <a:spLocks noGrp="1"/>
           </p:cNvSpPr>
@@ -4428,7 +4428,7 @@
       </p:sp>
       <p:sp>
         <p:nvSpPr>
-          <p:cNvPr id="1929485722" name="Google Shape;87;p1:notes"/>
+          <p:cNvPr id="1886423941" name="Google Shape;87;p1:notes"/>
           <p:cNvSpPr txBox="1">
             <a:spLocks noGrp="1"/>
           </p:cNvSpPr>
@@ -4493,7 +4493,7 @@
       </p:grpSpPr>
       <p:sp>
         <p:nvSpPr>
-          <p:cNvPr id="1604762169" name="Google Shape;85;p1:notes"/>
+          <p:cNvPr id="875216501" name="Google Shape;85;p1:notes"/>
           <p:cNvSpPr>
             <a:spLocks noChangeAspect="1" noGrp="1" noRot="1"/>
           </p:cNvSpPr>
@@ -4544,7 +4544,7 @@
       </p:sp>
       <p:sp>
         <p:nvSpPr>
-          <p:cNvPr id="533431773" name="Google Shape;86;p1:notes"/>
+          <p:cNvPr id="1489564713" name="Google Shape;86;p1:notes"/>
           <p:cNvSpPr txBox="1">
             <a:spLocks noGrp="1"/>
           </p:cNvSpPr>
@@ -4580,7 +4580,7 @@
       </p:sp>
       <p:sp>
         <p:nvSpPr>
-          <p:cNvPr id="1070427923" name="Google Shape;87;p1:notes"/>
+          <p:cNvPr id="877947432" name="Google Shape;87;p1:notes"/>
           <p:cNvSpPr txBox="1">
             <a:spLocks noGrp="1"/>
           </p:cNvSpPr>
@@ -4645,7 +4645,7 @@
       </p:grpSpPr>
       <p:sp>
         <p:nvSpPr>
-          <p:cNvPr id="1640154658" name="Google Shape;85;p1:notes"/>
+          <p:cNvPr id="1319025552" name="Google Shape;85;p1:notes"/>
           <p:cNvSpPr>
             <a:spLocks noChangeAspect="1" noGrp="1" noRot="1"/>
           </p:cNvSpPr>
@@ -4696,7 +4696,7 @@
       </p:sp>
       <p:sp>
         <p:nvSpPr>
-          <p:cNvPr id="275601799" name="Google Shape;86;p1:notes"/>
+          <p:cNvPr id="397557252" name="Google Shape;86;p1:notes"/>
           <p:cNvSpPr txBox="1">
             <a:spLocks noGrp="1"/>
           </p:cNvSpPr>
@@ -4732,7 +4732,7 @@
       </p:sp>
       <p:sp>
         <p:nvSpPr>
-          <p:cNvPr id="790195866" name="Google Shape;87;p1:notes"/>
+          <p:cNvPr id="2115777308" name="Google Shape;87;p1:notes"/>
           <p:cNvSpPr txBox="1">
             <a:spLocks noGrp="1"/>
           </p:cNvSpPr>
@@ -4797,7 +4797,7 @@
       </p:grpSpPr>
       <p:sp>
         <p:nvSpPr>
-          <p:cNvPr id="1054931526" name="Google Shape;85;p1:notes"/>
+          <p:cNvPr id="594192840" name="Google Shape;85;p1:notes"/>
           <p:cNvSpPr>
             <a:spLocks noChangeAspect="1" noGrp="1" noRot="1"/>
           </p:cNvSpPr>
@@ -4848,7 +4848,7 @@
       </p:sp>
       <p:sp>
         <p:nvSpPr>
-          <p:cNvPr id="173350542" name="Google Shape;86;p1:notes"/>
+          <p:cNvPr id="659692988" name="Google Shape;86;p1:notes"/>
           <p:cNvSpPr txBox="1">
             <a:spLocks noGrp="1"/>
           </p:cNvSpPr>
@@ -4884,7 +4884,7 @@
       </p:sp>
       <p:sp>
         <p:nvSpPr>
-          <p:cNvPr id="1788036923" name="Google Shape;87;p1:notes"/>
+          <p:cNvPr id="47854789" name="Google Shape;87;p1:notes"/>
           <p:cNvSpPr txBox="1">
             <a:spLocks noGrp="1"/>
           </p:cNvSpPr>
@@ -4949,7 +4949,7 @@
       </p:grpSpPr>
       <p:sp>
         <p:nvSpPr>
-          <p:cNvPr id="833886842" name="Google Shape;85;p1:notes"/>
+          <p:cNvPr id="1696767630" name="Google Shape;85;p1:notes"/>
           <p:cNvSpPr>
             <a:spLocks noChangeAspect="1" noGrp="1" noRot="1"/>
           </p:cNvSpPr>
@@ -5000,7 +5000,7 @@
       </p:sp>
       <p:sp>
         <p:nvSpPr>
-          <p:cNvPr id="624222001" name="Google Shape;86;p1:notes"/>
+          <p:cNvPr id="1829641066" name="Google Shape;86;p1:notes"/>
           <p:cNvSpPr txBox="1">
             <a:spLocks noGrp="1"/>
           </p:cNvSpPr>
@@ -5036,7 +5036,7 @@
       </p:sp>
       <p:sp>
         <p:nvSpPr>
-          <p:cNvPr id="1492200119" name="Google Shape;87;p1:notes"/>
+          <p:cNvPr id="157637961" name="Google Shape;87;p1:notes"/>
           <p:cNvSpPr txBox="1">
             <a:spLocks noGrp="1"/>
           </p:cNvSpPr>
@@ -5101,7 +5101,7 @@
       </p:grpSpPr>
       <p:sp>
         <p:nvSpPr>
-          <p:cNvPr id="1595386998" name="Google Shape;85;p1:notes"/>
+          <p:cNvPr id="934067285" name="Google Shape;85;p1:notes"/>
           <p:cNvSpPr>
             <a:spLocks noChangeAspect="1" noGrp="1" noRot="1"/>
           </p:cNvSpPr>
@@ -5152,7 +5152,7 @@
       </p:sp>
       <p:sp>
         <p:nvSpPr>
-          <p:cNvPr id="964478922" name="Google Shape;86;p1:notes"/>
+          <p:cNvPr id="1602315319" name="Google Shape;86;p1:notes"/>
           <p:cNvSpPr txBox="1">
             <a:spLocks noGrp="1"/>
           </p:cNvSpPr>
@@ -5188,7 +5188,7 @@
       </p:sp>
       <p:sp>
         <p:nvSpPr>
-          <p:cNvPr id="1097464462" name="Google Shape;87;p1:notes"/>
+          <p:cNvPr id="787338677" name="Google Shape;87;p1:notes"/>
           <p:cNvSpPr txBox="1">
             <a:spLocks noGrp="1"/>
           </p:cNvSpPr>
@@ -5253,7 +5253,7 @@
       </p:grpSpPr>
       <p:sp>
         <p:nvSpPr>
-          <p:cNvPr id="220620945" name="Google Shape;85;p1:notes"/>
+          <p:cNvPr id="2102373140" name="Google Shape;85;p1:notes"/>
           <p:cNvSpPr>
             <a:spLocks noChangeAspect="1" noGrp="1" noRot="1"/>
           </p:cNvSpPr>
@@ -5304,7 +5304,7 @@
       </p:sp>
       <p:sp>
         <p:nvSpPr>
-          <p:cNvPr id="84586063" name="Google Shape;86;p1:notes"/>
+          <p:cNvPr id="1114379025" name="Google Shape;86;p1:notes"/>
           <p:cNvSpPr txBox="1">
             <a:spLocks noGrp="1"/>
           </p:cNvSpPr>
@@ -5340,7 +5340,7 @@
       </p:sp>
       <p:sp>
         <p:nvSpPr>
-          <p:cNvPr id="511565054" name="Google Shape;87;p1:notes"/>
+          <p:cNvPr id="1115174435" name="Google Shape;87;p1:notes"/>
           <p:cNvSpPr txBox="1">
             <a:spLocks noGrp="1"/>
           </p:cNvSpPr>
@@ -5405,7 +5405,7 @@
       </p:grpSpPr>
       <p:sp>
         <p:nvSpPr>
-          <p:cNvPr id="1263097117" name="Google Shape;85;p1:notes"/>
+          <p:cNvPr id="1921146804" name="Google Shape;85;p1:notes"/>
           <p:cNvSpPr>
             <a:spLocks noChangeAspect="1" noGrp="1" noRot="1"/>
           </p:cNvSpPr>
@@ -5456,7 +5456,7 @@
       </p:sp>
       <p:sp>
         <p:nvSpPr>
-          <p:cNvPr id="710534123" name="Google Shape;86;p1:notes"/>
+          <p:cNvPr id="906055099" name="Google Shape;86;p1:notes"/>
           <p:cNvSpPr txBox="1">
             <a:spLocks noGrp="1"/>
           </p:cNvSpPr>
@@ -5492,7 +5492,7 @@
       </p:sp>
       <p:sp>
         <p:nvSpPr>
-          <p:cNvPr id="1134576479" name="Google Shape;87;p1:notes"/>
+          <p:cNvPr id="1721302719" name="Google Shape;87;p1:notes"/>
           <p:cNvSpPr txBox="1">
             <a:spLocks noGrp="1"/>
           </p:cNvSpPr>
@@ -5557,7 +5557,7 @@
       </p:grpSpPr>
       <p:sp>
         <p:nvSpPr>
-          <p:cNvPr id="821249382" name="Google Shape;85;p1:notes"/>
+          <p:cNvPr id="1594311704" name="Google Shape;85;p1:notes"/>
           <p:cNvSpPr>
             <a:spLocks noChangeAspect="1" noGrp="1" noRot="1"/>
           </p:cNvSpPr>
@@ -5608,7 +5608,7 @@
       </p:sp>
       <p:sp>
         <p:nvSpPr>
-          <p:cNvPr id="357400815" name="Google Shape;86;p1:notes"/>
+          <p:cNvPr id="701703221" name="Google Shape;86;p1:notes"/>
           <p:cNvSpPr txBox="1">
             <a:spLocks noGrp="1"/>
           </p:cNvSpPr>
@@ -5644,7 +5644,7 @@
       </p:sp>
       <p:sp>
         <p:nvSpPr>
-          <p:cNvPr id="823624571" name="Google Shape;87;p1:notes"/>
+          <p:cNvPr id="241734581" name="Google Shape;87;p1:notes"/>
           <p:cNvSpPr txBox="1">
             <a:spLocks noGrp="1"/>
           </p:cNvSpPr>
@@ -5709,7 +5709,7 @@
       </p:grpSpPr>
       <p:sp>
         <p:nvSpPr>
-          <p:cNvPr id="1445181914" name="Google Shape;85;p1:notes"/>
+          <p:cNvPr id="30196509" name="Google Shape;85;p1:notes"/>
           <p:cNvSpPr>
             <a:spLocks noChangeAspect="1" noGrp="1" noRot="1"/>
           </p:cNvSpPr>
@@ -5760,7 +5760,7 @@
       </p:sp>
       <p:sp>
         <p:nvSpPr>
-          <p:cNvPr id="323875339" name="Google Shape;86;p1:notes"/>
+          <p:cNvPr id="1319367195" name="Google Shape;86;p1:notes"/>
           <p:cNvSpPr txBox="1">
             <a:spLocks noGrp="1"/>
           </p:cNvSpPr>
@@ -5796,7 +5796,7 @@
       </p:sp>
       <p:sp>
         <p:nvSpPr>
-          <p:cNvPr id="1783028470" name="Google Shape;87;p1:notes"/>
+          <p:cNvPr id="2052634882" name="Google Shape;87;p1:notes"/>
           <p:cNvSpPr txBox="1">
             <a:spLocks noGrp="1"/>
           </p:cNvSpPr>
@@ -5861,7 +5861,7 @@
       </p:grpSpPr>
       <p:sp>
         <p:nvSpPr>
-          <p:cNvPr id="611512727" name="Google Shape;85;p1:notes"/>
+          <p:cNvPr id="1912871082" name="Google Shape;85;p1:notes"/>
           <p:cNvSpPr>
             <a:spLocks noChangeAspect="1" noGrp="1" noRot="1"/>
           </p:cNvSpPr>
@@ -5912,7 +5912,7 @@
       </p:sp>
       <p:sp>
         <p:nvSpPr>
-          <p:cNvPr id="718812759" name="Google Shape;86;p1:notes"/>
+          <p:cNvPr id="1324742959" name="Google Shape;86;p1:notes"/>
           <p:cNvSpPr txBox="1">
             <a:spLocks noGrp="1"/>
           </p:cNvSpPr>
@@ -5948,7 +5948,7 @@
       </p:sp>
       <p:sp>
         <p:nvSpPr>
-          <p:cNvPr id="1591177785" name="Google Shape;87;p1:notes"/>
+          <p:cNvPr id="1668633172" name="Google Shape;87;p1:notes"/>
           <p:cNvSpPr txBox="1">
             <a:spLocks noGrp="1"/>
           </p:cNvSpPr>
@@ -6013,7 +6013,7 @@
       </p:grpSpPr>
       <p:sp>
         <p:nvSpPr>
-          <p:cNvPr id="1846557240" name="Google Shape;85;p1:notes"/>
+          <p:cNvPr id="627164106" name="Google Shape;85;p1:notes"/>
           <p:cNvSpPr>
             <a:spLocks noChangeAspect="1" noGrp="1" noRot="1"/>
           </p:cNvSpPr>
@@ -6064,7 +6064,7 @@
       </p:sp>
       <p:sp>
         <p:nvSpPr>
-          <p:cNvPr id="941942720" name="Google Shape;86;p1:notes"/>
+          <p:cNvPr id="1508976121" name="Google Shape;86;p1:notes"/>
           <p:cNvSpPr txBox="1">
             <a:spLocks noGrp="1"/>
           </p:cNvSpPr>
@@ -6100,7 +6100,7 @@
       </p:sp>
       <p:sp>
         <p:nvSpPr>
-          <p:cNvPr id="229797973" name="Google Shape;87;p1:notes"/>
+          <p:cNvPr id="703182904" name="Google Shape;87;p1:notes"/>
           <p:cNvSpPr txBox="1">
             <a:spLocks noGrp="1"/>
           </p:cNvSpPr>
@@ -6165,7 +6165,7 @@
       </p:grpSpPr>
       <p:sp>
         <p:nvSpPr>
-          <p:cNvPr id="296497728" name="Google Shape;85;p1:notes"/>
+          <p:cNvPr id="560595061" name="Google Shape;85;p1:notes"/>
           <p:cNvSpPr>
             <a:spLocks noChangeAspect="1" noGrp="1" noRot="1"/>
           </p:cNvSpPr>
@@ -6216,7 +6216,7 @@
       </p:sp>
       <p:sp>
         <p:nvSpPr>
-          <p:cNvPr id="1422536736" name="Google Shape;86;p1:notes"/>
+          <p:cNvPr id="297083966" name="Google Shape;86;p1:notes"/>
           <p:cNvSpPr txBox="1">
             <a:spLocks noGrp="1"/>
           </p:cNvSpPr>
@@ -6252,7 +6252,7 @@
       </p:sp>
       <p:sp>
         <p:nvSpPr>
-          <p:cNvPr id="1097762274" name="Google Shape;87;p1:notes"/>
+          <p:cNvPr id="1399820952" name="Google Shape;87;p1:notes"/>
           <p:cNvSpPr txBox="1">
             <a:spLocks noGrp="1"/>
           </p:cNvSpPr>
@@ -6317,7 +6317,7 @@
       </p:grpSpPr>
       <p:sp>
         <p:nvSpPr>
-          <p:cNvPr id="1653338097" name="Google Shape;85;p1:notes"/>
+          <p:cNvPr id="1034614307" name="Google Shape;85;p1:notes"/>
           <p:cNvSpPr>
             <a:spLocks noChangeAspect="1" noGrp="1" noRot="1"/>
           </p:cNvSpPr>
@@ -6368,7 +6368,7 @@
       </p:sp>
       <p:sp>
         <p:nvSpPr>
-          <p:cNvPr id="670817226" name="Google Shape;86;p1:notes"/>
+          <p:cNvPr id="391225011" name="Google Shape;86;p1:notes"/>
           <p:cNvSpPr txBox="1">
             <a:spLocks noGrp="1"/>
           </p:cNvSpPr>
@@ -6404,7 +6404,7 @@
       </p:sp>
       <p:sp>
         <p:nvSpPr>
-          <p:cNvPr id="1841681976" name="Google Shape;87;p1:notes"/>
+          <p:cNvPr id="1716695471" name="Google Shape;87;p1:notes"/>
           <p:cNvSpPr txBox="1">
             <a:spLocks noGrp="1"/>
           </p:cNvSpPr>
@@ -6469,7 +6469,7 @@
       </p:grpSpPr>
       <p:sp>
         <p:nvSpPr>
-          <p:cNvPr id="1126869919" name="Google Shape;85;p1:notes"/>
+          <p:cNvPr id="1520386795" name="Google Shape;85;p1:notes"/>
           <p:cNvSpPr>
             <a:spLocks noChangeAspect="1" noGrp="1" noRot="1"/>
           </p:cNvSpPr>
@@ -6520,7 +6520,7 @@
       </p:sp>
       <p:sp>
         <p:nvSpPr>
-          <p:cNvPr id="888640779" name="Google Shape;86;p1:notes"/>
+          <p:cNvPr id="1710624127" name="Google Shape;86;p1:notes"/>
           <p:cNvSpPr txBox="1">
             <a:spLocks noGrp="1"/>
           </p:cNvSpPr>
@@ -6556,7 +6556,7 @@
       </p:sp>
       <p:sp>
         <p:nvSpPr>
-          <p:cNvPr id="677367512" name="Google Shape;87;p1:notes"/>
+          <p:cNvPr id="1070415654" name="Google Shape;87;p1:notes"/>
           <p:cNvSpPr txBox="1">
             <a:spLocks noGrp="1"/>
           </p:cNvSpPr>
@@ -6621,7 +6621,7 @@
       </p:grpSpPr>
       <p:sp>
         <p:nvSpPr>
-          <p:cNvPr id="1197274061" name="Google Shape;85;p1:notes"/>
+          <p:cNvPr id="633907773" name="Google Shape;85;p1:notes"/>
           <p:cNvSpPr>
             <a:spLocks noChangeAspect="1" noGrp="1" noRot="1"/>
           </p:cNvSpPr>
@@ -6672,7 +6672,7 @@
       </p:sp>
       <p:sp>
         <p:nvSpPr>
-          <p:cNvPr id="1258698282" name="Google Shape;86;p1:notes"/>
+          <p:cNvPr id="1526446294" name="Google Shape;86;p1:notes"/>
           <p:cNvSpPr txBox="1">
             <a:spLocks noGrp="1"/>
           </p:cNvSpPr>
@@ -6708,7 +6708,7 @@
       </p:sp>
       <p:sp>
         <p:nvSpPr>
-          <p:cNvPr id="1980258105" name="Google Shape;87;p1:notes"/>
+          <p:cNvPr id="1140019019" name="Google Shape;87;p1:notes"/>
           <p:cNvSpPr txBox="1">
             <a:spLocks noGrp="1"/>
           </p:cNvSpPr>
@@ -6773,7 +6773,7 @@
       </p:grpSpPr>
       <p:sp>
         <p:nvSpPr>
-          <p:cNvPr id="2075783060" name="Google Shape;85;p1:notes"/>
+          <p:cNvPr id="1587634678" name="Google Shape;85;p1:notes"/>
           <p:cNvSpPr>
             <a:spLocks noChangeAspect="1" noGrp="1" noRot="1"/>
           </p:cNvSpPr>
@@ -6824,7 +6824,7 @@
       </p:sp>
       <p:sp>
         <p:nvSpPr>
-          <p:cNvPr id="1054593669" name="Google Shape;86;p1:notes"/>
+          <p:cNvPr id="852441623" name="Google Shape;86;p1:notes"/>
           <p:cNvSpPr txBox="1">
             <a:spLocks noGrp="1"/>
           </p:cNvSpPr>
@@ -6860,7 +6860,7 @@
       </p:sp>
       <p:sp>
         <p:nvSpPr>
-          <p:cNvPr id="2022477330" name="Google Shape;87;p1:notes"/>
+          <p:cNvPr id="1329942319" name="Google Shape;87;p1:notes"/>
           <p:cNvSpPr txBox="1">
             <a:spLocks noGrp="1"/>
           </p:cNvSpPr>
@@ -6925,7 +6925,7 @@
       </p:grpSpPr>
       <p:sp>
         <p:nvSpPr>
-          <p:cNvPr id="453295465" name="Google Shape;85;p1:notes"/>
+          <p:cNvPr id="2132857716" name="Google Shape;85;p1:notes"/>
           <p:cNvSpPr>
             <a:spLocks noChangeAspect="1" noGrp="1" noRot="1"/>
           </p:cNvSpPr>
@@ -6976,7 +6976,7 @@
       </p:sp>
       <p:sp>
         <p:nvSpPr>
-          <p:cNvPr id="58451828" name="Google Shape;86;p1:notes"/>
+          <p:cNvPr id="882171254" name="Google Shape;86;p1:notes"/>
           <p:cNvSpPr txBox="1">
             <a:spLocks noGrp="1"/>
           </p:cNvSpPr>
@@ -7012,7 +7012,7 @@
       </p:sp>
       <p:sp>
         <p:nvSpPr>
-          <p:cNvPr id="1009622608" name="Google Shape;87;p1:notes"/>
+          <p:cNvPr id="246958796" name="Google Shape;87;p1:notes"/>
           <p:cNvSpPr txBox="1">
             <a:spLocks noGrp="1"/>
           </p:cNvSpPr>
@@ -7077,7 +7077,7 @@
       </p:grpSpPr>
       <p:sp>
         <p:nvSpPr>
-          <p:cNvPr id="2115507984" name="Google Shape;85;p1:notes"/>
+          <p:cNvPr id="134408224" name="Google Shape;85;p1:notes"/>
           <p:cNvSpPr>
             <a:spLocks noChangeAspect="1" noGrp="1" noRot="1"/>
           </p:cNvSpPr>
@@ -7128,7 +7128,7 @@
       </p:sp>
       <p:sp>
         <p:nvSpPr>
-          <p:cNvPr id="1203821239" name="Google Shape;86;p1:notes"/>
+          <p:cNvPr id="477864717" name="Google Shape;86;p1:notes"/>
           <p:cNvSpPr txBox="1">
             <a:spLocks noGrp="1"/>
           </p:cNvSpPr>
@@ -7164,7 +7164,7 @@
       </p:sp>
       <p:sp>
         <p:nvSpPr>
-          <p:cNvPr id="634759151" name="Google Shape;87;p1:notes"/>
+          <p:cNvPr id="624773021" name="Google Shape;87;p1:notes"/>
           <p:cNvSpPr txBox="1">
             <a:spLocks noGrp="1"/>
           </p:cNvSpPr>
@@ -7229,7 +7229,7 @@
       </p:grpSpPr>
       <p:sp>
         <p:nvSpPr>
-          <p:cNvPr id="232294536" name="Google Shape;85;p1:notes"/>
+          <p:cNvPr id="838835410" name="Google Shape;85;p1:notes"/>
           <p:cNvSpPr>
             <a:spLocks noChangeAspect="1" noGrp="1" noRot="1"/>
           </p:cNvSpPr>
@@ -7280,7 +7280,7 @@
       </p:sp>
       <p:sp>
         <p:nvSpPr>
-          <p:cNvPr id="561033066" name="Google Shape;86;p1:notes"/>
+          <p:cNvPr id="728321105" name="Google Shape;86;p1:notes"/>
           <p:cNvSpPr txBox="1">
             <a:spLocks noGrp="1"/>
           </p:cNvSpPr>
@@ -7316,7 +7316,7 @@
       </p:sp>
       <p:sp>
         <p:nvSpPr>
-          <p:cNvPr id="211434728" name="Google Shape;87;p1:notes"/>
+          <p:cNvPr id="917991135" name="Google Shape;87;p1:notes"/>
           <p:cNvSpPr txBox="1">
             <a:spLocks noGrp="1"/>
           </p:cNvSpPr>
@@ -7381,7 +7381,7 @@
       </p:grpSpPr>
       <p:sp>
         <p:nvSpPr>
-          <p:cNvPr id="297207081" name="Google Shape;85;p1:notes"/>
+          <p:cNvPr id="1482405116" name="Google Shape;85;p1:notes"/>
           <p:cNvSpPr>
             <a:spLocks noChangeAspect="1" noGrp="1" noRot="1"/>
           </p:cNvSpPr>
@@ -7432,7 +7432,7 @@
       </p:sp>
       <p:sp>
         <p:nvSpPr>
-          <p:cNvPr id="924506120" name="Google Shape;86;p1:notes"/>
+          <p:cNvPr id="752728544" name="Google Shape;86;p1:notes"/>
           <p:cNvSpPr txBox="1">
             <a:spLocks noGrp="1"/>
           </p:cNvSpPr>
@@ -7468,7 +7468,7 @@
       </p:sp>
       <p:sp>
         <p:nvSpPr>
-          <p:cNvPr id="1825938355" name="Google Shape;87;p1:notes"/>
+          <p:cNvPr id="560367988" name="Google Shape;87;p1:notes"/>
           <p:cNvSpPr txBox="1">
             <a:spLocks noGrp="1"/>
           </p:cNvSpPr>
@@ -7533,7 +7533,7 @@
       </p:grpSpPr>
       <p:sp>
         <p:nvSpPr>
-          <p:cNvPr id="722538200" name="Google Shape;85;p1:notes"/>
+          <p:cNvPr id="218973500" name="Google Shape;85;p1:notes"/>
           <p:cNvSpPr>
             <a:spLocks noChangeAspect="1" noGrp="1" noRot="1"/>
           </p:cNvSpPr>
@@ -7584,7 +7584,7 @@
       </p:sp>
       <p:sp>
         <p:nvSpPr>
-          <p:cNvPr id="344579695" name="Google Shape;86;p1:notes"/>
+          <p:cNvPr id="2059057154" name="Google Shape;86;p1:notes"/>
           <p:cNvSpPr txBox="1">
             <a:spLocks noGrp="1"/>
           </p:cNvSpPr>
@@ -7620,7 +7620,7 @@
       </p:sp>
       <p:sp>
         <p:nvSpPr>
-          <p:cNvPr id="1698014937" name="Google Shape;87;p1:notes"/>
+          <p:cNvPr id="845755240" name="Google Shape;87;p1:notes"/>
           <p:cNvSpPr txBox="1">
             <a:spLocks noGrp="1"/>
           </p:cNvSpPr>
@@ -7685,7 +7685,7 @@
       </p:grpSpPr>
       <p:sp>
         <p:nvSpPr>
-          <p:cNvPr id="1288527642" name="Google Shape;85;p1:notes"/>
+          <p:cNvPr id="1153894341" name="Google Shape;85;p1:notes"/>
           <p:cNvSpPr>
             <a:spLocks noChangeAspect="1" noGrp="1" noRot="1"/>
           </p:cNvSpPr>
@@ -7736,7 +7736,7 @@
       </p:sp>
       <p:sp>
         <p:nvSpPr>
-          <p:cNvPr id="499420607" name="Google Shape;86;p1:notes"/>
+          <p:cNvPr id="1917796787" name="Google Shape;86;p1:notes"/>
           <p:cNvSpPr txBox="1">
             <a:spLocks noGrp="1"/>
           </p:cNvSpPr>
@@ -7772,7 +7772,7 @@
       </p:sp>
       <p:sp>
         <p:nvSpPr>
-          <p:cNvPr id="1803309194" name="Google Shape;87;p1:notes"/>
+          <p:cNvPr id="663660944" name="Google Shape;87;p1:notes"/>
           <p:cNvSpPr txBox="1">
             <a:spLocks noGrp="1"/>
           </p:cNvSpPr>
@@ -7837,7 +7837,7 @@
       </p:grpSpPr>
       <p:sp>
         <p:nvSpPr>
-          <p:cNvPr id="86714513" name="Google Shape;85;p1:notes"/>
+          <p:cNvPr id="425721036" name="Google Shape;85;p1:notes"/>
           <p:cNvSpPr>
             <a:spLocks noChangeAspect="1" noGrp="1" noRot="1"/>
           </p:cNvSpPr>
@@ -7888,7 +7888,7 @@
       </p:sp>
       <p:sp>
         <p:nvSpPr>
-          <p:cNvPr id="153211860" name="Google Shape;86;p1:notes"/>
+          <p:cNvPr id="2063519647" name="Google Shape;86;p1:notes"/>
           <p:cNvSpPr txBox="1">
             <a:spLocks noGrp="1"/>
           </p:cNvSpPr>
@@ -7924,7 +7924,7 @@
       </p:sp>
       <p:sp>
         <p:nvSpPr>
-          <p:cNvPr id="1022034988" name="Google Shape;87;p1:notes"/>
+          <p:cNvPr id="1369943978" name="Google Shape;87;p1:notes"/>
           <p:cNvSpPr txBox="1">
             <a:spLocks noGrp="1"/>
           </p:cNvSpPr>
@@ -7989,7 +7989,7 @@
       </p:grpSpPr>
       <p:sp>
         <p:nvSpPr>
-          <p:cNvPr id="1908616397" name="Google Shape;85;p1:notes"/>
+          <p:cNvPr id="131759377" name="Google Shape;85;p1:notes"/>
           <p:cNvSpPr>
             <a:spLocks noChangeAspect="1" noGrp="1" noRot="1"/>
           </p:cNvSpPr>
@@ -8040,7 +8040,7 @@
       </p:sp>
       <p:sp>
         <p:nvSpPr>
-          <p:cNvPr id="1531499463" name="Google Shape;86;p1:notes"/>
+          <p:cNvPr id="2073143445" name="Google Shape;86;p1:notes"/>
           <p:cNvSpPr txBox="1">
             <a:spLocks noGrp="1"/>
           </p:cNvSpPr>
@@ -8076,7 +8076,7 @@
       </p:sp>
       <p:sp>
         <p:nvSpPr>
-          <p:cNvPr id="1467774704" name="Google Shape;87;p1:notes"/>
+          <p:cNvPr id="10747622" name="Google Shape;87;p1:notes"/>
           <p:cNvSpPr txBox="1">
             <a:spLocks noGrp="1"/>
           </p:cNvSpPr>
@@ -8141,7 +8141,7 @@
       </p:grpSpPr>
       <p:sp>
         <p:nvSpPr>
-          <p:cNvPr id="498727178" name="Google Shape;85;p1:notes"/>
+          <p:cNvPr id="1775802983" name="Google Shape;85;p1:notes"/>
           <p:cNvSpPr>
             <a:spLocks noChangeAspect="1" noGrp="1" noRot="1"/>
           </p:cNvSpPr>
@@ -8192,7 +8192,7 @@
       </p:sp>
       <p:sp>
         <p:nvSpPr>
-          <p:cNvPr id="1575433366" name="Google Shape;86;p1:notes"/>
+          <p:cNvPr id="380915131" name="Google Shape;86;p1:notes"/>
           <p:cNvSpPr txBox="1">
             <a:spLocks noGrp="1"/>
           </p:cNvSpPr>
@@ -8228,7 +8228,7 @@
       </p:sp>
       <p:sp>
         <p:nvSpPr>
-          <p:cNvPr id="521499550" name="Google Shape;87;p1:notes"/>
+          <p:cNvPr id="902781390" name="Google Shape;87;p1:notes"/>
           <p:cNvSpPr txBox="1">
             <a:spLocks noGrp="1"/>
           </p:cNvSpPr>
@@ -8293,7 +8293,7 @@
       </p:grpSpPr>
       <p:sp>
         <p:nvSpPr>
-          <p:cNvPr id="940048521" name="Google Shape;85;p1:notes"/>
+          <p:cNvPr id="500851231" name="Google Shape;85;p1:notes"/>
           <p:cNvSpPr>
             <a:spLocks noChangeAspect="1" noGrp="1" noRot="1"/>
           </p:cNvSpPr>
@@ -8344,7 +8344,7 @@
       </p:sp>
       <p:sp>
         <p:nvSpPr>
-          <p:cNvPr id="1560843834" name="Google Shape;86;p1:notes"/>
+          <p:cNvPr id="1280604146" name="Google Shape;86;p1:notes"/>
           <p:cNvSpPr txBox="1">
             <a:spLocks noGrp="1"/>
           </p:cNvSpPr>
@@ -8380,7 +8380,7 @@
       </p:sp>
       <p:sp>
         <p:nvSpPr>
-          <p:cNvPr id="1359462879" name="Google Shape;87;p1:notes"/>
+          <p:cNvPr id="1208123489" name="Google Shape;87;p1:notes"/>
           <p:cNvSpPr txBox="1">
             <a:spLocks noGrp="1"/>
           </p:cNvSpPr>
@@ -8445,7 +8445,7 @@
       </p:grpSpPr>
       <p:sp>
         <p:nvSpPr>
-          <p:cNvPr id="1997379017" name="Google Shape;85;p1:notes"/>
+          <p:cNvPr id="425814596" name="Google Shape;85;p1:notes"/>
           <p:cNvSpPr>
             <a:spLocks noChangeAspect="1" noGrp="1" noRot="1"/>
           </p:cNvSpPr>
@@ -8496,7 +8496,7 @@
       </p:sp>
       <p:sp>
         <p:nvSpPr>
-          <p:cNvPr id="1998078779" name="Google Shape;86;p1:notes"/>
+          <p:cNvPr id="1013198501" name="Google Shape;86;p1:notes"/>
           <p:cNvSpPr txBox="1">
             <a:spLocks noGrp="1"/>
           </p:cNvSpPr>
@@ -8532,7 +8532,7 @@
       </p:sp>
       <p:sp>
         <p:nvSpPr>
-          <p:cNvPr id="1550555272" name="Google Shape;87;p1:notes"/>
+          <p:cNvPr id="1239795591" name="Google Shape;87;p1:notes"/>
           <p:cNvSpPr txBox="1">
             <a:spLocks noGrp="1"/>
           </p:cNvSpPr>
@@ -8597,7 +8597,7 @@
       </p:grpSpPr>
       <p:sp>
         <p:nvSpPr>
-          <p:cNvPr id="703328875" name="Google Shape;85;p1:notes"/>
+          <p:cNvPr id="806660451" name="Google Shape;85;p1:notes"/>
           <p:cNvSpPr>
             <a:spLocks noChangeAspect="1" noGrp="1" noRot="1"/>
           </p:cNvSpPr>
@@ -8648,7 +8648,7 @@
       </p:sp>
       <p:sp>
         <p:nvSpPr>
-          <p:cNvPr id="79203438" name="Google Shape;86;p1:notes"/>
+          <p:cNvPr id="1616898089" name="Google Shape;86;p1:notes"/>
           <p:cNvSpPr txBox="1">
             <a:spLocks noGrp="1"/>
           </p:cNvSpPr>
@@ -8684,7 +8684,7 @@
       </p:sp>
       <p:sp>
         <p:nvSpPr>
-          <p:cNvPr id="655514878" name="Google Shape;87;p1:notes"/>
+          <p:cNvPr id="1075758719" name="Google Shape;87;p1:notes"/>
           <p:cNvSpPr txBox="1">
             <a:spLocks noGrp="1"/>
           </p:cNvSpPr>
@@ -8749,7 +8749,7 @@
       </p:grpSpPr>
       <p:sp>
         <p:nvSpPr>
-          <p:cNvPr id="1141594968" name="Google Shape;16;p18"/>
+          <p:cNvPr id="166153593" name="Google Shape;16;p18"/>
           <p:cNvSpPr txBox="1">
             <a:spLocks noGrp="1"/>
           </p:cNvSpPr>
@@ -8892,7 +8892,7 @@
       </p:sp>
       <p:sp>
         <p:nvSpPr>
-          <p:cNvPr id="323244476" name="Google Shape;17;p18"/>
+          <p:cNvPr id="1440167142" name="Google Shape;17;p18"/>
           <p:cNvSpPr txBox="1">
             <a:spLocks noGrp="1"/>
           </p:cNvSpPr>
@@ -9082,7 +9082,7 @@
       </p:sp>
       <p:sp>
         <p:nvSpPr>
-          <p:cNvPr id="1305772933" name="Google Shape;18;p18"/>
+          <p:cNvPr id="1264107912" name="Google Shape;18;p18"/>
           <p:cNvSpPr txBox="1">
             <a:spLocks noGrp="1"/>
           </p:cNvSpPr>
@@ -9218,7 +9218,7 @@
       </p:sp>
       <p:sp>
         <p:nvSpPr>
-          <p:cNvPr id="1714028023" name="Google Shape;19;p18"/>
+          <p:cNvPr id="1168230487" name="Google Shape;19;p18"/>
           <p:cNvSpPr txBox="1">
             <a:spLocks noGrp="1"/>
           </p:cNvSpPr>
@@ -9354,7 +9354,7 @@
       </p:sp>
       <p:sp>
         <p:nvSpPr>
-          <p:cNvPr id="1825670645" name="Google Shape;20;p18"/>
+          <p:cNvPr id="644140404" name="Google Shape;20;p18"/>
           <p:cNvSpPr txBox="1">
             <a:spLocks noGrp="1"/>
           </p:cNvSpPr>
@@ -9490,7 +9490,7 @@
       </p:grpSpPr>
       <p:sp>
         <p:nvSpPr>
-          <p:cNvPr id="85085856" name="Google Shape;73;p27"/>
+          <p:cNvPr id="1324806870" name="Google Shape;73;p27"/>
           <p:cNvSpPr txBox="1">
             <a:spLocks noGrp="1"/>
           </p:cNvSpPr>
@@ -9632,7 +9632,7 @@
       </p:sp>
       <p:sp>
         <p:nvSpPr>
-          <p:cNvPr id="2120057977" name="Google Shape;74;p27"/>
+          <p:cNvPr id="1203409817" name="Google Shape;74;p27"/>
           <p:cNvSpPr txBox="1">
             <a:spLocks noGrp="1"/>
           </p:cNvSpPr>
@@ -9822,7 +9822,7 @@
       </p:sp>
       <p:sp>
         <p:nvSpPr>
-          <p:cNvPr id="1095375151" name="Google Shape;75;p27"/>
+          <p:cNvPr id="1671402346" name="Google Shape;75;p27"/>
           <p:cNvSpPr txBox="1">
             <a:spLocks noGrp="1"/>
           </p:cNvSpPr>
@@ -9958,7 +9958,7 @@
       </p:sp>
       <p:sp>
         <p:nvSpPr>
-          <p:cNvPr id="1261599918" name="Google Shape;76;p27"/>
+          <p:cNvPr id="2117554357" name="Google Shape;76;p27"/>
           <p:cNvSpPr txBox="1">
             <a:spLocks noGrp="1"/>
           </p:cNvSpPr>
@@ -10094,7 +10094,7 @@
       </p:sp>
       <p:sp>
         <p:nvSpPr>
-          <p:cNvPr id="1693881901" name="Google Shape;77;p27"/>
+          <p:cNvPr id="810334511" name="Google Shape;77;p27"/>
           <p:cNvSpPr txBox="1">
             <a:spLocks noGrp="1"/>
           </p:cNvSpPr>
@@ -10230,7 +10230,7 @@
       </p:grpSpPr>
       <p:sp>
         <p:nvSpPr>
-          <p:cNvPr id="1059122326" name="Google Shape;79;p28"/>
+          <p:cNvPr id="1313857495" name="Google Shape;79;p28"/>
           <p:cNvSpPr txBox="1">
             <a:spLocks noGrp="1"/>
           </p:cNvSpPr>
@@ -10372,7 +10372,7 @@
       </p:sp>
       <p:sp>
         <p:nvSpPr>
-          <p:cNvPr id="1640705547" name="Google Shape;80;p28"/>
+          <p:cNvPr id="745793885" name="Google Shape;80;p28"/>
           <p:cNvSpPr txBox="1">
             <a:spLocks noGrp="1"/>
           </p:cNvSpPr>
@@ -10562,7 +10562,7 @@
       </p:sp>
       <p:sp>
         <p:nvSpPr>
-          <p:cNvPr id="449390867" name="Google Shape;81;p28"/>
+          <p:cNvPr id="1466129735" name="Google Shape;81;p28"/>
           <p:cNvSpPr txBox="1">
             <a:spLocks noGrp="1"/>
           </p:cNvSpPr>
@@ -10698,7 +10698,7 @@
       </p:sp>
       <p:sp>
         <p:nvSpPr>
-          <p:cNvPr id="1409222523" name="Google Shape;82;p28"/>
+          <p:cNvPr id="502218931" name="Google Shape;82;p28"/>
           <p:cNvSpPr txBox="1">
             <a:spLocks noGrp="1"/>
           </p:cNvSpPr>
@@ -10834,7 +10834,7 @@
       </p:sp>
       <p:sp>
         <p:nvSpPr>
-          <p:cNvPr id="64440536" name="Google Shape;83;p28"/>
+          <p:cNvPr id="59149029" name="Google Shape;83;p28"/>
           <p:cNvSpPr txBox="1">
             <a:spLocks noGrp="1"/>
           </p:cNvSpPr>
@@ -10970,7 +10970,7 @@
       </p:grpSpPr>
       <p:sp>
         <p:nvSpPr>
-          <p:cNvPr id="695504063" name="Google Shape;22;p19"/>
+          <p:cNvPr id="582538068" name="Google Shape;22;p19"/>
           <p:cNvSpPr txBox="1">
             <a:spLocks noGrp="1"/>
           </p:cNvSpPr>
@@ -11112,7 +11112,7 @@
       </p:sp>
       <p:sp>
         <p:nvSpPr>
-          <p:cNvPr id="1999334128" name="Google Shape;23;p19"/>
+          <p:cNvPr id="1457509274" name="Google Shape;23;p19"/>
           <p:cNvSpPr txBox="1">
             <a:spLocks noGrp="1"/>
           </p:cNvSpPr>
@@ -11302,7 +11302,7 @@
       </p:sp>
       <p:sp>
         <p:nvSpPr>
-          <p:cNvPr id="1405386009" name="Google Shape;24;p19"/>
+          <p:cNvPr id="191867340" name="Google Shape;24;p19"/>
           <p:cNvSpPr txBox="1">
             <a:spLocks noGrp="1"/>
           </p:cNvSpPr>
@@ -11438,7 +11438,7 @@
       </p:sp>
       <p:sp>
         <p:nvSpPr>
-          <p:cNvPr id="1376486560" name="Google Shape;25;p19"/>
+          <p:cNvPr id="782506275" name="Google Shape;25;p19"/>
           <p:cNvSpPr txBox="1">
             <a:spLocks noGrp="1"/>
           </p:cNvSpPr>
@@ -11574,7 +11574,7 @@
       </p:sp>
       <p:sp>
         <p:nvSpPr>
-          <p:cNvPr id="395647019" name="Google Shape;26;p19"/>
+          <p:cNvPr id="347553350" name="Google Shape;26;p19"/>
           <p:cNvSpPr txBox="1">
             <a:spLocks noGrp="1"/>
           </p:cNvSpPr>
@@ -11710,7 +11710,7 @@
       </p:grpSpPr>
       <p:sp>
         <p:nvSpPr>
-          <p:cNvPr id="1261637043" name="Google Shape;28;p20"/>
+          <p:cNvPr id="1747309623" name="Google Shape;28;p20"/>
           <p:cNvSpPr txBox="1">
             <a:spLocks noGrp="1"/>
           </p:cNvSpPr>
@@ -11853,7 +11853,7 @@
       </p:sp>
       <p:sp>
         <p:nvSpPr>
-          <p:cNvPr id="409842252" name="Google Shape;29;p20"/>
+          <p:cNvPr id="524693200" name="Google Shape;29;p20"/>
           <p:cNvSpPr txBox="1">
             <a:spLocks noGrp="1"/>
           </p:cNvSpPr>
@@ -12079,7 +12079,7 @@
       </p:sp>
       <p:sp>
         <p:nvSpPr>
-          <p:cNvPr id="602761998" name="Google Shape;30;p20"/>
+          <p:cNvPr id="1508815086" name="Google Shape;30;p20"/>
           <p:cNvSpPr txBox="1">
             <a:spLocks noGrp="1"/>
           </p:cNvSpPr>
@@ -12215,7 +12215,7 @@
       </p:sp>
       <p:sp>
         <p:nvSpPr>
-          <p:cNvPr id="1623699320" name="Google Shape;31;p20"/>
+          <p:cNvPr id="784150951" name="Google Shape;31;p20"/>
           <p:cNvSpPr txBox="1">
             <a:spLocks noGrp="1"/>
           </p:cNvSpPr>
@@ -12351,7 +12351,7 @@
       </p:sp>
       <p:sp>
         <p:nvSpPr>
-          <p:cNvPr id="208560533" name="Google Shape;32;p20"/>
+          <p:cNvPr id="1332952800" name="Google Shape;32;p20"/>
           <p:cNvSpPr txBox="1">
             <a:spLocks noGrp="1"/>
           </p:cNvSpPr>
@@ -12487,7 +12487,7 @@
       </p:grpSpPr>
       <p:sp>
         <p:nvSpPr>
-          <p:cNvPr id="726969119" name="Google Shape;34;p21"/>
+          <p:cNvPr id="1354953705" name="Google Shape;34;p21"/>
           <p:cNvSpPr txBox="1">
             <a:spLocks noGrp="1"/>
           </p:cNvSpPr>
@@ -12629,7 +12629,7 @@
       </p:sp>
       <p:sp>
         <p:nvSpPr>
-          <p:cNvPr id="1348545753" name="Google Shape;35;p21"/>
+          <p:cNvPr id="1425173700" name="Google Shape;35;p21"/>
           <p:cNvSpPr txBox="1">
             <a:spLocks noGrp="1"/>
           </p:cNvSpPr>
@@ -12819,7 +12819,7 @@
       </p:sp>
       <p:sp>
         <p:nvSpPr>
-          <p:cNvPr id="1991578805" name="Google Shape;36;p21"/>
+          <p:cNvPr id="2142167704" name="Google Shape;36;p21"/>
           <p:cNvSpPr txBox="1">
             <a:spLocks noGrp="1"/>
           </p:cNvSpPr>
@@ -13009,7 +13009,7 @@
       </p:sp>
       <p:sp>
         <p:nvSpPr>
-          <p:cNvPr id="941508422" name="Google Shape;37;p21"/>
+          <p:cNvPr id="922854041" name="Google Shape;37;p21"/>
           <p:cNvSpPr txBox="1">
             <a:spLocks noGrp="1"/>
           </p:cNvSpPr>
@@ -13145,7 +13145,7 @@
       </p:sp>
       <p:sp>
         <p:nvSpPr>
-          <p:cNvPr id="1018089612" name="Google Shape;38;p21"/>
+          <p:cNvPr id="595006151" name="Google Shape;38;p21"/>
           <p:cNvSpPr txBox="1">
             <a:spLocks noGrp="1"/>
           </p:cNvSpPr>
@@ -13281,7 +13281,7 @@
       </p:sp>
       <p:sp>
         <p:nvSpPr>
-          <p:cNvPr id="2086833310" name="Google Shape;39;p21"/>
+          <p:cNvPr id="1884607343" name="Google Shape;39;p21"/>
           <p:cNvSpPr txBox="1">
             <a:spLocks noGrp="1"/>
           </p:cNvSpPr>
@@ -13417,7 +13417,7 @@
       </p:grpSpPr>
       <p:sp>
         <p:nvSpPr>
-          <p:cNvPr id="857120664" name="Google Shape;41;p22"/>
+          <p:cNvPr id="717500664" name="Google Shape;41;p22"/>
           <p:cNvSpPr txBox="1">
             <a:spLocks noGrp="1"/>
           </p:cNvSpPr>
@@ -13559,7 +13559,7 @@
       </p:sp>
       <p:sp>
         <p:nvSpPr>
-          <p:cNvPr id="1786244316" name="Google Shape;42;p22"/>
+          <p:cNvPr id="2038856946" name="Google Shape;42;p22"/>
           <p:cNvSpPr txBox="1">
             <a:spLocks noGrp="1"/>
           </p:cNvSpPr>
@@ -13749,7 +13749,7 @@
       </p:sp>
       <p:sp>
         <p:nvSpPr>
-          <p:cNvPr id="1618440293" name="Google Shape;43;p22"/>
+          <p:cNvPr id="1763815157" name="Google Shape;43;p22"/>
           <p:cNvSpPr txBox="1">
             <a:spLocks noGrp="1"/>
           </p:cNvSpPr>
@@ -13939,7 +13939,7 @@
       </p:sp>
       <p:sp>
         <p:nvSpPr>
-          <p:cNvPr id="106950216" name="Google Shape;44;p22"/>
+          <p:cNvPr id="1751362369" name="Google Shape;44;p22"/>
           <p:cNvSpPr txBox="1">
             <a:spLocks noGrp="1"/>
           </p:cNvSpPr>
@@ -14129,7 +14129,7 @@
       </p:sp>
       <p:sp>
         <p:nvSpPr>
-          <p:cNvPr id="1291791046" name="Google Shape;45;p22"/>
+          <p:cNvPr id="1303482038" name="Google Shape;45;p22"/>
           <p:cNvSpPr txBox="1">
             <a:spLocks noGrp="1"/>
           </p:cNvSpPr>
@@ -14319,7 +14319,7 @@
       </p:sp>
       <p:sp>
         <p:nvSpPr>
-          <p:cNvPr id="933552381" name="Google Shape;46;p22"/>
+          <p:cNvPr id="26966191" name="Google Shape;46;p22"/>
           <p:cNvSpPr txBox="1">
             <a:spLocks noGrp="1"/>
           </p:cNvSpPr>
@@ -14455,7 +14455,7 @@
       </p:sp>
       <p:sp>
         <p:nvSpPr>
-          <p:cNvPr id="1477076869" name="Google Shape;47;p22"/>
+          <p:cNvPr id="492553618" name="Google Shape;47;p22"/>
           <p:cNvSpPr txBox="1">
             <a:spLocks noGrp="1"/>
           </p:cNvSpPr>
@@ -14591,7 +14591,7 @@
       </p:sp>
       <p:sp>
         <p:nvSpPr>
-          <p:cNvPr id="921298960" name="Google Shape;48;p22"/>
+          <p:cNvPr id="1314104589" name="Google Shape;48;p22"/>
           <p:cNvSpPr txBox="1">
             <a:spLocks noGrp="1"/>
           </p:cNvSpPr>
@@ -14727,7 +14727,7 @@
       </p:grpSpPr>
       <p:sp>
         <p:nvSpPr>
-          <p:cNvPr id="2039379451" name="Google Shape;50;p23"/>
+          <p:cNvPr id="67758141" name="Google Shape;50;p23"/>
           <p:cNvSpPr txBox="1">
             <a:spLocks noGrp="1"/>
           </p:cNvSpPr>
@@ -14869,7 +14869,7 @@
       </p:sp>
       <p:sp>
         <p:nvSpPr>
-          <p:cNvPr id="1172991701" name="Google Shape;51;p23"/>
+          <p:cNvPr id="1505449819" name="Google Shape;51;p23"/>
           <p:cNvSpPr txBox="1">
             <a:spLocks noGrp="1"/>
           </p:cNvSpPr>
@@ -15005,7 +15005,7 @@
       </p:sp>
       <p:sp>
         <p:nvSpPr>
-          <p:cNvPr id="234808644" name="Google Shape;52;p23"/>
+          <p:cNvPr id="1230323332" name="Google Shape;52;p23"/>
           <p:cNvSpPr txBox="1">
             <a:spLocks noGrp="1"/>
           </p:cNvSpPr>
@@ -15141,7 +15141,7 @@
       </p:sp>
       <p:sp>
         <p:nvSpPr>
-          <p:cNvPr id="288923519" name="Google Shape;53;p23"/>
+          <p:cNvPr id="1831640402" name="Google Shape;53;p23"/>
           <p:cNvSpPr txBox="1">
             <a:spLocks noGrp="1"/>
           </p:cNvSpPr>
@@ -15277,7 +15277,7 @@
       </p:grpSpPr>
       <p:sp>
         <p:nvSpPr>
-          <p:cNvPr id="1427964955" name="Google Shape;55;p24"/>
+          <p:cNvPr id="224794413" name="Google Shape;55;p24"/>
           <p:cNvSpPr txBox="1">
             <a:spLocks noGrp="1"/>
           </p:cNvSpPr>
@@ -15413,7 +15413,7 @@
       </p:sp>
       <p:sp>
         <p:nvSpPr>
-          <p:cNvPr id="1275416813" name="Google Shape;56;p24"/>
+          <p:cNvPr id="1318926440" name="Google Shape;56;p24"/>
           <p:cNvSpPr txBox="1">
             <a:spLocks noGrp="1"/>
           </p:cNvSpPr>
@@ -15549,7 +15549,7 @@
       </p:sp>
       <p:sp>
         <p:nvSpPr>
-          <p:cNvPr id="786803306" name="Google Shape;57;p24"/>
+          <p:cNvPr id="601848124" name="Google Shape;57;p24"/>
           <p:cNvSpPr txBox="1">
             <a:spLocks noGrp="1"/>
           </p:cNvSpPr>
@@ -15685,7 +15685,7 @@
       </p:grpSpPr>
       <p:sp>
         <p:nvSpPr>
-          <p:cNvPr id="2145267721" name="Google Shape;59;p25"/>
+          <p:cNvPr id="1688674971" name="Google Shape;59;p25"/>
           <p:cNvSpPr txBox="1">
             <a:spLocks noGrp="1"/>
           </p:cNvSpPr>
@@ -15828,7 +15828,7 @@
       </p:sp>
       <p:sp>
         <p:nvSpPr>
-          <p:cNvPr id="104233806" name="Google Shape;60;p25"/>
+          <p:cNvPr id="336147321" name="Google Shape;60;p25"/>
           <p:cNvSpPr txBox="1">
             <a:spLocks noGrp="1"/>
           </p:cNvSpPr>
@@ -16018,7 +16018,7 @@
       </p:sp>
       <p:sp>
         <p:nvSpPr>
-          <p:cNvPr id="1613759271" name="Google Shape;61;p25"/>
+          <p:cNvPr id="639649976" name="Google Shape;61;p25"/>
           <p:cNvSpPr txBox="1">
             <a:spLocks noGrp="1"/>
           </p:cNvSpPr>
@@ -16208,7 +16208,7 @@
       </p:sp>
       <p:sp>
         <p:nvSpPr>
-          <p:cNvPr id="1816155322" name="Google Shape;62;p25"/>
+          <p:cNvPr id="1528860410" name="Google Shape;62;p25"/>
           <p:cNvSpPr txBox="1">
             <a:spLocks noGrp="1"/>
           </p:cNvSpPr>
@@ -16344,7 +16344,7 @@
       </p:sp>
       <p:sp>
         <p:nvSpPr>
-          <p:cNvPr id="114860156" name="Google Shape;63;p25"/>
+          <p:cNvPr id="1951863682" name="Google Shape;63;p25"/>
           <p:cNvSpPr txBox="1">
             <a:spLocks noGrp="1"/>
           </p:cNvSpPr>
@@ -16480,7 +16480,7 @@
       </p:sp>
       <p:sp>
         <p:nvSpPr>
-          <p:cNvPr id="514756059" name="Google Shape;64;p25"/>
+          <p:cNvPr id="1512298181" name="Google Shape;64;p25"/>
           <p:cNvSpPr txBox="1">
             <a:spLocks noGrp="1"/>
           </p:cNvSpPr>
@@ -16616,7 +16616,7 @@
       </p:grpSpPr>
       <p:sp>
         <p:nvSpPr>
-          <p:cNvPr id="798721538" name="Google Shape;66;p26"/>
+          <p:cNvPr id="1551719467" name="Google Shape;66;p26"/>
           <p:cNvSpPr txBox="1">
             <a:spLocks noGrp="1"/>
           </p:cNvSpPr>
@@ -16759,7 +16759,7 @@
       </p:sp>
       <p:sp>
         <p:nvSpPr>
-          <p:cNvPr id="211252592" name="Google Shape;67;p26"/>
+          <p:cNvPr id="732501143" name="Google Shape;67;p26"/>
           <p:cNvSpPr>
             <a:spLocks noGrp="1"/>
           </p:cNvSpPr>
@@ -16783,7 +16783,7 @@
       </p:sp>
       <p:sp>
         <p:nvSpPr>
-          <p:cNvPr id="1321170517" name="Google Shape;68;p26"/>
+          <p:cNvPr id="2018392106" name="Google Shape;68;p26"/>
           <p:cNvSpPr txBox="1">
             <a:spLocks noGrp="1"/>
           </p:cNvSpPr>
@@ -16973,7 +16973,7 @@
       </p:sp>
       <p:sp>
         <p:nvSpPr>
-          <p:cNvPr id="893438534" name="Google Shape;69;p26"/>
+          <p:cNvPr id="933416947" name="Google Shape;69;p26"/>
           <p:cNvSpPr txBox="1">
             <a:spLocks noGrp="1"/>
           </p:cNvSpPr>
@@ -17109,7 +17109,7 @@
       </p:sp>
       <p:sp>
         <p:nvSpPr>
-          <p:cNvPr id="139528623" name="Google Shape;70;p26"/>
+          <p:cNvPr id="1765751815" name="Google Shape;70;p26"/>
           <p:cNvSpPr txBox="1">
             <a:spLocks noGrp="1"/>
           </p:cNvSpPr>
@@ -17245,7 +17245,7 @@
       </p:sp>
       <p:sp>
         <p:nvSpPr>
-          <p:cNvPr id="951731387" name="Google Shape;71;p26"/>
+          <p:cNvPr id="1578290185" name="Google Shape;71;p26"/>
           <p:cNvSpPr txBox="1">
             <a:spLocks noGrp="1"/>
           </p:cNvSpPr>
@@ -17388,7 +17388,7 @@
       </p:grpSpPr>
       <p:sp>
         <p:nvSpPr>
-          <p:cNvPr id="977691024" name="Google Shape;10;p17"/>
+          <p:cNvPr id="2030566902" name="Google Shape;10;p17"/>
           <p:cNvSpPr txBox="1">
             <a:spLocks noGrp="1"/>
           </p:cNvSpPr>
@@ -17538,7 +17538,7 @@
       </p:sp>
       <p:sp>
         <p:nvSpPr>
-          <p:cNvPr id="1548899258" name="Google Shape;11;p17"/>
+          <p:cNvPr id="1419937795" name="Google Shape;11;p17"/>
           <p:cNvSpPr txBox="1">
             <a:spLocks noGrp="1"/>
           </p:cNvSpPr>
@@ -17800,7 +17800,7 @@
       </p:sp>
       <p:sp>
         <p:nvSpPr>
-          <p:cNvPr id="239712378" name="Google Shape;12;p17"/>
+          <p:cNvPr id="1012146460" name="Google Shape;12;p17"/>
           <p:cNvSpPr txBox="1">
             <a:spLocks noGrp="1"/>
           </p:cNvSpPr>
@@ -17999,7 +17999,7 @@
       </p:sp>
       <p:sp>
         <p:nvSpPr>
-          <p:cNvPr id="510689263" name="Google Shape;13;p17"/>
+          <p:cNvPr id="1064945173" name="Google Shape;13;p17"/>
           <p:cNvSpPr txBox="1">
             <a:spLocks noGrp="1"/>
           </p:cNvSpPr>
@@ -18198,7 +18198,7 @@
       </p:sp>
       <p:sp>
         <p:nvSpPr>
-          <p:cNvPr id="341658232" name="Google Shape;14;p17"/>
+          <p:cNvPr id="417974702" name="Google Shape;14;p17"/>
           <p:cNvSpPr txBox="1">
             <a:spLocks noGrp="1"/>
           </p:cNvSpPr>
@@ -19081,7 +19081,7 @@
       </p:grpSpPr>
       <p:sp>
         <p:nvSpPr>
-          <p:cNvPr id="1656568240" name="Google Shape;90;p1"/>
+          <p:cNvPr id="864240787" name="Google Shape;90;p1"/>
           <p:cNvSpPr txBox="1"/>
           <p:nvPr/>
         </p:nvSpPr>
@@ -19187,7 +19187,7 @@
       </p:sp>
       <p:sp>
         <p:nvSpPr>
-          <p:cNvPr id="1407128354" name="Google Shape;90;p1"/>
+          <p:cNvPr id="494490125" name="Google Shape;90;p1"/>
           <p:cNvSpPr txBox="1"/>
           <p:nvPr/>
         </p:nvSpPr>
@@ -19245,7 +19245,7 @@
       </p:sp>
       <p:sp>
         <p:nvSpPr>
-          <p:cNvPr id="203781818" name="Google Shape;90;p1"/>
+          <p:cNvPr id="1925495681" name="Google Shape;90;p1"/>
           <p:cNvSpPr txBox="1"/>
           <p:nvPr/>
         </p:nvSpPr>
@@ -19375,7 +19375,7 @@
       </p:sp>
       <p:sp>
         <p:nvSpPr>
-          <p:cNvPr id="307368644" name="Google Shape;90;p1"/>
+          <p:cNvPr id="1171249150" name="Google Shape;90;p1"/>
           <p:cNvSpPr txBox="1"/>
           <p:nvPr/>
         </p:nvSpPr>
@@ -19423,7 +19423,7 @@
       </p:sp>
       <p:sp>
         <p:nvSpPr>
-          <p:cNvPr id="971203694" name="Slide Number Placeholder 1"/>
+          <p:cNvPr id="1447915383" name="Slide Number Placeholder 1"/>
           <p:cNvSpPr>
             <a:spLocks noGrp="1"/>
           </p:cNvSpPr>
@@ -19433,7 +19433,7 @@
         </p:nvSpPr>
         <p:spPr bwMode="auto">
           <a:xfrm>
-            <a:off x="6495944" y="5878672"/>
+            <a:off x="8532828" y="5878671"/>
             <a:ext cx="2743200" cy="365124"/>
           </a:xfrm>
         </p:spPr>
@@ -19461,7 +19461,7 @@
       </p:sp>
       <p:sp>
         <p:nvSpPr>
-          <p:cNvPr id="168428544" name="Google Shape;90;p1"/>
+          <p:cNvPr id="1416134766" name="Google Shape;90;p1"/>
           <p:cNvSpPr txBox="1"/>
           <p:nvPr/>
         </p:nvSpPr>
@@ -19511,13 +19511,13 @@
       </p:sp>
       <p:sp>
         <p:nvSpPr>
-          <p:cNvPr id="1263708010" name="Google Shape;90;p1"/>
+          <p:cNvPr id="1084376048" name="Google Shape;90;p1"/>
           <p:cNvSpPr txBox="1"/>
           <p:nvPr/>
         </p:nvSpPr>
         <p:spPr bwMode="auto">
           <a:xfrm flipH="0" flipV="0">
-            <a:off x="1162900" y="5757894"/>
+            <a:off x="1162900" y="5857868"/>
             <a:ext cx="8610319" cy="771854"/>
           </a:xfrm>
           <a:prstGeom prst="rect">
@@ -19622,7 +19622,7 @@
       </p:grpSpPr>
       <p:cxnSp>
         <p:nvCxnSpPr>
-          <p:cNvPr id="338774793" name="直線接點 4"/>
+          <p:cNvPr id="186174781" name="直線接點 4"/>
           <p:cNvCxnSpPr/>
           <p:nvPr/>
         </p:nvCxnSpPr>
@@ -19657,7 +19657,7 @@
       </p:cxnSp>
       <p:sp>
         <p:nvSpPr>
-          <p:cNvPr id="1222886826" name="TextBox 20"/>
+          <p:cNvPr id="1634056188" name="TextBox 20"/>
           <p:cNvSpPr txBox="1"/>
           <p:nvPr/>
         </p:nvSpPr>
@@ -19701,7 +19701,7 @@
       </p:sp>
       <p:sp>
         <p:nvSpPr>
-          <p:cNvPr id="1469533797" name="Slide Number Placeholder 1"/>
+          <p:cNvPr id="1211818771" name="Slide Number Placeholder 1"/>
           <p:cNvSpPr>
             <a:spLocks noGrp="1"/>
           </p:cNvSpPr>
@@ -19734,7 +19734,7 @@
       </p:sp>
       <p:sp>
         <p:nvSpPr>
-          <p:cNvPr id="1136728463" name="Google Shape;90;p1"/>
+          <p:cNvPr id="1112661577" name="Google Shape;90;p1"/>
           <p:cNvSpPr txBox="1"/>
           <p:nvPr/>
         </p:nvSpPr>
@@ -19939,7 +19939,7 @@
       </p:sp>
       <p:sp>
         <p:nvSpPr>
-          <p:cNvPr id="1684446689" name=""/>
+          <p:cNvPr id="2113810883" name=""/>
           <p:cNvSpPr/>
           <p:nvPr/>
         </p:nvSpPr>
@@ -19990,7 +19990,7 @@
       </p:sp>
       <p:sp>
         <p:nvSpPr>
-          <p:cNvPr id="2049174850" name=""/>
+          <p:cNvPr id="1163561480" name=""/>
           <p:cNvSpPr txBox="1"/>
           <p:nvPr/>
         </p:nvSpPr>
@@ -20076,7 +20076,7 @@
       </p:sp>
       <p:sp>
         <p:nvSpPr>
-          <p:cNvPr id="1920036049" name=""/>
+          <p:cNvPr id="1944055566" name=""/>
           <p:cNvSpPr/>
           <p:nvPr/>
         </p:nvSpPr>
@@ -20127,7 +20127,7 @@
       </p:sp>
       <p:sp>
         <p:nvSpPr>
-          <p:cNvPr id="1567552869" name=""/>
+          <p:cNvPr id="531501375" name=""/>
           <p:cNvSpPr/>
           <p:nvPr/>
         </p:nvSpPr>
@@ -20178,7 +20178,7 @@
       </p:sp>
       <p:sp>
         <p:nvSpPr>
-          <p:cNvPr id="786310512" name=""/>
+          <p:cNvPr id="1791182024" name=""/>
           <p:cNvSpPr/>
           <p:nvPr/>
         </p:nvSpPr>
@@ -20229,7 +20229,7 @@
       </p:sp>
       <p:sp>
         <p:nvSpPr>
-          <p:cNvPr id="30909402" name=""/>
+          <p:cNvPr id="2122828202" name=""/>
           <p:cNvSpPr/>
           <p:nvPr/>
         </p:nvSpPr>
@@ -20280,7 +20280,7 @@
       </p:sp>
       <p:sp>
         <p:nvSpPr>
-          <p:cNvPr id="1612083739" name=""/>
+          <p:cNvPr id="1906940246" name=""/>
           <p:cNvSpPr/>
           <p:nvPr/>
         </p:nvSpPr>
@@ -20331,7 +20331,7 @@
       </p:sp>
       <p:sp>
         <p:nvSpPr>
-          <p:cNvPr id="1685240524" name=""/>
+          <p:cNvPr id="287237377" name=""/>
           <p:cNvSpPr/>
           <p:nvPr/>
         </p:nvSpPr>
@@ -20382,7 +20382,7 @@
       </p:sp>
       <p:sp>
         <p:nvSpPr>
-          <p:cNvPr id="436800139" name=""/>
+          <p:cNvPr id="221118283" name=""/>
           <p:cNvSpPr/>
           <p:nvPr/>
         </p:nvSpPr>
@@ -20433,7 +20433,7 @@
       </p:sp>
       <p:sp>
         <p:nvSpPr>
-          <p:cNvPr id="1234598073" name=""/>
+          <p:cNvPr id="721121063" name=""/>
           <p:cNvSpPr/>
           <p:nvPr/>
         </p:nvSpPr>
@@ -20484,7 +20484,7 @@
       </p:sp>
       <p:sp>
         <p:nvSpPr>
-          <p:cNvPr id="2110485682" name=""/>
+          <p:cNvPr id="435587223" name=""/>
           <p:cNvSpPr/>
           <p:nvPr/>
         </p:nvSpPr>
@@ -20535,7 +20535,7 @@
       </p:sp>
       <p:sp>
         <p:nvSpPr>
-          <p:cNvPr id="1571575816" name=""/>
+          <p:cNvPr id="1420707464" name=""/>
           <p:cNvSpPr/>
           <p:nvPr/>
         </p:nvSpPr>
@@ -20586,7 +20586,7 @@
       </p:sp>
       <p:sp>
         <p:nvSpPr>
-          <p:cNvPr id="1286611435" name=""/>
+          <p:cNvPr id="534969795" name=""/>
           <p:cNvSpPr txBox="1"/>
           <p:nvPr/>
         </p:nvSpPr>
@@ -20670,7 +20670,7 @@
       </p:sp>
       <p:sp>
         <p:nvSpPr>
-          <p:cNvPr id="2034960392" name=""/>
+          <p:cNvPr id="1132102242" name=""/>
           <p:cNvSpPr/>
           <p:nvPr/>
         </p:nvSpPr>
@@ -20724,7 +20724,7 @@
       </p:sp>
       <p:sp>
         <p:nvSpPr>
-          <p:cNvPr id="610488907" name=""/>
+          <p:cNvPr id="638426737" name=""/>
           <p:cNvSpPr txBox="1"/>
           <p:nvPr/>
         </p:nvSpPr>
@@ -20793,7 +20793,7 @@
       </p:sp>
       <p:sp>
         <p:nvSpPr>
-          <p:cNvPr id="202106177" name=""/>
+          <p:cNvPr id="325803600" name=""/>
           <p:cNvSpPr txBox="1"/>
           <p:nvPr/>
         </p:nvSpPr>
@@ -20865,7 +20865,7 @@
       </p:sp>
       <p:sp>
         <p:nvSpPr>
-          <p:cNvPr id="1088997193" name=""/>
+          <p:cNvPr id="750917453" name=""/>
           <p:cNvSpPr txBox="1"/>
           <p:nvPr/>
         </p:nvSpPr>
@@ -20931,7 +20931,7 @@
       </p:sp>
       <p:sp>
         <p:nvSpPr>
-          <p:cNvPr id="1644980429" name=""/>
+          <p:cNvPr id="1928819949" name=""/>
           <p:cNvSpPr txBox="1"/>
           <p:nvPr/>
         </p:nvSpPr>
@@ -20999,7 +20999,7 @@
       </p:sp>
       <p:sp>
         <p:nvSpPr>
-          <p:cNvPr id="1830905645" name=""/>
+          <p:cNvPr id="953696265" name=""/>
           <p:cNvSpPr txBox="1"/>
           <p:nvPr/>
         </p:nvSpPr>
@@ -21089,7 +21089,7 @@
       </p:sp>
       <p:sp>
         <p:nvSpPr>
-          <p:cNvPr id="1967799155" name=""/>
+          <p:cNvPr id="125032674" name=""/>
           <p:cNvSpPr txBox="1"/>
           <p:nvPr/>
         </p:nvSpPr>
@@ -21157,7 +21157,7 @@
       </p:sp>
       <p:sp>
         <p:nvSpPr>
-          <p:cNvPr id="1438629704" name=""/>
+          <p:cNvPr id="2064437979" name=""/>
           <p:cNvSpPr txBox="1"/>
           <p:nvPr/>
         </p:nvSpPr>
@@ -21229,7 +21229,7 @@
       </p:sp>
       <p:sp>
         <p:nvSpPr>
-          <p:cNvPr id="524228417" name=""/>
+          <p:cNvPr id="116496987" name=""/>
           <p:cNvSpPr txBox="1"/>
           <p:nvPr/>
         </p:nvSpPr>
@@ -21308,7 +21308,7 @@
       </p:sp>
       <p:sp>
         <p:nvSpPr>
-          <p:cNvPr id="2104207299" name=""/>
+          <p:cNvPr id="1663990730" name=""/>
           <p:cNvSpPr txBox="1"/>
           <p:nvPr/>
         </p:nvSpPr>
@@ -21376,7 +21376,7 @@
       </p:sp>
       <p:sp>
         <p:nvSpPr>
-          <p:cNvPr id="811405312" name=""/>
+          <p:cNvPr id="1279645062" name=""/>
           <p:cNvSpPr txBox="1"/>
           <p:nvPr/>
         </p:nvSpPr>
@@ -21443,7 +21443,7 @@
       </p:sp>
       <p:sp>
         <p:nvSpPr>
-          <p:cNvPr id="598317918" name=""/>
+          <p:cNvPr id="1708502854" name=""/>
           <p:cNvSpPr/>
           <p:nvPr/>
         </p:nvSpPr>
@@ -21497,7 +21497,7 @@
       </p:sp>
       <p:sp>
         <p:nvSpPr>
-          <p:cNvPr id="1903571078" name=""/>
+          <p:cNvPr id="1900054979" name=""/>
           <p:cNvSpPr txBox="1"/>
           <p:nvPr/>
         </p:nvSpPr>
@@ -21565,7 +21565,7 @@
       </p:sp>
       <p:sp>
         <p:nvSpPr>
-          <p:cNvPr id="1116994261" name=""/>
+          <p:cNvPr id="1401945473" name=""/>
           <p:cNvSpPr/>
           <p:nvPr/>
         </p:nvSpPr>
@@ -21619,7 +21619,7 @@
       </p:sp>
       <p:sp>
         <p:nvSpPr>
-          <p:cNvPr id="1652847006" name=""/>
+          <p:cNvPr id="816084522" name=""/>
           <p:cNvSpPr txBox="1"/>
           <p:nvPr/>
         </p:nvSpPr>
@@ -21686,7 +21686,7 @@
       </p:sp>
       <p:sp>
         <p:nvSpPr>
-          <p:cNvPr id="977533340" name=""/>
+          <p:cNvPr id="984168608" name=""/>
           <p:cNvSpPr/>
           <p:nvPr/>
         </p:nvSpPr>
@@ -21740,7 +21740,7 @@
       </p:sp>
       <p:sp>
         <p:nvSpPr>
-          <p:cNvPr id="1768244428" name=""/>
+          <p:cNvPr id="938638541" name=""/>
           <p:cNvSpPr/>
           <p:nvPr/>
         </p:nvSpPr>
@@ -21794,7 +21794,7 @@
       </p:sp>
       <p:sp>
         <p:nvSpPr>
-          <p:cNvPr id="1657366258" name=""/>
+          <p:cNvPr id="1436403184" name=""/>
           <p:cNvSpPr/>
           <p:nvPr/>
         </p:nvSpPr>
@@ -21848,7 +21848,7 @@
       </p:sp>
       <p:sp>
         <p:nvSpPr>
-          <p:cNvPr id="1706653283" name=""/>
+          <p:cNvPr id="1716241714" name=""/>
           <p:cNvSpPr/>
           <p:nvPr/>
         </p:nvSpPr>
@@ -21902,7 +21902,7 @@
       </p:sp>
       <p:sp>
         <p:nvSpPr>
-          <p:cNvPr id="1739137759" name=""/>
+          <p:cNvPr id="1833604426" name=""/>
           <p:cNvSpPr/>
           <p:nvPr/>
         </p:nvSpPr>
@@ -21956,7 +21956,7 @@
       </p:sp>
       <p:sp>
         <p:nvSpPr>
-          <p:cNvPr id="1148377155" name=""/>
+          <p:cNvPr id="1211405979" name=""/>
           <p:cNvSpPr/>
           <p:nvPr/>
         </p:nvSpPr>
@@ -22010,7 +22010,7 @@
       </p:sp>
       <p:sp>
         <p:nvSpPr>
-          <p:cNvPr id="1501727804" name=""/>
+          <p:cNvPr id="206677246" name=""/>
           <p:cNvSpPr txBox="1"/>
           <p:nvPr/>
         </p:nvSpPr>
@@ -22065,7 +22065,7 @@
       </p:sp>
       <p:sp>
         <p:nvSpPr>
-          <p:cNvPr id="136762946" name=""/>
+          <p:cNvPr id="1275711289" name=""/>
           <p:cNvSpPr txBox="1"/>
           <p:nvPr/>
         </p:nvSpPr>
@@ -22120,7 +22120,7 @@
       </p:sp>
       <p:sp>
         <p:nvSpPr>
-          <p:cNvPr id="1332932313" name=""/>
+          <p:cNvPr id="2034743987" name=""/>
           <p:cNvSpPr txBox="1"/>
           <p:nvPr/>
         </p:nvSpPr>
@@ -22199,7 +22199,7 @@
       </p:sp>
       <p:sp>
         <p:nvSpPr>
-          <p:cNvPr id="1915716776" name=""/>
+          <p:cNvPr id="1869657602" name=""/>
           <p:cNvSpPr txBox="1"/>
           <p:nvPr/>
         </p:nvSpPr>
@@ -22254,7 +22254,7 @@
       </p:sp>
       <p:sp>
         <p:nvSpPr>
-          <p:cNvPr id="1988043747" name=""/>
+          <p:cNvPr id="1503880070" name=""/>
           <p:cNvSpPr txBox="1"/>
           <p:nvPr/>
         </p:nvSpPr>
@@ -22321,7 +22321,7 @@
       </p:sp>
       <p:sp>
         <p:nvSpPr>
-          <p:cNvPr id="892335537" name=""/>
+          <p:cNvPr id="804007844" name=""/>
           <p:cNvSpPr txBox="1"/>
           <p:nvPr/>
         </p:nvSpPr>
@@ -22388,7 +22388,7 @@
       </p:sp>
       <p:sp>
         <p:nvSpPr>
-          <p:cNvPr id="593475990" name=""/>
+          <p:cNvPr id="829528988" name=""/>
           <p:cNvSpPr/>
           <p:nvPr/>
         </p:nvSpPr>
@@ -22439,7 +22439,7 @@
       </p:sp>
       <p:sp>
         <p:nvSpPr>
-          <p:cNvPr id="1396308331" name=""/>
+          <p:cNvPr id="206399887" name=""/>
           <p:cNvSpPr txBox="1"/>
           <p:nvPr/>
         </p:nvSpPr>
@@ -22501,7 +22501,7 @@
       </p:sp>
       <p:sp>
         <p:nvSpPr>
-          <p:cNvPr id="979542789" name=""/>
+          <p:cNvPr id="1915771987" name=""/>
           <p:cNvSpPr/>
           <p:nvPr/>
         </p:nvSpPr>
@@ -22552,7 +22552,7 @@
       </p:sp>
       <p:sp>
         <p:nvSpPr>
-          <p:cNvPr id="1365317937" name=""/>
+          <p:cNvPr id="1107191971" name=""/>
           <p:cNvSpPr/>
           <p:nvPr/>
         </p:nvSpPr>
@@ -22603,7 +22603,7 @@
       </p:sp>
       <p:sp>
         <p:nvSpPr>
-          <p:cNvPr id="164139183" name=""/>
+          <p:cNvPr id="1983894567" name=""/>
           <p:cNvSpPr/>
           <p:nvPr/>
         </p:nvSpPr>
@@ -22654,7 +22654,7 @@
       </p:sp>
       <p:sp>
         <p:nvSpPr>
-          <p:cNvPr id="571663393" name=""/>
+          <p:cNvPr id="312623266" name=""/>
           <p:cNvSpPr txBox="1"/>
           <p:nvPr/>
         </p:nvSpPr>
@@ -22715,7 +22715,7 @@
       </p:sp>
       <p:sp>
         <p:nvSpPr>
-          <p:cNvPr id="110449746" name=""/>
+          <p:cNvPr id="843955951" name=""/>
           <p:cNvSpPr txBox="1"/>
           <p:nvPr/>
         </p:nvSpPr>
@@ -22776,7 +22776,7 @@
       </p:sp>
       <p:sp>
         <p:nvSpPr>
-          <p:cNvPr id="1998322059" name=""/>
+          <p:cNvPr id="1284884265" name=""/>
           <p:cNvSpPr txBox="1"/>
           <p:nvPr/>
         </p:nvSpPr>
@@ -22831,7 +22831,7 @@
       </p:sp>
       <p:cxnSp>
         <p:nvCxnSpPr>
-          <p:cNvPr id="746891890" name=""/>
+          <p:cNvPr id="932330818" name=""/>
           <p:cNvCxnSpPr/>
           <p:nvPr/>
         </p:nvCxnSpPr>
@@ -22869,9 +22869,9 @@
       </p:cxnSp>
       <p:cxnSp>
         <p:nvCxnSpPr>
-          <p:cNvPr id="198061321" name=""/>
+          <p:cNvPr id="1447403216" name=""/>
           <p:cNvCxnSpPr>
-            <a:endCxn id="1612083739" idx="1"/>
+            <a:endCxn id="1906940246" idx="1"/>
           </p:cNvCxnSpPr>
           <p:nvPr/>
         </p:nvCxnSpPr>
@@ -22910,7 +22910,7 @@
       </p:cxnSp>
       <p:cxnSp>
         <p:nvCxnSpPr>
-          <p:cNvPr id="1372259997" name=""/>
+          <p:cNvPr id="1970460797" name=""/>
           <p:cNvCxnSpPr/>
           <p:nvPr/>
         </p:nvCxnSpPr>
@@ -22949,7 +22949,7 @@
       </p:cxnSp>
       <p:cxnSp>
         <p:nvCxnSpPr>
-          <p:cNvPr id="778390539" name=""/>
+          <p:cNvPr id="190754026" name=""/>
           <p:cNvCxnSpPr/>
           <p:nvPr/>
         </p:nvCxnSpPr>
@@ -22988,7 +22988,7 @@
       </p:cxnSp>
       <p:cxnSp>
         <p:nvCxnSpPr>
-          <p:cNvPr id="345166854" name=""/>
+          <p:cNvPr id="1821466890" name=""/>
           <p:cNvCxnSpPr/>
           <p:nvPr/>
         </p:nvCxnSpPr>
@@ -23027,7 +23027,7 @@
       </p:cxnSp>
       <p:cxnSp>
         <p:nvCxnSpPr>
-          <p:cNvPr id="952357337" name=""/>
+          <p:cNvPr id="1305084317" name=""/>
           <p:cNvCxnSpPr/>
           <p:nvPr/>
         </p:nvCxnSpPr>
@@ -23066,7 +23066,7 @@
       </p:cxnSp>
       <p:cxnSp>
         <p:nvCxnSpPr>
-          <p:cNvPr id="1335396264" name=""/>
+          <p:cNvPr id="161695986" name=""/>
           <p:cNvCxnSpPr/>
           <p:nvPr/>
         </p:nvCxnSpPr>
@@ -23105,7 +23105,7 @@
       </p:cxnSp>
       <p:cxnSp>
         <p:nvCxnSpPr>
-          <p:cNvPr id="1919564383" name=""/>
+          <p:cNvPr id="489873343" name=""/>
           <p:cNvCxnSpPr/>
           <p:nvPr/>
         </p:nvCxnSpPr>
@@ -23144,7 +23144,7 @@
       </p:cxnSp>
       <p:cxnSp>
         <p:nvCxnSpPr>
-          <p:cNvPr id="986760301" name=""/>
+          <p:cNvPr id="1842528586" name=""/>
           <p:cNvCxnSpPr/>
           <p:nvPr/>
         </p:nvCxnSpPr>
@@ -23183,7 +23183,7 @@
       </p:cxnSp>
       <p:cxnSp>
         <p:nvCxnSpPr>
-          <p:cNvPr id="1680911219" name=""/>
+          <p:cNvPr id="1396902128" name=""/>
           <p:cNvCxnSpPr/>
           <p:nvPr/>
         </p:nvCxnSpPr>
@@ -23222,7 +23222,7 @@
       </p:cxnSp>
       <p:cxnSp>
         <p:nvCxnSpPr>
-          <p:cNvPr id="1186661185" name=""/>
+          <p:cNvPr id="328944758" name=""/>
           <p:cNvCxnSpPr/>
           <p:nvPr/>
         </p:nvCxnSpPr>
@@ -23261,7 +23261,7 @@
       </p:cxnSp>
       <p:cxnSp>
         <p:nvCxnSpPr>
-          <p:cNvPr id="376477388" name=""/>
+          <p:cNvPr id="932187252" name=""/>
           <p:cNvCxnSpPr/>
           <p:nvPr/>
         </p:nvCxnSpPr>
@@ -23300,7 +23300,7 @@
       </p:cxnSp>
       <p:cxnSp>
         <p:nvCxnSpPr>
-          <p:cNvPr id="406156027" name=""/>
+          <p:cNvPr id="506164662" name=""/>
           <p:cNvCxnSpPr/>
           <p:nvPr/>
         </p:nvCxnSpPr>
@@ -23339,7 +23339,7 @@
       </p:cxnSp>
       <p:cxnSp>
         <p:nvCxnSpPr>
-          <p:cNvPr id="334826808" name=""/>
+          <p:cNvPr id="960565142" name=""/>
           <p:cNvCxnSpPr/>
           <p:nvPr/>
         </p:nvCxnSpPr>
@@ -23377,7 +23377,7 @@
       </p:cxnSp>
       <p:cxnSp>
         <p:nvCxnSpPr>
-          <p:cNvPr id="922375062" name=""/>
+          <p:cNvPr id="1048723728" name=""/>
           <p:cNvCxnSpPr/>
           <p:nvPr/>
         </p:nvCxnSpPr>
@@ -23415,7 +23415,7 @@
       </p:cxnSp>
       <p:cxnSp>
         <p:nvCxnSpPr>
-          <p:cNvPr id="1983769133" name=""/>
+          <p:cNvPr id="1827072251" name=""/>
           <p:cNvCxnSpPr/>
           <p:nvPr/>
         </p:nvCxnSpPr>
@@ -23454,7 +23454,7 @@
       </p:cxnSp>
       <p:cxnSp>
         <p:nvCxnSpPr>
-          <p:cNvPr id="1077729438" name=""/>
+          <p:cNvPr id="381443617" name=""/>
           <p:cNvCxnSpPr/>
           <p:nvPr/>
         </p:nvCxnSpPr>
@@ -23493,7 +23493,7 @@
       </p:cxnSp>
       <p:cxnSp>
         <p:nvCxnSpPr>
-          <p:cNvPr id="1811831953" name=""/>
+          <p:cNvPr id="762888831" name=""/>
           <p:cNvCxnSpPr/>
           <p:nvPr/>
         </p:nvCxnSpPr>
@@ -23532,7 +23532,7 @@
       </p:cxnSp>
       <p:cxnSp>
         <p:nvCxnSpPr>
-          <p:cNvPr id="1932231058" name=""/>
+          <p:cNvPr id="370924142" name=""/>
           <p:cNvCxnSpPr/>
           <p:nvPr/>
         </p:nvCxnSpPr>
@@ -23571,7 +23571,7 @@
       </p:cxnSp>
       <p:cxnSp>
         <p:nvCxnSpPr>
-          <p:cNvPr id="1720986027" name=""/>
+          <p:cNvPr id="879828026" name=""/>
           <p:cNvCxnSpPr/>
           <p:nvPr/>
         </p:nvCxnSpPr>
@@ -23610,9 +23610,9 @@
       </p:cxnSp>
       <p:cxnSp>
         <p:nvCxnSpPr>
-          <p:cNvPr id="573305419" name=""/>
+          <p:cNvPr id="917970775" name=""/>
           <p:cNvCxnSpPr>
-            <a:endCxn id="1903571078" idx="0"/>
+            <a:endCxn id="1900054979" idx="0"/>
           </p:cNvCxnSpPr>
           <p:nvPr/>
         </p:nvCxnSpPr>
@@ -23651,9 +23651,9 @@
       </p:cxnSp>
       <p:cxnSp>
         <p:nvCxnSpPr>
-          <p:cNvPr id="1548282759" name=""/>
+          <p:cNvPr id="1576205340" name=""/>
           <p:cNvCxnSpPr>
-            <a:stCxn id="1903571078" idx="1"/>
+            <a:stCxn id="1900054979" idx="1"/>
           </p:cNvCxnSpPr>
           <p:nvPr/>
         </p:nvCxnSpPr>
@@ -23692,7 +23692,7 @@
       </p:cxnSp>
       <p:cxnSp>
         <p:nvCxnSpPr>
-          <p:cNvPr id="1157708638" name=""/>
+          <p:cNvPr id="1438791195" name=""/>
           <p:cNvCxnSpPr/>
           <p:nvPr/>
         </p:nvCxnSpPr>
@@ -23730,7 +23730,7 @@
       </p:cxnSp>
       <p:cxnSp>
         <p:nvCxnSpPr>
-          <p:cNvPr id="809565903" name=""/>
+          <p:cNvPr id="1740947846" name=""/>
           <p:cNvCxnSpPr/>
           <p:nvPr/>
         </p:nvCxnSpPr>
@@ -23769,7 +23769,7 @@
       </p:cxnSp>
       <p:cxnSp>
         <p:nvCxnSpPr>
-          <p:cNvPr id="1936496364" name=""/>
+          <p:cNvPr id="331103946" name=""/>
           <p:cNvCxnSpPr/>
           <p:nvPr/>
         </p:nvCxnSpPr>
@@ -23808,7 +23808,7 @@
       </p:cxnSp>
       <p:cxnSp>
         <p:nvCxnSpPr>
-          <p:cNvPr id="473823021" name=""/>
+          <p:cNvPr id="839436271" name=""/>
           <p:cNvCxnSpPr/>
           <p:nvPr/>
         </p:nvCxnSpPr>
@@ -23847,7 +23847,7 @@
       </p:cxnSp>
       <p:cxnSp>
         <p:nvCxnSpPr>
-          <p:cNvPr id="1222688130" name=""/>
+          <p:cNvPr id="62055418" name=""/>
           <p:cNvCxnSpPr/>
           <p:nvPr/>
         </p:nvCxnSpPr>
@@ -23886,7 +23886,7 @@
       </p:cxnSp>
       <p:cxnSp>
         <p:nvCxnSpPr>
-          <p:cNvPr id="372807468" name=""/>
+          <p:cNvPr id="425092210" name=""/>
           <p:cNvCxnSpPr/>
           <p:nvPr/>
         </p:nvCxnSpPr>
@@ -23925,7 +23925,7 @@
       </p:cxnSp>
       <p:cxnSp>
         <p:nvCxnSpPr>
-          <p:cNvPr id="160918026" name=""/>
+          <p:cNvPr id="100879764" name=""/>
           <p:cNvCxnSpPr/>
           <p:nvPr/>
         </p:nvCxnSpPr>
@@ -23964,7 +23964,7 @@
       </p:cxnSp>
       <p:cxnSp>
         <p:nvCxnSpPr>
-          <p:cNvPr id="722675828" name=""/>
+          <p:cNvPr id="1283109249" name=""/>
           <p:cNvCxnSpPr/>
           <p:nvPr/>
         </p:nvCxnSpPr>
@@ -24046,7 +24046,7 @@
       </p:grpSpPr>
       <p:cxnSp>
         <p:nvCxnSpPr>
-          <p:cNvPr id="224725492" name="直線接點 4"/>
+          <p:cNvPr id="772597508" name="直線接點 4"/>
           <p:cNvCxnSpPr/>
           <p:nvPr/>
         </p:nvCxnSpPr>
@@ -24081,7 +24081,7 @@
       </p:cxnSp>
       <p:sp>
         <p:nvSpPr>
-          <p:cNvPr id="1553360780" name="TextBox 20"/>
+          <p:cNvPr id="580431444" name="TextBox 20"/>
           <p:cNvSpPr txBox="1"/>
           <p:nvPr/>
         </p:nvSpPr>
@@ -24136,7 +24136,7 @@
       </p:sp>
       <p:sp>
         <p:nvSpPr>
-          <p:cNvPr id="309078414" name="Slide Number Placeholder 1"/>
+          <p:cNvPr id="1713989607" name="Slide Number Placeholder 1"/>
           <p:cNvSpPr>
             <a:spLocks noGrp="1"/>
           </p:cNvSpPr>
@@ -24169,7 +24169,7 @@
       </p:sp>
       <p:sp>
         <p:nvSpPr>
-          <p:cNvPr id="1933434486" name="Google Shape;90;p1"/>
+          <p:cNvPr id="633507598" name="Google Shape;90;p1"/>
           <p:cNvSpPr txBox="1"/>
           <p:nvPr/>
         </p:nvSpPr>
@@ -24374,7 +24374,7 @@
       </p:sp>
       <p:sp>
         <p:nvSpPr>
-          <p:cNvPr id="864984326" name=""/>
+          <p:cNvPr id="1926296565" name=""/>
           <p:cNvSpPr txBox="1"/>
           <p:nvPr/>
         </p:nvSpPr>
@@ -24431,7 +24431,7 @@
       </p:sp>
       <p:sp>
         <p:nvSpPr>
-          <p:cNvPr id="1772606997" name=""/>
+          <p:cNvPr id="1489378552" name=""/>
           <p:cNvSpPr txBox="1"/>
           <p:nvPr/>
         </p:nvSpPr>
@@ -24475,7 +24475,7 @@
       </p:sp>
       <p:sp>
         <p:nvSpPr>
-          <p:cNvPr id="1898523972" name=""/>
+          <p:cNvPr id="939169520" name=""/>
           <p:cNvSpPr txBox="1"/>
           <p:nvPr/>
         </p:nvSpPr>
@@ -24513,7 +24513,7 @@
       </p:sp>
       <p:sp>
         <p:nvSpPr>
-          <p:cNvPr id="1628148170" name=""/>
+          <p:cNvPr id="334138380" name=""/>
           <p:cNvSpPr txBox="1"/>
           <p:nvPr/>
         </p:nvSpPr>
@@ -24666,7 +24666,7 @@
       </p:grpSpPr>
       <p:cxnSp>
         <p:nvCxnSpPr>
-          <p:cNvPr id="933046711" name="直線接點 4"/>
+          <p:cNvPr id="1274596221" name="直線接點 4"/>
           <p:cNvCxnSpPr/>
           <p:nvPr/>
         </p:nvCxnSpPr>
@@ -24701,7 +24701,7 @@
       </p:cxnSp>
       <p:sp>
         <p:nvSpPr>
-          <p:cNvPr id="454227361" name="TextBox 20"/>
+          <p:cNvPr id="463503814" name="TextBox 20"/>
           <p:cNvSpPr txBox="1"/>
           <p:nvPr/>
         </p:nvSpPr>
@@ -24767,7 +24767,7 @@
       </p:sp>
       <p:sp>
         <p:nvSpPr>
-          <p:cNvPr id="763831564" name="Google Shape;90;p1"/>
+          <p:cNvPr id="1609188603" name="Google Shape;90;p1"/>
           <p:cNvSpPr txBox="1"/>
           <p:nvPr/>
         </p:nvSpPr>
@@ -24972,7 +24972,7 @@
       </p:sp>
       <p:sp>
         <p:nvSpPr>
-          <p:cNvPr id="1768922279" name=""/>
+          <p:cNvPr id="872443774" name=""/>
           <p:cNvSpPr txBox="1"/>
           <p:nvPr/>
         </p:nvSpPr>
@@ -25060,7 +25060,7 @@
       </p:sp>
       <p:sp>
         <p:nvSpPr>
-          <p:cNvPr id="219052159" name=""/>
+          <p:cNvPr id="1333644272" name=""/>
           <p:cNvSpPr txBox="1"/>
           <p:nvPr/>
         </p:nvSpPr>
@@ -25098,7 +25098,7 @@
       </p:sp>
       <p:sp>
         <p:nvSpPr>
-          <p:cNvPr id="1962530820" name=""/>
+          <p:cNvPr id="886376589" name=""/>
           <p:cNvSpPr/>
           <p:nvPr/>
         </p:nvSpPr>
@@ -25131,7 +25131,7 @@
       </p:sp>
       <p:sp>
         <p:nvSpPr>
-          <p:cNvPr id="1576945799" name=""/>
+          <p:cNvPr id="511674017" name=""/>
           <p:cNvSpPr txBox="1"/>
           <p:nvPr/>
         </p:nvSpPr>
@@ -25179,7 +25179,7 @@
       </p:sp>
       <p:sp>
         <p:nvSpPr>
-          <p:cNvPr id="795775780" name=""/>
+          <p:cNvPr id="115167611" name=""/>
           <p:cNvSpPr txBox="1"/>
           <p:nvPr/>
         </p:nvSpPr>
@@ -25253,7 +25253,7 @@
       </p:sp>
       <p:sp>
         <p:nvSpPr>
-          <p:cNvPr id="147871476" name=""/>
+          <p:cNvPr id="1921798969" name=""/>
           <p:cNvSpPr txBox="1"/>
           <p:nvPr/>
         </p:nvSpPr>
@@ -25338,7 +25338,7 @@
       </p:sp>
       <p:sp>
         <p:nvSpPr>
-          <p:cNvPr id="1144095853" name=""/>
+          <p:cNvPr id="1374668431" name=""/>
           <p:cNvSpPr txBox="1"/>
           <p:nvPr/>
         </p:nvSpPr>
@@ -25389,7 +25389,7 @@
       </p:sp>
       <p:sp>
         <p:nvSpPr>
-          <p:cNvPr id="229769150" name=""/>
+          <p:cNvPr id="1462704620" name=""/>
           <p:cNvSpPr txBox="1"/>
           <p:nvPr/>
         </p:nvSpPr>
@@ -25463,7 +25463,7 @@
       </p:sp>
       <p:sp>
         <p:nvSpPr>
-          <p:cNvPr id="1104152446" name=""/>
+          <p:cNvPr id="1833222843" name=""/>
           <p:cNvSpPr txBox="1"/>
           <p:nvPr/>
         </p:nvSpPr>
@@ -25525,7 +25525,7 @@
       </p:sp>
       <p:sp>
         <p:nvSpPr>
-          <p:cNvPr id="673875979" name=""/>
+          <p:cNvPr id="78363523" name=""/>
           <p:cNvSpPr txBox="1"/>
           <p:nvPr/>
         </p:nvSpPr>
@@ -25576,7 +25576,7 @@
       </p:sp>
       <p:sp>
         <p:nvSpPr>
-          <p:cNvPr id="1401335311" name=""/>
+          <p:cNvPr id="1442042383" name=""/>
           <p:cNvSpPr/>
           <p:nvPr/>
         </p:nvSpPr>
@@ -25615,7 +25615,7 @@
       </p:sp>
       <p:sp>
         <p:nvSpPr>
-          <p:cNvPr id="480267073" name=""/>
+          <p:cNvPr id="82460944" name=""/>
           <p:cNvSpPr txBox="1"/>
           <p:nvPr/>
         </p:nvSpPr>
@@ -25755,7 +25755,7 @@
       </p:sp>
       <p:cxnSp>
         <p:nvCxnSpPr>
-          <p:cNvPr id="1926777698" name=""/>
+          <p:cNvPr id="157971230" name=""/>
           <p:cNvCxnSpPr/>
           <p:nvPr/>
         </p:nvCxnSpPr>
@@ -25794,7 +25794,7 @@
       </p:cxnSp>
       <p:cxnSp>
         <p:nvCxnSpPr>
-          <p:cNvPr id="1514996199" name=""/>
+          <p:cNvPr id="231193702" name=""/>
           <p:cNvCxnSpPr/>
           <p:nvPr/>
         </p:nvCxnSpPr>
@@ -25833,7 +25833,7 @@
       </p:cxnSp>
       <p:sp>
         <p:nvSpPr>
-          <p:cNvPr id="12234942" name=""/>
+          <p:cNvPr id="1989814069" name=""/>
           <p:cNvSpPr txBox="1"/>
           <p:nvPr/>
         </p:nvSpPr>
@@ -25973,7 +25973,7 @@
       </p:sp>
       <p:cxnSp>
         <p:nvCxnSpPr>
-          <p:cNvPr id="927985430" name=""/>
+          <p:cNvPr id="1089049604" name=""/>
           <p:cNvCxnSpPr/>
           <p:nvPr/>
         </p:nvCxnSpPr>
@@ -26012,7 +26012,7 @@
       </p:cxnSp>
       <p:sp>
         <p:nvSpPr>
-          <p:cNvPr id="677739791" name=""/>
+          <p:cNvPr id="1136245501" name=""/>
           <p:cNvSpPr txBox="1"/>
           <p:nvPr/>
         </p:nvSpPr>
@@ -26152,7 +26152,7 @@
       </p:sp>
       <p:cxnSp>
         <p:nvCxnSpPr>
-          <p:cNvPr id="143241153" name=""/>
+          <p:cNvPr id="565254859" name=""/>
           <p:cNvCxnSpPr/>
           <p:nvPr/>
         </p:nvCxnSpPr>
@@ -26191,7 +26191,7 @@
       </p:cxnSp>
       <p:sp>
         <p:nvSpPr>
-          <p:cNvPr id="266756052" name=""/>
+          <p:cNvPr id="2131433757" name=""/>
           <p:cNvSpPr txBox="1"/>
           <p:nvPr/>
         </p:nvSpPr>
@@ -26331,7 +26331,7 @@
       </p:sp>
       <p:cxnSp>
         <p:nvCxnSpPr>
-          <p:cNvPr id="1637258621" name=""/>
+          <p:cNvPr id="1398109579" name=""/>
           <p:cNvCxnSpPr/>
           <p:nvPr/>
         </p:nvCxnSpPr>
@@ -26370,7 +26370,7 @@
       </p:cxnSp>
       <p:sp>
         <p:nvSpPr>
-          <p:cNvPr id="588079896" name=""/>
+          <p:cNvPr id="635059135" name=""/>
           <p:cNvSpPr txBox="1"/>
           <p:nvPr/>
         </p:nvSpPr>
@@ -26510,7 +26510,7 @@
       </p:sp>
       <p:cxnSp>
         <p:nvCxnSpPr>
-          <p:cNvPr id="576307638" name=""/>
+          <p:cNvPr id="836149881" name=""/>
           <p:cNvCxnSpPr/>
           <p:nvPr/>
         </p:nvCxnSpPr>
@@ -26549,7 +26549,7 @@
       </p:cxnSp>
       <p:sp>
         <p:nvSpPr>
-          <p:cNvPr id="132386456" name=""/>
+          <p:cNvPr id="1628054901" name=""/>
           <p:cNvSpPr txBox="1"/>
           <p:nvPr/>
         </p:nvSpPr>
@@ -26689,7 +26689,7 @@
       </p:sp>
       <p:cxnSp>
         <p:nvCxnSpPr>
-          <p:cNvPr id="685148524" name=""/>
+          <p:cNvPr id="1516495366" name=""/>
           <p:cNvCxnSpPr/>
           <p:nvPr/>
         </p:nvCxnSpPr>
@@ -26728,7 +26728,7 @@
       </p:cxnSp>
       <p:sp>
         <p:nvSpPr>
-          <p:cNvPr id="949589899" name=""/>
+          <p:cNvPr id="77258786" name=""/>
           <p:cNvSpPr txBox="1"/>
           <p:nvPr/>
         </p:nvSpPr>
@@ -26868,7 +26868,7 @@
       </p:sp>
       <p:cxnSp>
         <p:nvCxnSpPr>
-          <p:cNvPr id="1025595262" name=""/>
+          <p:cNvPr id="1023344599" name=""/>
           <p:cNvCxnSpPr/>
           <p:nvPr/>
         </p:nvCxnSpPr>
@@ -26907,7 +26907,7 @@
       </p:cxnSp>
       <p:sp>
         <p:nvSpPr>
-          <p:cNvPr id="2028100318" name=""/>
+          <p:cNvPr id="1051548731" name=""/>
           <p:cNvSpPr txBox="1"/>
           <p:nvPr/>
         </p:nvSpPr>
@@ -27047,7 +27047,7 @@
       </p:sp>
       <p:cxnSp>
         <p:nvCxnSpPr>
-          <p:cNvPr id="1418848554" name=""/>
+          <p:cNvPr id="118946636" name=""/>
           <p:cNvCxnSpPr/>
           <p:nvPr/>
         </p:nvCxnSpPr>
@@ -27086,7 +27086,7 @@
       </p:cxnSp>
       <p:sp>
         <p:nvSpPr>
-          <p:cNvPr id="854290046" name=""/>
+          <p:cNvPr id="1550198406" name=""/>
           <p:cNvSpPr txBox="1"/>
           <p:nvPr/>
         </p:nvSpPr>
@@ -27237,7 +27237,7 @@
       </p:sp>
       <p:sp>
         <p:nvSpPr>
-          <p:cNvPr id="647044329" name=""/>
+          <p:cNvPr id="1625893287" name=""/>
           <p:cNvSpPr txBox="1"/>
           <p:nvPr/>
         </p:nvSpPr>
@@ -27285,7 +27285,7 @@
       </p:sp>
       <p:sp>
         <p:nvSpPr>
-          <p:cNvPr id="287292875" name="Google Shape;20;p18"/>
+          <p:cNvPr id="2138664330" name="Google Shape;20;p18"/>
           <p:cNvSpPr txBox="1">
             <a:spLocks noGrp="1"/>
           </p:cNvSpPr>
@@ -27396,7 +27396,7 @@
       </p:sp>
       <p:cxnSp>
         <p:nvCxnSpPr>
-          <p:cNvPr id="719887101" name=""/>
+          <p:cNvPr id="86414907" name=""/>
           <p:cNvCxnSpPr/>
           <p:nvPr/>
         </p:nvCxnSpPr>
@@ -27435,7 +27435,7 @@
       </p:cxnSp>
       <p:sp>
         <p:nvSpPr>
-          <p:cNvPr id="1741293864" name=""/>
+          <p:cNvPr id="942124754" name=""/>
           <p:cNvSpPr txBox="1"/>
           <p:nvPr/>
         </p:nvSpPr>
@@ -27586,7 +27586,7 @@
       </p:sp>
       <p:sp>
         <p:nvSpPr>
-          <p:cNvPr id="498704072" name=""/>
+          <p:cNvPr id="1668777090" name=""/>
           <p:cNvSpPr txBox="1"/>
           <p:nvPr/>
         </p:nvSpPr>
@@ -27634,7 +27634,7 @@
       </p:sp>
       <p:pic>
         <p:nvPicPr>
-          <p:cNvPr id="645661506" name=""/>
+          <p:cNvPr id="1342068253" name=""/>
           <p:cNvPicPr>
             <a:picLocks noChangeAspect="1"/>
           </p:cNvPicPr>
@@ -27656,7 +27656,7 @@
       </p:pic>
       <p:sp>
         <p:nvSpPr>
-          <p:cNvPr id="845414006" name=""/>
+          <p:cNvPr id="938459859" name=""/>
           <p:cNvSpPr/>
           <p:nvPr/>
         </p:nvSpPr>
@@ -27695,7 +27695,7 @@
       </p:sp>
       <p:pic>
         <p:nvPicPr>
-          <p:cNvPr id="2069718304" name=""/>
+          <p:cNvPr id="1705361010" name=""/>
           <p:cNvPicPr>
             <a:picLocks noChangeAspect="1"/>
           </p:cNvPicPr>
@@ -27717,7 +27717,7 @@
       </p:pic>
       <p:cxnSp>
         <p:nvCxnSpPr>
-          <p:cNvPr id="1551965641" name=""/>
+          <p:cNvPr id="1491544470" name=""/>
           <p:cNvCxnSpPr/>
           <p:nvPr/>
         </p:nvCxnSpPr>
@@ -27756,7 +27756,7 @@
       </p:cxnSp>
       <p:sp>
         <p:nvSpPr>
-          <p:cNvPr id="2051651357" name=""/>
+          <p:cNvPr id="1439369518" name=""/>
           <p:cNvSpPr txBox="1"/>
           <p:nvPr/>
         </p:nvSpPr>
@@ -27939,7 +27939,7 @@
       </p:grpSpPr>
       <p:cxnSp>
         <p:nvCxnSpPr>
-          <p:cNvPr id="1392553503" name="直線接點 4"/>
+          <p:cNvPr id="2028756519" name="直線接點 4"/>
           <p:cNvCxnSpPr/>
           <p:nvPr/>
         </p:nvCxnSpPr>
@@ -27974,7 +27974,7 @@
       </p:cxnSp>
       <p:sp>
         <p:nvSpPr>
-          <p:cNvPr id="1301707744" name="TextBox 20"/>
+          <p:cNvPr id="1697668646" name="TextBox 20"/>
           <p:cNvSpPr txBox="1"/>
           <p:nvPr/>
         </p:nvSpPr>
@@ -28040,7 +28040,7 @@
       </p:sp>
       <p:sp>
         <p:nvSpPr>
-          <p:cNvPr id="1924163495" name="Google Shape;90;p1"/>
+          <p:cNvPr id="2090189952" name="Google Shape;90;p1"/>
           <p:cNvSpPr txBox="1"/>
           <p:nvPr/>
         </p:nvSpPr>
@@ -28245,7 +28245,7 @@
       </p:sp>
       <p:sp>
         <p:nvSpPr>
-          <p:cNvPr id="602080322" name=""/>
+          <p:cNvPr id="531843422" name=""/>
           <p:cNvSpPr txBox="1"/>
           <p:nvPr/>
         </p:nvSpPr>
@@ -28333,7 +28333,7 @@
       </p:sp>
       <p:sp>
         <p:nvSpPr>
-          <p:cNvPr id="1534509568" name=""/>
+          <p:cNvPr id="352394973" name=""/>
           <p:cNvSpPr txBox="1"/>
           <p:nvPr/>
         </p:nvSpPr>
@@ -28371,7 +28371,7 @@
       </p:sp>
       <p:sp>
         <p:nvSpPr>
-          <p:cNvPr id="1142911192" name="Google Shape;20;p18"/>
+          <p:cNvPr id="677956145" name="Google Shape;20;p18"/>
           <p:cNvSpPr txBox="1">
             <a:spLocks noGrp="1"/>
           </p:cNvSpPr>
@@ -28482,7 +28482,7 @@
       </p:sp>
       <p:sp>
         <p:nvSpPr>
-          <p:cNvPr id="149905361" name=""/>
+          <p:cNvPr id="931082938" name=""/>
           <p:cNvSpPr/>
           <p:nvPr/>
         </p:nvSpPr>
@@ -28515,7 +28515,7 @@
       </p:sp>
       <p:sp>
         <p:nvSpPr>
-          <p:cNvPr id="1540360253" name=""/>
+          <p:cNvPr id="976231547" name=""/>
           <p:cNvSpPr txBox="1"/>
           <p:nvPr/>
         </p:nvSpPr>
@@ -28566,7 +28566,7 @@
       </p:sp>
       <p:sp>
         <p:nvSpPr>
-          <p:cNvPr id="186886812" name=""/>
+          <p:cNvPr id="97621698" name=""/>
           <p:cNvSpPr txBox="1"/>
           <p:nvPr/>
         </p:nvSpPr>
@@ -28628,7 +28628,7 @@
       </p:sp>
       <p:sp>
         <p:nvSpPr>
-          <p:cNvPr id="1278395491" name=""/>
+          <p:cNvPr id="1061365103" name=""/>
           <p:cNvSpPr txBox="1"/>
           <p:nvPr/>
         </p:nvSpPr>
@@ -28679,9 +28679,9 @@
       </p:sp>
       <p:cxnSp>
         <p:nvCxnSpPr>
-          <p:cNvPr id="466081542" name=""/>
+          <p:cNvPr id="2094964295" name=""/>
           <p:cNvCxnSpPr>
-            <a:endCxn id="1540360253" idx="2"/>
+            <a:endCxn id="976231547" idx="2"/>
           </p:cNvCxnSpPr>
           <p:nvPr/>
         </p:nvCxnSpPr>
@@ -28720,7 +28720,7 @@
       </p:cxnSp>
       <p:sp>
         <p:nvSpPr>
-          <p:cNvPr id="1545525800" name=""/>
+          <p:cNvPr id="288543990" name=""/>
           <p:cNvSpPr txBox="1"/>
           <p:nvPr/>
         </p:nvSpPr>
@@ -28860,7 +28860,7 @@
       </p:sp>
       <p:cxnSp>
         <p:nvCxnSpPr>
-          <p:cNvPr id="1952359480" name=""/>
+          <p:cNvPr id="1963103967" name=""/>
           <p:cNvCxnSpPr/>
           <p:nvPr/>
         </p:nvCxnSpPr>
@@ -28899,7 +28899,7 @@
       </p:cxnSp>
       <p:sp>
         <p:nvSpPr>
-          <p:cNvPr id="134305097" name=""/>
+          <p:cNvPr id="874403274" name=""/>
           <p:cNvSpPr txBox="1"/>
           <p:nvPr/>
         </p:nvSpPr>
@@ -29039,7 +29039,7 @@
       </p:sp>
       <p:cxnSp>
         <p:nvCxnSpPr>
-          <p:cNvPr id="411241912" name=""/>
+          <p:cNvPr id="2020096443" name=""/>
           <p:cNvCxnSpPr/>
           <p:nvPr/>
         </p:nvCxnSpPr>
@@ -29078,7 +29078,7 @@
       </p:cxnSp>
       <p:sp>
         <p:nvSpPr>
-          <p:cNvPr id="1434693376" name=""/>
+          <p:cNvPr id="678132527" name=""/>
           <p:cNvSpPr txBox="1"/>
           <p:nvPr/>
         </p:nvSpPr>
@@ -29218,7 +29218,7 @@
       </p:sp>
       <p:sp>
         <p:nvSpPr>
-          <p:cNvPr id="1320499745" name=""/>
+          <p:cNvPr id="894435312" name=""/>
           <p:cNvSpPr txBox="1"/>
           <p:nvPr/>
         </p:nvSpPr>
@@ -29266,7 +29266,7 @@
       </p:sp>
       <p:cxnSp>
         <p:nvCxnSpPr>
-          <p:cNvPr id="1711674014" name=""/>
+          <p:cNvPr id="1137081973" name=""/>
           <p:cNvCxnSpPr/>
           <p:nvPr/>
         </p:nvCxnSpPr>
@@ -29305,7 +29305,7 @@
       </p:cxnSp>
       <p:sp>
         <p:nvSpPr>
-          <p:cNvPr id="2039606492" name=""/>
+          <p:cNvPr id="1919700604" name=""/>
           <p:cNvSpPr txBox="1"/>
           <p:nvPr/>
         </p:nvSpPr>
@@ -29445,7 +29445,7 @@
       </p:sp>
       <p:sp>
         <p:nvSpPr>
-          <p:cNvPr id="1459719730" name=""/>
+          <p:cNvPr id="1300829850" name=""/>
           <p:cNvSpPr/>
           <p:nvPr/>
         </p:nvSpPr>
@@ -29484,7 +29484,7 @@
       </p:sp>
       <p:sp>
         <p:nvSpPr>
-          <p:cNvPr id="1175622666" name=""/>
+          <p:cNvPr id="1391192592" name=""/>
           <p:cNvSpPr txBox="1"/>
           <p:nvPr/>
         </p:nvSpPr>
@@ -29603,7 +29603,7 @@
       </p:grpSpPr>
       <p:cxnSp>
         <p:nvCxnSpPr>
-          <p:cNvPr id="330974652" name="直線接點 4"/>
+          <p:cNvPr id="8074143" name="直線接點 4"/>
           <p:cNvCxnSpPr/>
           <p:nvPr/>
         </p:nvCxnSpPr>
@@ -29638,7 +29638,7 @@
       </p:cxnSp>
       <p:sp>
         <p:nvSpPr>
-          <p:cNvPr id="228497156" name="TextBox 20"/>
+          <p:cNvPr id="43764104" name="TextBox 20"/>
           <p:cNvSpPr txBox="1"/>
           <p:nvPr/>
         </p:nvSpPr>
@@ -29704,7 +29704,7 @@
       </p:sp>
       <p:sp>
         <p:nvSpPr>
-          <p:cNvPr id="1178069110" name="Google Shape;90;p1"/>
+          <p:cNvPr id="77459161" name="Google Shape;90;p1"/>
           <p:cNvSpPr txBox="1"/>
           <p:nvPr/>
         </p:nvSpPr>
@@ -29909,7 +29909,7 @@
       </p:sp>
       <p:sp>
         <p:nvSpPr>
-          <p:cNvPr id="538635497" name=""/>
+          <p:cNvPr id="1640692944" name=""/>
           <p:cNvSpPr txBox="1"/>
           <p:nvPr/>
         </p:nvSpPr>
@@ -29997,7 +29997,7 @@
       </p:sp>
       <p:sp>
         <p:nvSpPr>
-          <p:cNvPr id="1073041926" name=""/>
+          <p:cNvPr id="544461027" name=""/>
           <p:cNvSpPr txBox="1"/>
           <p:nvPr/>
         </p:nvSpPr>
@@ -30061,7 +30061,7 @@
       </p:sp>
       <p:sp>
         <p:nvSpPr>
-          <p:cNvPr id="1396568538" name="Google Shape;20;p18"/>
+          <p:cNvPr id="616650066" name="Google Shape;20;p18"/>
           <p:cNvSpPr txBox="1">
             <a:spLocks noGrp="1"/>
           </p:cNvSpPr>
@@ -30215,7 +30215,7 @@
       </p:grpSpPr>
       <p:cxnSp>
         <p:nvCxnSpPr>
-          <p:cNvPr id="1170872854" name="直線接點 4"/>
+          <p:cNvPr id="849189851" name="直線接點 4"/>
           <p:cNvCxnSpPr/>
           <p:nvPr/>
         </p:nvCxnSpPr>
@@ -30250,7 +30250,7 @@
       </p:cxnSp>
       <p:sp>
         <p:nvSpPr>
-          <p:cNvPr id="1019827694" name="TextBox 20"/>
+          <p:cNvPr id="1069301369" name="TextBox 20"/>
           <p:cNvSpPr txBox="1"/>
           <p:nvPr/>
         </p:nvSpPr>
@@ -30316,7 +30316,7 @@
       </p:sp>
       <p:sp>
         <p:nvSpPr>
-          <p:cNvPr id="1450082276" name="Google Shape;90;p1"/>
+          <p:cNvPr id="485606304" name="Google Shape;90;p1"/>
           <p:cNvSpPr txBox="1"/>
           <p:nvPr/>
         </p:nvSpPr>
@@ -30521,7 +30521,7 @@
       </p:sp>
       <p:sp>
         <p:nvSpPr>
-          <p:cNvPr id="1054084321" name=""/>
+          <p:cNvPr id="708731899" name=""/>
           <p:cNvSpPr txBox="1"/>
           <p:nvPr/>
         </p:nvSpPr>
@@ -30620,7 +30620,7 @@
       </p:sp>
       <p:sp>
         <p:nvSpPr>
-          <p:cNvPr id="1951180206" name=""/>
+          <p:cNvPr id="1231624503" name=""/>
           <p:cNvSpPr txBox="1"/>
           <p:nvPr/>
         </p:nvSpPr>
@@ -30705,7 +30705,7 @@
       </p:sp>
       <p:sp>
         <p:nvSpPr>
-          <p:cNvPr id="856154659" name="Google Shape;20;p18"/>
+          <p:cNvPr id="975701159" name="Google Shape;20;p18"/>
           <p:cNvSpPr txBox="1">
             <a:spLocks noGrp="1"/>
           </p:cNvSpPr>
@@ -30859,7 +30859,7 @@
       </p:grpSpPr>
       <p:cxnSp>
         <p:nvCxnSpPr>
-          <p:cNvPr id="366692050" name="直線接點 4"/>
+          <p:cNvPr id="1170757628" name="直線接點 4"/>
           <p:cNvCxnSpPr/>
           <p:nvPr/>
         </p:nvCxnSpPr>
@@ -30894,7 +30894,7 @@
       </p:cxnSp>
       <p:sp>
         <p:nvSpPr>
-          <p:cNvPr id="1770043202" name="TextBox 20"/>
+          <p:cNvPr id="238536993" name="TextBox 20"/>
           <p:cNvSpPr txBox="1"/>
           <p:nvPr/>
         </p:nvSpPr>
@@ -30960,7 +30960,7 @@
       </p:sp>
       <p:sp>
         <p:nvSpPr>
-          <p:cNvPr id="938986820" name="Google Shape;90;p1"/>
+          <p:cNvPr id="1566963031" name="Google Shape;90;p1"/>
           <p:cNvSpPr txBox="1"/>
           <p:nvPr/>
         </p:nvSpPr>
@@ -31165,7 +31165,7 @@
       </p:sp>
       <p:sp>
         <p:nvSpPr>
-          <p:cNvPr id="934061129" name=""/>
+          <p:cNvPr id="512269429" name=""/>
           <p:cNvSpPr txBox="1"/>
           <p:nvPr/>
         </p:nvSpPr>
@@ -31264,7 +31264,7 @@
       </p:sp>
       <p:sp>
         <p:nvSpPr>
-          <p:cNvPr id="856425147" name=""/>
+          <p:cNvPr id="331648873" name=""/>
           <p:cNvSpPr txBox="1"/>
           <p:nvPr/>
         </p:nvSpPr>
@@ -31327,7 +31327,7 @@
       </p:sp>
       <p:sp>
         <p:nvSpPr>
-          <p:cNvPr id="686981742" name="Google Shape;20;p18"/>
+          <p:cNvPr id="1708960154" name="Google Shape;20;p18"/>
           <p:cNvSpPr txBox="1">
             <a:spLocks noGrp="1"/>
           </p:cNvSpPr>
@@ -31481,7 +31481,7 @@
       </p:grpSpPr>
       <p:cxnSp>
         <p:nvCxnSpPr>
-          <p:cNvPr id="1673651980" name="直線接點 4"/>
+          <p:cNvPr id="835507951" name="直線接點 4"/>
           <p:cNvCxnSpPr/>
           <p:nvPr/>
         </p:nvCxnSpPr>
@@ -31516,7 +31516,7 @@
       </p:cxnSp>
       <p:sp>
         <p:nvSpPr>
-          <p:cNvPr id="401287102" name="TextBox 20"/>
+          <p:cNvPr id="1416748353" name="TextBox 20"/>
           <p:cNvSpPr txBox="1"/>
           <p:nvPr/>
         </p:nvSpPr>
@@ -31582,7 +31582,7 @@
       </p:sp>
       <p:sp>
         <p:nvSpPr>
-          <p:cNvPr id="1294134419" name="Google Shape;90;p1"/>
+          <p:cNvPr id="839298364" name="Google Shape;90;p1"/>
           <p:cNvSpPr txBox="1"/>
           <p:nvPr/>
         </p:nvSpPr>
@@ -31787,7 +31787,7 @@
       </p:sp>
       <p:sp>
         <p:nvSpPr>
-          <p:cNvPr id="464897849" name=""/>
+          <p:cNvPr id="665786386" name=""/>
           <p:cNvSpPr txBox="1"/>
           <p:nvPr/>
         </p:nvSpPr>
@@ -31886,7 +31886,7 @@
       </p:sp>
       <p:sp>
         <p:nvSpPr>
-          <p:cNvPr id="1408870240" name=""/>
+          <p:cNvPr id="2080502868" name=""/>
           <p:cNvSpPr txBox="1"/>
           <p:nvPr/>
         </p:nvSpPr>
@@ -31949,7 +31949,7 @@
       </p:sp>
       <p:sp>
         <p:nvSpPr>
-          <p:cNvPr id="1302276845" name="Google Shape;20;p18"/>
+          <p:cNvPr id="1531473298" name="Google Shape;20;p18"/>
           <p:cNvSpPr txBox="1">
             <a:spLocks noGrp="1"/>
           </p:cNvSpPr>
@@ -32103,7 +32103,7 @@
       </p:grpSpPr>
       <p:cxnSp>
         <p:nvCxnSpPr>
-          <p:cNvPr id="24018243" name="直線接點 4"/>
+          <p:cNvPr id="423007694" name="直線接點 4"/>
           <p:cNvCxnSpPr/>
           <p:nvPr/>
         </p:nvCxnSpPr>
@@ -32138,7 +32138,7 @@
       </p:cxnSp>
       <p:sp>
         <p:nvSpPr>
-          <p:cNvPr id="982185201" name="TextBox 20"/>
+          <p:cNvPr id="1966345038" name="TextBox 20"/>
           <p:cNvSpPr txBox="1"/>
           <p:nvPr/>
         </p:nvSpPr>
@@ -32204,7 +32204,7 @@
       </p:sp>
       <p:sp>
         <p:nvSpPr>
-          <p:cNvPr id="482665221" name="Google Shape;90;p1"/>
+          <p:cNvPr id="1550909417" name="Google Shape;90;p1"/>
           <p:cNvSpPr txBox="1"/>
           <p:nvPr/>
         </p:nvSpPr>
@@ -32409,7 +32409,7 @@
       </p:sp>
       <p:sp>
         <p:nvSpPr>
-          <p:cNvPr id="1587659436" name=""/>
+          <p:cNvPr id="991916445" name=""/>
           <p:cNvSpPr txBox="1"/>
           <p:nvPr/>
         </p:nvSpPr>
@@ -32508,7 +32508,7 @@
       </p:sp>
       <p:sp>
         <p:nvSpPr>
-          <p:cNvPr id="2048456300" name=""/>
+          <p:cNvPr id="961850908" name=""/>
           <p:cNvSpPr txBox="1"/>
           <p:nvPr/>
         </p:nvSpPr>
@@ -32571,7 +32571,7 @@
       </p:sp>
       <p:sp>
         <p:nvSpPr>
-          <p:cNvPr id="2030203353" name="Google Shape;20;p18"/>
+          <p:cNvPr id="510757965" name="Google Shape;20;p18"/>
           <p:cNvSpPr txBox="1">
             <a:spLocks noGrp="1"/>
           </p:cNvSpPr>
@@ -32725,7 +32725,7 @@
       </p:grpSpPr>
       <p:cxnSp>
         <p:nvCxnSpPr>
-          <p:cNvPr id="1638145094" name="直線接點 4"/>
+          <p:cNvPr id="1570861631" name="直線接點 4"/>
           <p:cNvCxnSpPr/>
           <p:nvPr/>
         </p:nvCxnSpPr>
@@ -32760,7 +32760,7 @@
       </p:cxnSp>
       <p:sp>
         <p:nvSpPr>
-          <p:cNvPr id="1266752614" name="TextBox 20"/>
+          <p:cNvPr id="2034068099" name="TextBox 20"/>
           <p:cNvSpPr txBox="1"/>
           <p:nvPr/>
         </p:nvSpPr>
@@ -32826,7 +32826,7 @@
       </p:sp>
       <p:sp>
         <p:nvSpPr>
-          <p:cNvPr id="1893777204" name="Google Shape;90;p1"/>
+          <p:cNvPr id="850466323" name="Google Shape;90;p1"/>
           <p:cNvSpPr txBox="1"/>
           <p:nvPr/>
         </p:nvSpPr>
@@ -33031,7 +33031,7 @@
       </p:sp>
       <p:sp>
         <p:nvSpPr>
-          <p:cNvPr id="1480865954" name=""/>
+          <p:cNvPr id="96961494" name=""/>
           <p:cNvSpPr txBox="1"/>
           <p:nvPr/>
         </p:nvSpPr>
@@ -33130,7 +33130,7 @@
       </p:sp>
       <p:sp>
         <p:nvSpPr>
-          <p:cNvPr id="325436310" name=""/>
+          <p:cNvPr id="427357422" name=""/>
           <p:cNvSpPr txBox="1"/>
           <p:nvPr/>
         </p:nvSpPr>
@@ -33193,7 +33193,7 @@
       </p:sp>
       <p:sp>
         <p:nvSpPr>
-          <p:cNvPr id="1385861758" name="Google Shape;20;p18"/>
+          <p:cNvPr id="1787322322" name="Google Shape;20;p18"/>
           <p:cNvSpPr txBox="1">
             <a:spLocks noGrp="1"/>
           </p:cNvSpPr>
@@ -33347,7 +33347,7 @@
       </p:grpSpPr>
       <p:sp>
         <p:nvSpPr>
-          <p:cNvPr id="425098956" name="Google Shape;90;p1"/>
+          <p:cNvPr id="1670678818" name="Google Shape;90;p1"/>
           <p:cNvSpPr txBox="1"/>
           <p:nvPr/>
         </p:nvSpPr>
@@ -33552,14 +33552,14 @@
       </p:sp>
       <p:sp>
         <p:nvSpPr>
-          <p:cNvPr id="1546096944" name="Google Shape;91;p1"/>
+          <p:cNvPr id="1322030181" name="Google Shape;91;p1"/>
           <p:cNvSpPr txBox="1"/>
           <p:nvPr/>
         </p:nvSpPr>
         <p:spPr bwMode="auto">
           <a:xfrm flipH="0" flipV="0">
-            <a:off x="580414" y="795016"/>
-            <a:ext cx="9684021" cy="5273277"/>
+            <a:off x="580413" y="795015"/>
+            <a:ext cx="9699140" cy="4902833"/>
           </a:xfrm>
           <a:prstGeom prst="rect">
             <a:avLst/>
@@ -34041,52 +34041,11 @@
               <a:cs typeface="Linux Biolinum O"/>
             </a:endParaRPr>
           </a:p>
-          <a:p>
-            <a:pPr lvl="0" algn="l" rtl="0">
-              <a:spcBef>
-                <a:spcPts val="0"/>
-              </a:spcBef>
-              <a:spcAft>
-                <a:spcPts val="0"/>
-              </a:spcAft>
-              <a:defRPr/>
-            </a:pPr>
-            <a:r>
-              <a:rPr lang="en-US" sz="2400">
-                <a:solidFill>
-                  <a:schemeClr val="dk1"/>
-                </a:solidFill>
-                <a:latin typeface="Linux Biolinum O"/>
-                <a:ea typeface="Linux Biolinum O"/>
-                <a:cs typeface="Linux Biolinum O"/>
-              </a:rPr>
-              <a:t>附錄I: </a:t>
-            </a:r>
-            <a:r>
-              <a:rPr lang="en-US" sz="2400" b="0" i="0" u="none" strike="noStrike" cap="none" spc="0">
-                <a:solidFill>
-                  <a:schemeClr val="dk1"/>
-                </a:solidFill>
-                <a:latin typeface="Linux Biolinum O"/>
-                <a:ea typeface="Linux Biolinum O"/>
-                <a:cs typeface="Linux Biolinum O"/>
-              </a:rPr>
-              <a:t>代碼集合 ——————————————————————————-————</a:t>
-            </a:r>
-            <a:endParaRPr lang="en-US" sz="2400">
-              <a:solidFill>
-                <a:schemeClr val="dk1"/>
-              </a:solidFill>
-              <a:latin typeface="Linux Biolinum O"/>
-              <a:ea typeface="Linux Biolinum O"/>
-              <a:cs typeface="Linux Biolinum O"/>
-            </a:endParaRPr>
-          </a:p>
         </p:txBody>
       </p:sp>
       <p:cxnSp>
         <p:nvCxnSpPr>
-          <p:cNvPr id="1495608077" name="直線接點 4"/>
+          <p:cNvPr id="427390724" name="直線接點 4"/>
           <p:cNvCxnSpPr/>
           <p:nvPr/>
         </p:nvCxnSpPr>
@@ -34121,7 +34080,7 @@
       </p:cxnSp>
       <p:sp>
         <p:nvSpPr>
-          <p:cNvPr id="676114236" name="Slide Number Placeholder 7"/>
+          <p:cNvPr id="1379143205" name="Slide Number Placeholder 7"/>
           <p:cNvSpPr>
             <a:spLocks noGrp="1"/>
           </p:cNvSpPr>
@@ -34159,14 +34118,14 @@
       </p:sp>
       <p:sp>
         <p:nvSpPr>
-          <p:cNvPr id="22028735" name="Google Shape;91;p1"/>
+          <p:cNvPr id="906670632" name="Google Shape;91;p1"/>
           <p:cNvSpPr txBox="1"/>
           <p:nvPr/>
         </p:nvSpPr>
         <p:spPr bwMode="auto">
           <a:xfrm flipH="0" flipV="0">
-            <a:off x="9765365" y="795016"/>
-            <a:ext cx="985654" cy="5212393"/>
+            <a:off x="9765364" y="795015"/>
+            <a:ext cx="986373" cy="4846633"/>
           </a:xfrm>
           <a:prstGeom prst="rect">
             <a:avLst/>
@@ -34503,35 +34462,6 @@
             </a:pPr>
             <a:r>
               <a:rPr lang="en-US" sz="2400">
-                <a:solidFill>
-                  <a:srgbClr val="FF0000"/>
-                </a:solidFill>
-                <a:latin typeface="Linux Biolinum O"/>
-                <a:ea typeface="Linux Biolinum O"/>
-                <a:cs typeface="Linux Biolinum O"/>
-              </a:rPr>
-              <a:t>2</a:t>
-            </a:r>
-            <a:endParaRPr sz="2400">
-              <a:solidFill>
-                <a:srgbClr val="FF0000"/>
-              </a:solidFill>
-              <a:latin typeface="Linux Biolinum O"/>
-              <a:cs typeface="Linux Biolinum O"/>
-            </a:endParaRPr>
-          </a:p>
-          <a:p>
-            <a:pPr lvl="0" algn="l" rtl="0">
-              <a:spcBef>
-                <a:spcPts val="0"/>
-              </a:spcBef>
-              <a:spcAft>
-                <a:spcPts val="0"/>
-              </a:spcAft>
-              <a:defRPr/>
-            </a:pPr>
-            <a:r>
-              <a:rPr lang="en-US" sz="2400" b="0" i="0" u="none" strike="noStrike" cap="none" spc="0">
                 <a:solidFill>
                   <a:srgbClr val="FF0000"/>
                 </a:solidFill>
@@ -34624,7 +34554,7 @@
       </p:grpSpPr>
       <p:cxnSp>
         <p:nvCxnSpPr>
-          <p:cNvPr id="278172332" name="直線接點 4"/>
+          <p:cNvPr id="258938721" name="直線接點 4"/>
           <p:cNvCxnSpPr/>
           <p:nvPr/>
         </p:nvCxnSpPr>
@@ -34659,7 +34589,7 @@
       </p:cxnSp>
       <p:sp>
         <p:nvSpPr>
-          <p:cNvPr id="1219244053" name="TextBox 20"/>
+          <p:cNvPr id="695703546" name="TextBox 20"/>
           <p:cNvSpPr txBox="1"/>
           <p:nvPr/>
         </p:nvSpPr>
@@ -34703,7 +34633,7 @@
       </p:sp>
       <p:sp>
         <p:nvSpPr>
-          <p:cNvPr id="233685715" name="Google Shape;90;p1"/>
+          <p:cNvPr id="353199144" name="Google Shape;90;p1"/>
           <p:cNvSpPr txBox="1"/>
           <p:nvPr/>
         </p:nvSpPr>
@@ -34908,7 +34838,7 @@
       </p:sp>
       <p:sp>
         <p:nvSpPr>
-          <p:cNvPr id="596965402" name=""/>
+          <p:cNvPr id="833561851" name=""/>
           <p:cNvSpPr txBox="1"/>
           <p:nvPr/>
         </p:nvSpPr>
@@ -34985,7 +34915,7 @@
       </p:sp>
       <p:sp>
         <p:nvSpPr>
-          <p:cNvPr id="564975837" name="Google Shape;20;p18"/>
+          <p:cNvPr id="211207864" name="Google Shape;20;p18"/>
           <p:cNvSpPr txBox="1">
             <a:spLocks noGrp="1"/>
           </p:cNvSpPr>
@@ -35139,7 +35069,7 @@
       </p:grpSpPr>
       <p:cxnSp>
         <p:nvCxnSpPr>
-          <p:cNvPr id="2055033147" name="直線接點 4"/>
+          <p:cNvPr id="437143906" name="直線接點 4"/>
           <p:cNvCxnSpPr/>
           <p:nvPr/>
         </p:nvCxnSpPr>
@@ -35174,7 +35104,7 @@
       </p:cxnSp>
       <p:sp>
         <p:nvSpPr>
-          <p:cNvPr id="573381830" name="TextBox 20"/>
+          <p:cNvPr id="1912301578" name="TextBox 20"/>
           <p:cNvSpPr txBox="1"/>
           <p:nvPr/>
         </p:nvSpPr>
@@ -35236,7 +35166,7 @@
       </p:sp>
       <p:sp>
         <p:nvSpPr>
-          <p:cNvPr id="787549255" name="Slide Number Placeholder 1"/>
+          <p:cNvPr id="463349911" name="Slide Number Placeholder 1"/>
           <p:cNvSpPr>
             <a:spLocks noGrp="1"/>
           </p:cNvSpPr>
@@ -35269,7 +35199,7 @@
       </p:sp>
       <p:sp>
         <p:nvSpPr>
-          <p:cNvPr id="880261489" name="Google Shape;90;p1"/>
+          <p:cNvPr id="2119019421" name="Google Shape;90;p1"/>
           <p:cNvSpPr txBox="1"/>
           <p:nvPr/>
         </p:nvSpPr>
@@ -35474,7 +35404,7 @@
       </p:sp>
       <p:sp>
         <p:nvSpPr>
-          <p:cNvPr id="1843159608" name=""/>
+          <p:cNvPr id="1302601916" name=""/>
           <p:cNvSpPr txBox="1"/>
           <p:nvPr/>
         </p:nvSpPr>
@@ -35596,7 +35526,7 @@
       </p:grpSpPr>
       <p:cxnSp>
         <p:nvCxnSpPr>
-          <p:cNvPr id="1141395544" name="直線接點 4"/>
+          <p:cNvPr id="2079778812" name="直線接點 4"/>
           <p:cNvCxnSpPr/>
           <p:nvPr/>
         </p:nvCxnSpPr>
@@ -35631,7 +35561,7 @@
       </p:cxnSp>
       <p:sp>
         <p:nvSpPr>
-          <p:cNvPr id="909272656" name="TextBox 20"/>
+          <p:cNvPr id="1986309416" name="TextBox 20"/>
           <p:cNvSpPr txBox="1"/>
           <p:nvPr/>
         </p:nvSpPr>
@@ -35693,7 +35623,7 @@
       </p:sp>
       <p:sp>
         <p:nvSpPr>
-          <p:cNvPr id="1786088319" name="Slide Number Placeholder 1"/>
+          <p:cNvPr id="1842128446" name="Slide Number Placeholder 1"/>
           <p:cNvSpPr>
             <a:spLocks noGrp="1"/>
           </p:cNvSpPr>
@@ -35726,7 +35656,7 @@
       </p:sp>
       <p:sp>
         <p:nvSpPr>
-          <p:cNvPr id="1605028609" name="Google Shape;90;p1"/>
+          <p:cNvPr id="900428121" name="Google Shape;90;p1"/>
           <p:cNvSpPr txBox="1"/>
           <p:nvPr/>
         </p:nvSpPr>
@@ -35931,7 +35861,7 @@
       </p:sp>
       <p:sp>
         <p:nvSpPr>
-          <p:cNvPr id="40197480" name=""/>
+          <p:cNvPr id="1002027356" name=""/>
           <p:cNvSpPr txBox="1"/>
           <p:nvPr/>
         </p:nvSpPr>
@@ -36063,7 +35993,7 @@
       </p:grpSpPr>
       <p:cxnSp>
         <p:nvCxnSpPr>
-          <p:cNvPr id="1749051685" name="直線接點 4"/>
+          <p:cNvPr id="2029731413" name="直線接點 4"/>
           <p:cNvCxnSpPr/>
           <p:nvPr/>
         </p:nvCxnSpPr>
@@ -36098,7 +36028,7 @@
       </p:cxnSp>
       <p:sp>
         <p:nvSpPr>
-          <p:cNvPr id="993084867" name="TextBox 20"/>
+          <p:cNvPr id="1898731720" name="TextBox 20"/>
           <p:cNvSpPr txBox="1"/>
           <p:nvPr/>
         </p:nvSpPr>
@@ -36160,7 +36090,7 @@
       </p:sp>
       <p:sp>
         <p:nvSpPr>
-          <p:cNvPr id="1472372574" name="Slide Number Placeholder 1"/>
+          <p:cNvPr id="2068407263" name="Slide Number Placeholder 1"/>
           <p:cNvSpPr>
             <a:spLocks noGrp="1"/>
           </p:cNvSpPr>
@@ -36193,7 +36123,7 @@
       </p:sp>
       <p:sp>
         <p:nvSpPr>
-          <p:cNvPr id="87301017" name="Google Shape;90;p1"/>
+          <p:cNvPr id="430760112" name="Google Shape;90;p1"/>
           <p:cNvSpPr txBox="1"/>
           <p:nvPr/>
         </p:nvSpPr>
@@ -36398,7 +36328,7 @@
       </p:sp>
       <p:sp>
         <p:nvSpPr>
-          <p:cNvPr id="440287537" name=""/>
+          <p:cNvPr id="820017216" name=""/>
           <p:cNvSpPr txBox="1"/>
           <p:nvPr/>
         </p:nvSpPr>
@@ -36519,7 +36449,7 @@
       </p:grpSpPr>
       <p:cxnSp>
         <p:nvCxnSpPr>
-          <p:cNvPr id="500736191" name="直線接點 4"/>
+          <p:cNvPr id="840745407" name="直線接點 4"/>
           <p:cNvCxnSpPr/>
           <p:nvPr/>
         </p:nvCxnSpPr>
@@ -36554,7 +36484,7 @@
       </p:cxnSp>
       <p:sp>
         <p:nvSpPr>
-          <p:cNvPr id="799945765" name="TextBox 20"/>
+          <p:cNvPr id="586044490" name="TextBox 20"/>
           <p:cNvSpPr txBox="1"/>
           <p:nvPr/>
         </p:nvSpPr>
@@ -36616,7 +36546,7 @@
       </p:sp>
       <p:sp>
         <p:nvSpPr>
-          <p:cNvPr id="576803542" name="Slide Number Placeholder 1"/>
+          <p:cNvPr id="93564772" name="Slide Number Placeholder 1"/>
           <p:cNvSpPr>
             <a:spLocks noGrp="1"/>
           </p:cNvSpPr>
@@ -36649,7 +36579,7 @@
       </p:sp>
       <p:sp>
         <p:nvSpPr>
-          <p:cNvPr id="553205813" name="Google Shape;90;p1"/>
+          <p:cNvPr id="1437679937" name="Google Shape;90;p1"/>
           <p:cNvSpPr txBox="1"/>
           <p:nvPr/>
         </p:nvSpPr>
@@ -36854,7 +36784,7 @@
       </p:sp>
       <p:sp>
         <p:nvSpPr>
-          <p:cNvPr id="790390796" name=""/>
+          <p:cNvPr id="448447866" name=""/>
           <p:cNvSpPr txBox="1"/>
           <p:nvPr/>
         </p:nvSpPr>
@@ -36964,7 +36894,7 @@
       </p:grpSpPr>
       <p:cxnSp>
         <p:nvCxnSpPr>
-          <p:cNvPr id="943822236" name="直線接點 4"/>
+          <p:cNvPr id="2030181906" name="直線接點 4"/>
           <p:cNvCxnSpPr/>
           <p:nvPr/>
         </p:nvCxnSpPr>
@@ -36999,7 +36929,7 @@
       </p:cxnSp>
       <p:sp>
         <p:nvSpPr>
-          <p:cNvPr id="719357438" name="TextBox 20"/>
+          <p:cNvPr id="687900394" name="TextBox 20"/>
           <p:cNvSpPr txBox="1"/>
           <p:nvPr/>
         </p:nvSpPr>
@@ -37061,7 +36991,7 @@
       </p:sp>
       <p:sp>
         <p:nvSpPr>
-          <p:cNvPr id="2189891" name="Slide Number Placeholder 1"/>
+          <p:cNvPr id="1767644964" name="Slide Number Placeholder 1"/>
           <p:cNvSpPr>
             <a:spLocks noGrp="1"/>
           </p:cNvSpPr>
@@ -37094,7 +37024,7 @@
       </p:sp>
       <p:sp>
         <p:nvSpPr>
-          <p:cNvPr id="1571681924" name="Google Shape;90;p1"/>
+          <p:cNvPr id="1985497775" name="Google Shape;90;p1"/>
           <p:cNvSpPr txBox="1"/>
           <p:nvPr/>
         </p:nvSpPr>
@@ -37299,7 +37229,7 @@
       </p:sp>
       <p:sp>
         <p:nvSpPr>
-          <p:cNvPr id="696470303" name=""/>
+          <p:cNvPr id="1362136556" name=""/>
           <p:cNvSpPr txBox="1"/>
           <p:nvPr/>
         </p:nvSpPr>
@@ -37409,7 +37339,7 @@
       </p:grpSpPr>
       <p:cxnSp>
         <p:nvCxnSpPr>
-          <p:cNvPr id="516004415" name="直線接點 4"/>
+          <p:cNvPr id="1809679413" name="直線接點 4"/>
           <p:cNvCxnSpPr/>
           <p:nvPr/>
         </p:nvCxnSpPr>
@@ -37444,7 +37374,7 @@
       </p:cxnSp>
       <p:sp>
         <p:nvSpPr>
-          <p:cNvPr id="249129171" name="TextBox 20"/>
+          <p:cNvPr id="629329151" name="TextBox 20"/>
           <p:cNvSpPr txBox="1"/>
           <p:nvPr/>
         </p:nvSpPr>
@@ -37506,7 +37436,7 @@
       </p:sp>
       <p:sp>
         <p:nvSpPr>
-          <p:cNvPr id="1564009461" name="Slide Number Placeholder 1"/>
+          <p:cNvPr id="238754754" name="Slide Number Placeholder 1"/>
           <p:cNvSpPr>
             <a:spLocks noGrp="1"/>
           </p:cNvSpPr>
@@ -37539,7 +37469,7 @@
       </p:sp>
       <p:sp>
         <p:nvSpPr>
-          <p:cNvPr id="41504217" name="Google Shape;90;p1"/>
+          <p:cNvPr id="669844967" name="Google Shape;90;p1"/>
           <p:cNvSpPr txBox="1"/>
           <p:nvPr/>
         </p:nvSpPr>
@@ -37744,7 +37674,7 @@
       </p:sp>
       <p:sp>
         <p:nvSpPr>
-          <p:cNvPr id="849066731" name=""/>
+          <p:cNvPr id="1103749369" name=""/>
           <p:cNvSpPr txBox="1"/>
           <p:nvPr/>
         </p:nvSpPr>
@@ -37843,7 +37773,7 @@
       </p:grpSpPr>
       <p:cxnSp>
         <p:nvCxnSpPr>
-          <p:cNvPr id="1063848818" name="直線接點 4"/>
+          <p:cNvPr id="1161161461" name="直線接點 4"/>
           <p:cNvCxnSpPr/>
           <p:nvPr/>
         </p:nvCxnSpPr>
@@ -37878,7 +37808,7 @@
       </p:cxnSp>
       <p:sp>
         <p:nvSpPr>
-          <p:cNvPr id="242173747" name="TextBox 20"/>
+          <p:cNvPr id="2032421791" name="TextBox 20"/>
           <p:cNvSpPr txBox="1"/>
           <p:nvPr/>
         </p:nvSpPr>
@@ -37940,7 +37870,7 @@
       </p:sp>
       <p:sp>
         <p:nvSpPr>
-          <p:cNvPr id="2008901302" name="Slide Number Placeholder 1"/>
+          <p:cNvPr id="1740501950" name="Slide Number Placeholder 1"/>
           <p:cNvSpPr>
             <a:spLocks noGrp="1"/>
           </p:cNvSpPr>
@@ -37973,7 +37903,7 @@
       </p:sp>
       <p:sp>
         <p:nvSpPr>
-          <p:cNvPr id="115554785" name="Google Shape;90;p1"/>
+          <p:cNvPr id="1465968608" name="Google Shape;90;p1"/>
           <p:cNvSpPr txBox="1"/>
           <p:nvPr/>
         </p:nvSpPr>
@@ -38178,7 +38108,7 @@
       </p:sp>
       <p:sp>
         <p:nvSpPr>
-          <p:cNvPr id="433612296" name=""/>
+          <p:cNvPr id="1703185351" name=""/>
           <p:cNvSpPr txBox="1"/>
           <p:nvPr/>
         </p:nvSpPr>
@@ -38299,7 +38229,7 @@
       </p:grpSpPr>
       <p:cxnSp>
         <p:nvCxnSpPr>
-          <p:cNvPr id="2029866882" name="直線接點 4"/>
+          <p:cNvPr id="819411221" name="直線接點 4"/>
           <p:cNvCxnSpPr/>
           <p:nvPr/>
         </p:nvCxnSpPr>
@@ -38334,7 +38264,7 @@
       </p:cxnSp>
       <p:sp>
         <p:nvSpPr>
-          <p:cNvPr id="782268524" name="TextBox 20"/>
+          <p:cNvPr id="1521770725" name="TextBox 20"/>
           <p:cNvSpPr txBox="1"/>
           <p:nvPr/>
         </p:nvSpPr>
@@ -38396,7 +38326,7 @@
       </p:sp>
       <p:sp>
         <p:nvSpPr>
-          <p:cNvPr id="747921480" name="Slide Number Placeholder 1"/>
+          <p:cNvPr id="2083178959" name="Slide Number Placeholder 1"/>
           <p:cNvSpPr>
             <a:spLocks noGrp="1"/>
           </p:cNvSpPr>
@@ -38429,7 +38359,7 @@
       </p:sp>
       <p:sp>
         <p:nvSpPr>
-          <p:cNvPr id="1589045405" name="Google Shape;90;p1"/>
+          <p:cNvPr id="1072407081" name="Google Shape;90;p1"/>
           <p:cNvSpPr txBox="1"/>
           <p:nvPr/>
         </p:nvSpPr>
@@ -38634,7 +38564,7 @@
       </p:sp>
       <p:sp>
         <p:nvSpPr>
-          <p:cNvPr id="666796996" name=""/>
+          <p:cNvPr id="780573443" name=""/>
           <p:cNvSpPr txBox="1"/>
           <p:nvPr/>
         </p:nvSpPr>
@@ -38755,7 +38685,7 @@
       </p:grpSpPr>
       <p:cxnSp>
         <p:nvCxnSpPr>
-          <p:cNvPr id="1314839144" name="直線接點 4"/>
+          <p:cNvPr id="1505547608" name="直線接點 4"/>
           <p:cNvCxnSpPr/>
           <p:nvPr/>
         </p:nvCxnSpPr>
@@ -38790,7 +38720,7 @@
       </p:cxnSp>
       <p:sp>
         <p:nvSpPr>
-          <p:cNvPr id="1596518072" name="TextBox 20"/>
+          <p:cNvPr id="165856389" name="TextBox 20"/>
           <p:cNvSpPr txBox="1"/>
           <p:nvPr/>
         </p:nvSpPr>
@@ -38852,7 +38782,7 @@
       </p:sp>
       <p:sp>
         <p:nvSpPr>
-          <p:cNvPr id="1038023458" name="Slide Number Placeholder 1"/>
+          <p:cNvPr id="1803899123" name="Slide Number Placeholder 1"/>
           <p:cNvSpPr>
             <a:spLocks noGrp="1"/>
           </p:cNvSpPr>
@@ -38885,7 +38815,7 @@
       </p:sp>
       <p:sp>
         <p:nvSpPr>
-          <p:cNvPr id="1407799586" name="Google Shape;90;p1"/>
+          <p:cNvPr id="1431610016" name="Google Shape;90;p1"/>
           <p:cNvSpPr txBox="1"/>
           <p:nvPr/>
         </p:nvSpPr>
@@ -39090,7 +39020,7 @@
       </p:sp>
       <p:sp>
         <p:nvSpPr>
-          <p:cNvPr id="196138444" name=""/>
+          <p:cNvPr id="450202310" name=""/>
           <p:cNvSpPr txBox="1"/>
           <p:nvPr/>
         </p:nvSpPr>
@@ -39200,7 +39130,7 @@
       </p:grpSpPr>
       <p:cxnSp>
         <p:nvCxnSpPr>
-          <p:cNvPr id="646251660" name="直線接點 4"/>
+          <p:cNvPr id="305471401" name="直線接點 4"/>
           <p:cNvCxnSpPr/>
           <p:nvPr/>
         </p:nvCxnSpPr>
@@ -39235,7 +39165,7 @@
       </p:cxnSp>
       <p:sp>
         <p:nvSpPr>
-          <p:cNvPr id="1050398881" name="TextBox 20"/>
+          <p:cNvPr id="882506027" name="TextBox 20"/>
           <p:cNvSpPr txBox="1"/>
           <p:nvPr/>
         </p:nvSpPr>
@@ -39290,7 +39220,7 @@
       </p:sp>
       <p:sp>
         <p:nvSpPr>
-          <p:cNvPr id="136818641" name="TextBox 23"/>
+          <p:cNvPr id="188187898" name="TextBox 23"/>
           <p:cNvSpPr txBox="1"/>
           <p:nvPr/>
         </p:nvSpPr>
@@ -39890,7 +39820,7 @@
       </p:sp>
       <p:sp>
         <p:nvSpPr>
-          <p:cNvPr id="1962036996" name="Slide Number Placeholder 1"/>
+          <p:cNvPr id="1634755021" name="Slide Number Placeholder 1"/>
           <p:cNvSpPr>
             <a:spLocks noGrp="1"/>
           </p:cNvSpPr>
@@ -39923,7 +39853,7 @@
       </p:sp>
       <p:sp>
         <p:nvSpPr>
-          <p:cNvPr id="2062540322" name="Google Shape;90;p1"/>
+          <p:cNvPr id="199394557" name="Google Shape;90;p1"/>
           <p:cNvSpPr txBox="1"/>
           <p:nvPr/>
         </p:nvSpPr>
@@ -40171,7 +40101,7 @@
       </p:grpSpPr>
       <p:cxnSp>
         <p:nvCxnSpPr>
-          <p:cNvPr id="30016925" name="直線接點 4"/>
+          <p:cNvPr id="1272545486" name="直線接點 4"/>
           <p:cNvCxnSpPr/>
           <p:nvPr/>
         </p:nvCxnSpPr>
@@ -40206,7 +40136,7 @@
       </p:cxnSp>
       <p:sp>
         <p:nvSpPr>
-          <p:cNvPr id="747503004" name="TextBox 20"/>
+          <p:cNvPr id="827387032" name="TextBox 20"/>
           <p:cNvSpPr txBox="1"/>
           <p:nvPr/>
         </p:nvSpPr>
@@ -40268,7 +40198,7 @@
       </p:sp>
       <p:sp>
         <p:nvSpPr>
-          <p:cNvPr id="1298015178" name="Slide Number Placeholder 1"/>
+          <p:cNvPr id="184664459" name="Slide Number Placeholder 1"/>
           <p:cNvSpPr>
             <a:spLocks noGrp="1"/>
           </p:cNvSpPr>
@@ -40301,7 +40231,7 @@
       </p:sp>
       <p:sp>
         <p:nvSpPr>
-          <p:cNvPr id="1741951766" name="Google Shape;90;p1"/>
+          <p:cNvPr id="717949914" name="Google Shape;90;p1"/>
           <p:cNvSpPr txBox="1"/>
           <p:nvPr/>
         </p:nvSpPr>
@@ -40506,7 +40436,7 @@
       </p:sp>
       <p:sp>
         <p:nvSpPr>
-          <p:cNvPr id="378488736" name=""/>
+          <p:cNvPr id="362531973" name=""/>
           <p:cNvSpPr txBox="1"/>
           <p:nvPr/>
         </p:nvSpPr>
@@ -40627,7 +40557,7 @@
       </p:grpSpPr>
       <p:cxnSp>
         <p:nvCxnSpPr>
-          <p:cNvPr id="200954350" name="直線接點 4"/>
+          <p:cNvPr id="636264419" name="直線接點 4"/>
           <p:cNvCxnSpPr/>
           <p:nvPr/>
         </p:nvCxnSpPr>
@@ -40662,7 +40592,7 @@
       </p:cxnSp>
       <p:sp>
         <p:nvSpPr>
-          <p:cNvPr id="7435206" name="TextBox 20"/>
+          <p:cNvPr id="2129896579" name="TextBox 20"/>
           <p:cNvSpPr txBox="1"/>
           <p:nvPr/>
         </p:nvSpPr>
@@ -40724,7 +40654,7 @@
       </p:sp>
       <p:sp>
         <p:nvSpPr>
-          <p:cNvPr id="1907160696" name="Slide Number Placeholder 1"/>
+          <p:cNvPr id="1500525996" name="Slide Number Placeholder 1"/>
           <p:cNvSpPr>
             <a:spLocks noGrp="1"/>
           </p:cNvSpPr>
@@ -40757,7 +40687,7 @@
       </p:sp>
       <p:sp>
         <p:nvSpPr>
-          <p:cNvPr id="176796791" name="Google Shape;90;p1"/>
+          <p:cNvPr id="1187662534" name="Google Shape;90;p1"/>
           <p:cNvSpPr txBox="1"/>
           <p:nvPr/>
         </p:nvSpPr>
@@ -40962,7 +40892,7 @@
       </p:sp>
       <p:sp>
         <p:nvSpPr>
-          <p:cNvPr id="368413523" name=""/>
+          <p:cNvPr id="2080756363" name=""/>
           <p:cNvSpPr txBox="1"/>
           <p:nvPr/>
         </p:nvSpPr>
@@ -41061,7 +40991,7 @@
       </p:grpSpPr>
       <p:cxnSp>
         <p:nvCxnSpPr>
-          <p:cNvPr id="74983753" name="直線接點 4"/>
+          <p:cNvPr id="1341701802" name="直線接點 4"/>
           <p:cNvCxnSpPr/>
           <p:nvPr/>
         </p:nvCxnSpPr>
@@ -41096,7 +41026,7 @@
       </p:cxnSp>
       <p:sp>
         <p:nvSpPr>
-          <p:cNvPr id="1736925371" name="TextBox 20"/>
+          <p:cNvPr id="324618999" name="TextBox 20"/>
           <p:cNvSpPr txBox="1"/>
           <p:nvPr/>
         </p:nvSpPr>
@@ -41158,7 +41088,7 @@
       </p:sp>
       <p:sp>
         <p:nvSpPr>
-          <p:cNvPr id="153103170" name="Slide Number Placeholder 1"/>
+          <p:cNvPr id="1322315616" name="Slide Number Placeholder 1"/>
           <p:cNvSpPr>
             <a:spLocks noGrp="1"/>
           </p:cNvSpPr>
@@ -41191,7 +41121,7 @@
       </p:sp>
       <p:sp>
         <p:nvSpPr>
-          <p:cNvPr id="1286221001" name="Google Shape;90;p1"/>
+          <p:cNvPr id="126031873" name="Google Shape;90;p1"/>
           <p:cNvSpPr txBox="1"/>
           <p:nvPr/>
         </p:nvSpPr>
@@ -41396,7 +41326,7 @@
       </p:sp>
       <p:sp>
         <p:nvSpPr>
-          <p:cNvPr id="1525106815" name=""/>
+          <p:cNvPr id="1347928534" name=""/>
           <p:cNvSpPr txBox="1"/>
           <p:nvPr/>
         </p:nvSpPr>
@@ -41495,7 +41425,7 @@
       </p:grpSpPr>
       <p:cxnSp>
         <p:nvCxnSpPr>
-          <p:cNvPr id="1735655344" name="直線接點 4"/>
+          <p:cNvPr id="737979260" name="直線接點 4"/>
           <p:cNvCxnSpPr/>
           <p:nvPr/>
         </p:nvCxnSpPr>
@@ -41530,7 +41460,7 @@
       </p:cxnSp>
       <p:sp>
         <p:nvSpPr>
-          <p:cNvPr id="215198479" name="TextBox 20"/>
+          <p:cNvPr id="1082242201" name="TextBox 20"/>
           <p:cNvSpPr txBox="1"/>
           <p:nvPr/>
         </p:nvSpPr>
@@ -41592,7 +41522,7 @@
       </p:sp>
       <p:sp>
         <p:nvSpPr>
-          <p:cNvPr id="1403819727" name="Slide Number Placeholder 1"/>
+          <p:cNvPr id="1643514983" name="Slide Number Placeholder 1"/>
           <p:cNvSpPr>
             <a:spLocks noGrp="1"/>
           </p:cNvSpPr>
@@ -41625,7 +41555,7 @@
       </p:sp>
       <p:sp>
         <p:nvSpPr>
-          <p:cNvPr id="534519431" name="Google Shape;90;p1"/>
+          <p:cNvPr id="1515117920" name="Google Shape;90;p1"/>
           <p:cNvSpPr txBox="1"/>
           <p:nvPr/>
         </p:nvSpPr>
@@ -41830,7 +41760,7 @@
       </p:sp>
       <p:sp>
         <p:nvSpPr>
-          <p:cNvPr id="1584845447" name=""/>
+          <p:cNvPr id="828053554" name=""/>
           <p:cNvSpPr txBox="1"/>
           <p:nvPr/>
         </p:nvSpPr>
@@ -41951,7 +41881,7 @@
       </p:grpSpPr>
       <p:cxnSp>
         <p:nvCxnSpPr>
-          <p:cNvPr id="464614863" name="直線接點 4"/>
+          <p:cNvPr id="903700425" name="直線接點 4"/>
           <p:cNvCxnSpPr/>
           <p:nvPr/>
         </p:nvCxnSpPr>
@@ -41986,7 +41916,7 @@
       </p:cxnSp>
       <p:sp>
         <p:nvSpPr>
-          <p:cNvPr id="1689318331" name="TextBox 20"/>
+          <p:cNvPr id="28793541" name="TextBox 20"/>
           <p:cNvSpPr txBox="1"/>
           <p:nvPr/>
         </p:nvSpPr>
@@ -42048,7 +41978,7 @@
       </p:sp>
       <p:sp>
         <p:nvSpPr>
-          <p:cNvPr id="128333354" name="Slide Number Placeholder 1"/>
+          <p:cNvPr id="1223617973" name="Slide Number Placeholder 1"/>
           <p:cNvSpPr>
             <a:spLocks noGrp="1"/>
           </p:cNvSpPr>
@@ -42081,7 +42011,7 @@
       </p:sp>
       <p:sp>
         <p:nvSpPr>
-          <p:cNvPr id="78416361" name="Google Shape;90;p1"/>
+          <p:cNvPr id="939309681" name="Google Shape;90;p1"/>
           <p:cNvSpPr txBox="1"/>
           <p:nvPr/>
         </p:nvSpPr>
@@ -42286,7 +42216,7 @@
       </p:sp>
       <p:sp>
         <p:nvSpPr>
-          <p:cNvPr id="1269384460" name=""/>
+          <p:cNvPr id="811371155" name=""/>
           <p:cNvSpPr txBox="1"/>
           <p:nvPr/>
         </p:nvSpPr>
@@ -42385,7 +42315,7 @@
       </p:grpSpPr>
       <p:cxnSp>
         <p:nvCxnSpPr>
-          <p:cNvPr id="1511096390" name="直線接點 4"/>
+          <p:cNvPr id="842315534" name="直線接點 4"/>
           <p:cNvCxnSpPr/>
           <p:nvPr/>
         </p:nvCxnSpPr>
@@ -42420,7 +42350,7 @@
       </p:cxnSp>
       <p:sp>
         <p:nvSpPr>
-          <p:cNvPr id="271417255" name="TextBox 20"/>
+          <p:cNvPr id="1993735291" name="TextBox 20"/>
           <p:cNvSpPr txBox="1"/>
           <p:nvPr/>
         </p:nvSpPr>
@@ -42482,7 +42412,7 @@
       </p:sp>
       <p:sp>
         <p:nvSpPr>
-          <p:cNvPr id="2022485995" name="Slide Number Placeholder 1"/>
+          <p:cNvPr id="376986569" name="Slide Number Placeholder 1"/>
           <p:cNvSpPr>
             <a:spLocks noGrp="1"/>
           </p:cNvSpPr>
@@ -42515,7 +42445,7 @@
       </p:sp>
       <p:sp>
         <p:nvSpPr>
-          <p:cNvPr id="801769920" name="Google Shape;90;p1"/>
+          <p:cNvPr id="662314662" name="Google Shape;90;p1"/>
           <p:cNvSpPr txBox="1"/>
           <p:nvPr/>
         </p:nvSpPr>
@@ -42720,7 +42650,7 @@
       </p:sp>
       <p:sp>
         <p:nvSpPr>
-          <p:cNvPr id="1707220722" name=""/>
+          <p:cNvPr id="1646037495" name=""/>
           <p:cNvSpPr txBox="1"/>
           <p:nvPr/>
         </p:nvSpPr>
@@ -42830,7 +42760,7 @@
       </p:grpSpPr>
       <p:cxnSp>
         <p:nvCxnSpPr>
-          <p:cNvPr id="1552202335" name="直線接點 4"/>
+          <p:cNvPr id="1507821663" name="直線接點 4"/>
           <p:cNvCxnSpPr/>
           <p:nvPr/>
         </p:nvCxnSpPr>
@@ -42865,7 +42795,7 @@
       </p:cxnSp>
       <p:sp>
         <p:nvSpPr>
-          <p:cNvPr id="1636130471" name="TextBox 20"/>
+          <p:cNvPr id="1893920020" name="TextBox 20"/>
           <p:cNvSpPr txBox="1"/>
           <p:nvPr/>
         </p:nvSpPr>
@@ -42927,7 +42857,7 @@
       </p:sp>
       <p:sp>
         <p:nvSpPr>
-          <p:cNvPr id="1872587087" name="Slide Number Placeholder 1"/>
+          <p:cNvPr id="790834170" name="Slide Number Placeholder 1"/>
           <p:cNvSpPr>
             <a:spLocks noGrp="1"/>
           </p:cNvSpPr>
@@ -42960,7 +42890,7 @@
       </p:sp>
       <p:sp>
         <p:nvSpPr>
-          <p:cNvPr id="198568247" name="Google Shape;90;p1"/>
+          <p:cNvPr id="946261331" name="Google Shape;90;p1"/>
           <p:cNvSpPr txBox="1"/>
           <p:nvPr/>
         </p:nvSpPr>
@@ -43165,7 +43095,7 @@
       </p:sp>
       <p:sp>
         <p:nvSpPr>
-          <p:cNvPr id="373778919" name=""/>
+          <p:cNvPr id="710305489" name=""/>
           <p:cNvSpPr txBox="1"/>
           <p:nvPr/>
         </p:nvSpPr>
@@ -43264,7 +43194,7 @@
       </p:grpSpPr>
       <p:cxnSp>
         <p:nvCxnSpPr>
-          <p:cNvPr id="409444685" name="直線接點 4"/>
+          <p:cNvPr id="61562002" name="直線接點 4"/>
           <p:cNvCxnSpPr/>
           <p:nvPr/>
         </p:nvCxnSpPr>
@@ -43299,7 +43229,7 @@
       </p:cxnSp>
       <p:sp>
         <p:nvSpPr>
-          <p:cNvPr id="44180844" name="TextBox 20"/>
+          <p:cNvPr id="584203587" name="TextBox 20"/>
           <p:cNvSpPr txBox="1"/>
           <p:nvPr/>
         </p:nvSpPr>
@@ -43361,7 +43291,7 @@
       </p:sp>
       <p:sp>
         <p:nvSpPr>
-          <p:cNvPr id="561346070" name="Slide Number Placeholder 1"/>
+          <p:cNvPr id="860798512" name="Slide Number Placeholder 1"/>
           <p:cNvSpPr>
             <a:spLocks noGrp="1"/>
           </p:cNvSpPr>
@@ -43394,7 +43324,7 @@
       </p:sp>
       <p:sp>
         <p:nvSpPr>
-          <p:cNvPr id="1132574760" name="Google Shape;90;p1"/>
+          <p:cNvPr id="1567160101" name="Google Shape;90;p1"/>
           <p:cNvSpPr txBox="1"/>
           <p:nvPr/>
         </p:nvSpPr>
@@ -43599,7 +43529,7 @@
       </p:sp>
       <p:sp>
         <p:nvSpPr>
-          <p:cNvPr id="1480701554" name=""/>
+          <p:cNvPr id="294967491" name=""/>
           <p:cNvSpPr txBox="1"/>
           <p:nvPr/>
         </p:nvSpPr>
@@ -43709,7 +43639,7 @@
       </p:grpSpPr>
       <p:cxnSp>
         <p:nvCxnSpPr>
-          <p:cNvPr id="1873174374" name="直線接點 4"/>
+          <p:cNvPr id="1265507264" name="直線接點 4"/>
           <p:cNvCxnSpPr/>
           <p:nvPr/>
         </p:nvCxnSpPr>
@@ -43744,7 +43674,7 @@
       </p:cxnSp>
       <p:sp>
         <p:nvSpPr>
-          <p:cNvPr id="291684362" name="TextBox 20"/>
+          <p:cNvPr id="1744589260" name="TextBox 20"/>
           <p:cNvSpPr txBox="1"/>
           <p:nvPr/>
         </p:nvSpPr>
@@ -43806,7 +43736,7 @@
       </p:sp>
       <p:sp>
         <p:nvSpPr>
-          <p:cNvPr id="1705565704" name="Slide Number Placeholder 1"/>
+          <p:cNvPr id="540990838" name="Slide Number Placeholder 1"/>
           <p:cNvSpPr>
             <a:spLocks noGrp="1"/>
           </p:cNvSpPr>
@@ -43839,7 +43769,7 @@
       </p:sp>
       <p:sp>
         <p:nvSpPr>
-          <p:cNvPr id="244306452" name="Google Shape;90;p1"/>
+          <p:cNvPr id="2056021431" name="Google Shape;90;p1"/>
           <p:cNvSpPr txBox="1"/>
           <p:nvPr/>
         </p:nvSpPr>
@@ -44044,7 +43974,7 @@
       </p:sp>
       <p:sp>
         <p:nvSpPr>
-          <p:cNvPr id="942682977" name=""/>
+          <p:cNvPr id="2103131974" name=""/>
           <p:cNvSpPr txBox="1"/>
           <p:nvPr/>
         </p:nvSpPr>
@@ -44143,7 +44073,7 @@
       </p:grpSpPr>
       <p:cxnSp>
         <p:nvCxnSpPr>
-          <p:cNvPr id="87694548" name="直線接點 4"/>
+          <p:cNvPr id="1101923896" name="直線接點 4"/>
           <p:cNvCxnSpPr/>
           <p:nvPr/>
         </p:nvCxnSpPr>
@@ -44178,7 +44108,7 @@
       </p:cxnSp>
       <p:sp>
         <p:nvSpPr>
-          <p:cNvPr id="1971362253" name="TextBox 20"/>
+          <p:cNvPr id="6940791" name="TextBox 20"/>
           <p:cNvSpPr txBox="1"/>
           <p:nvPr/>
         </p:nvSpPr>
@@ -44240,7 +44170,7 @@
       </p:sp>
       <p:sp>
         <p:nvSpPr>
-          <p:cNvPr id="491980946" name="Slide Number Placeholder 1"/>
+          <p:cNvPr id="762919036" name="Slide Number Placeholder 1"/>
           <p:cNvSpPr>
             <a:spLocks noGrp="1"/>
           </p:cNvSpPr>
@@ -44273,7 +44203,7 @@
       </p:sp>
       <p:sp>
         <p:nvSpPr>
-          <p:cNvPr id="108326327" name="Google Shape;90;p1"/>
+          <p:cNvPr id="1941337189" name="Google Shape;90;p1"/>
           <p:cNvSpPr txBox="1"/>
           <p:nvPr/>
         </p:nvSpPr>
@@ -44478,7 +44408,7 @@
       </p:sp>
       <p:sp>
         <p:nvSpPr>
-          <p:cNvPr id="534966770" name=""/>
+          <p:cNvPr id="1549962855" name=""/>
           <p:cNvSpPr txBox="1"/>
           <p:nvPr/>
         </p:nvSpPr>
@@ -44588,7 +44518,7 @@
       </p:grpSpPr>
       <p:cxnSp>
         <p:nvCxnSpPr>
-          <p:cNvPr id="1533534112" name="直線接點 4"/>
+          <p:cNvPr id="313957207" name="直線接點 4"/>
           <p:cNvCxnSpPr/>
           <p:nvPr/>
         </p:nvCxnSpPr>
@@ -44623,7 +44553,7 @@
       </p:cxnSp>
       <p:sp>
         <p:nvSpPr>
-          <p:cNvPr id="803599196" name="TextBox 20"/>
+          <p:cNvPr id="1766566779" name="TextBox 20"/>
           <p:cNvSpPr txBox="1"/>
           <p:nvPr/>
         </p:nvSpPr>
@@ -44667,7 +44597,7 @@
       </p:sp>
       <p:sp>
         <p:nvSpPr>
-          <p:cNvPr id="1854474727" name="TextBox 23"/>
+          <p:cNvPr id="186130567" name="TextBox 23"/>
           <p:cNvSpPr txBox="1"/>
           <p:nvPr/>
         </p:nvSpPr>
@@ -44837,7 +44767,7 @@
       </p:sp>
       <p:sp>
         <p:nvSpPr>
-          <p:cNvPr id="552423305" name="Slide Number Placeholder 1"/>
+          <p:cNvPr id="1655630637" name="Slide Number Placeholder 1"/>
           <p:cNvSpPr>
             <a:spLocks noGrp="1"/>
           </p:cNvSpPr>
@@ -44870,7 +44800,7 @@
       </p:sp>
       <p:sp>
         <p:nvSpPr>
-          <p:cNvPr id="411656153" name="Google Shape;90;p1"/>
+          <p:cNvPr id="704973765" name="Google Shape;90;p1"/>
           <p:cNvSpPr txBox="1"/>
           <p:nvPr/>
         </p:nvSpPr>
@@ -45118,7 +45048,7 @@
       </p:grpSpPr>
       <p:cxnSp>
         <p:nvCxnSpPr>
-          <p:cNvPr id="2095973031" name="直線接點 4"/>
+          <p:cNvPr id="1617074352" name="直線接點 4"/>
           <p:cNvCxnSpPr/>
           <p:nvPr/>
         </p:nvCxnSpPr>
@@ -45153,7 +45083,7 @@
       </p:cxnSp>
       <p:sp>
         <p:nvSpPr>
-          <p:cNvPr id="37502984" name="TextBox 20"/>
+          <p:cNvPr id="1664768123" name="TextBox 20"/>
           <p:cNvSpPr txBox="1"/>
           <p:nvPr/>
         </p:nvSpPr>
@@ -45215,7 +45145,7 @@
       </p:sp>
       <p:sp>
         <p:nvSpPr>
-          <p:cNvPr id="1743872789" name="Slide Number Placeholder 1"/>
+          <p:cNvPr id="1569370970" name="Slide Number Placeholder 1"/>
           <p:cNvSpPr>
             <a:spLocks noGrp="1"/>
           </p:cNvSpPr>
@@ -45248,7 +45178,7 @@
       </p:sp>
       <p:sp>
         <p:nvSpPr>
-          <p:cNvPr id="243168660" name="Google Shape;90;p1"/>
+          <p:cNvPr id="1610953953" name="Google Shape;90;p1"/>
           <p:cNvSpPr txBox="1"/>
           <p:nvPr/>
         </p:nvSpPr>
@@ -45453,7 +45383,7 @@
       </p:sp>
       <p:sp>
         <p:nvSpPr>
-          <p:cNvPr id="2024046140" name=""/>
+          <p:cNvPr id="1830757373" name=""/>
           <p:cNvSpPr txBox="1"/>
           <p:nvPr/>
         </p:nvSpPr>
@@ -45561,7 +45491,7 @@
       </p:grpSpPr>
       <p:cxnSp>
         <p:nvCxnSpPr>
-          <p:cNvPr id="428371019" name="直線接點 4"/>
+          <p:cNvPr id="1089228030" name="直線接點 4"/>
           <p:cNvCxnSpPr/>
           <p:nvPr/>
         </p:nvCxnSpPr>
@@ -45596,7 +45526,7 @@
       </p:cxnSp>
       <p:sp>
         <p:nvSpPr>
-          <p:cNvPr id="698648009" name="TextBox 20"/>
+          <p:cNvPr id="992989842" name="TextBox 20"/>
           <p:cNvSpPr txBox="1"/>
           <p:nvPr/>
         </p:nvSpPr>
@@ -45658,7 +45588,7 @@
       </p:sp>
       <p:sp>
         <p:nvSpPr>
-          <p:cNvPr id="1861529023" name="Slide Number Placeholder 1"/>
+          <p:cNvPr id="1531366710" name="Slide Number Placeholder 1"/>
           <p:cNvSpPr>
             <a:spLocks noGrp="1"/>
           </p:cNvSpPr>
@@ -45691,7 +45621,7 @@
       </p:sp>
       <p:sp>
         <p:nvSpPr>
-          <p:cNvPr id="1461041817" name="Google Shape;90;p1"/>
+          <p:cNvPr id="18778016" name="Google Shape;90;p1"/>
           <p:cNvSpPr txBox="1"/>
           <p:nvPr/>
         </p:nvSpPr>
@@ -45896,7 +45826,7 @@
       </p:sp>
       <p:sp>
         <p:nvSpPr>
-          <p:cNvPr id="1314545875" name=""/>
+          <p:cNvPr id="2063440225" name=""/>
           <p:cNvSpPr txBox="1"/>
           <p:nvPr/>
         </p:nvSpPr>
@@ -46006,7 +45936,7 @@
       </p:grpSpPr>
       <p:cxnSp>
         <p:nvCxnSpPr>
-          <p:cNvPr id="141401273" name="直線接點 4"/>
+          <p:cNvPr id="389957354" name="直線接點 4"/>
           <p:cNvCxnSpPr/>
           <p:nvPr/>
         </p:nvCxnSpPr>
@@ -46041,7 +45971,7 @@
       </p:cxnSp>
       <p:sp>
         <p:nvSpPr>
-          <p:cNvPr id="775186159" name="TextBox 20"/>
+          <p:cNvPr id="1970819555" name="TextBox 20"/>
           <p:cNvSpPr txBox="1"/>
           <p:nvPr/>
         </p:nvSpPr>
@@ -46103,7 +46033,7 @@
       </p:sp>
       <p:sp>
         <p:nvSpPr>
-          <p:cNvPr id="2102987100" name="Slide Number Placeholder 1"/>
+          <p:cNvPr id="2126015988" name="Slide Number Placeholder 1"/>
           <p:cNvSpPr>
             <a:spLocks noGrp="1"/>
           </p:cNvSpPr>
@@ -46136,7 +46066,7 @@
       </p:sp>
       <p:sp>
         <p:nvSpPr>
-          <p:cNvPr id="1601101536" name="Google Shape;90;p1"/>
+          <p:cNvPr id="1063111049" name="Google Shape;90;p1"/>
           <p:cNvSpPr txBox="1"/>
           <p:nvPr/>
         </p:nvSpPr>
@@ -46341,7 +46271,7 @@
       </p:sp>
       <p:sp>
         <p:nvSpPr>
-          <p:cNvPr id="339929557" name=""/>
+          <p:cNvPr id="1282550625" name=""/>
           <p:cNvSpPr txBox="1"/>
           <p:nvPr/>
         </p:nvSpPr>
@@ -46451,7 +46381,7 @@
       </p:grpSpPr>
       <p:cxnSp>
         <p:nvCxnSpPr>
-          <p:cNvPr id="1364134044" name="直線接點 4"/>
+          <p:cNvPr id="1548443590" name="直線接點 4"/>
           <p:cNvCxnSpPr/>
           <p:nvPr/>
         </p:nvCxnSpPr>
@@ -46486,7 +46416,7 @@
       </p:cxnSp>
       <p:sp>
         <p:nvSpPr>
-          <p:cNvPr id="1443417576" name="TextBox 20"/>
+          <p:cNvPr id="1257088886" name="TextBox 20"/>
           <p:cNvSpPr txBox="1"/>
           <p:nvPr/>
         </p:nvSpPr>
@@ -46548,7 +46478,7 @@
       </p:sp>
       <p:sp>
         <p:nvSpPr>
-          <p:cNvPr id="318558439" name="Slide Number Placeholder 1"/>
+          <p:cNvPr id="1454357162" name="Slide Number Placeholder 1"/>
           <p:cNvSpPr>
             <a:spLocks noGrp="1"/>
           </p:cNvSpPr>
@@ -46581,7 +46511,7 @@
       </p:sp>
       <p:sp>
         <p:nvSpPr>
-          <p:cNvPr id="526869747" name="Google Shape;90;p1"/>
+          <p:cNvPr id="422933436" name="Google Shape;90;p1"/>
           <p:cNvSpPr txBox="1"/>
           <p:nvPr/>
         </p:nvSpPr>
@@ -46786,7 +46716,7 @@
       </p:sp>
       <p:sp>
         <p:nvSpPr>
-          <p:cNvPr id="1896408561" name=""/>
+          <p:cNvPr id="2009252712" name=""/>
           <p:cNvSpPr txBox="1"/>
           <p:nvPr/>
         </p:nvSpPr>
@@ -46883,7 +46813,7 @@
       </p:grpSpPr>
       <p:cxnSp>
         <p:nvCxnSpPr>
-          <p:cNvPr id="30074521" name="直線接點 4"/>
+          <p:cNvPr id="1287644045" name="直線接點 4"/>
           <p:cNvCxnSpPr/>
           <p:nvPr/>
         </p:nvCxnSpPr>
@@ -46918,7 +46848,7 @@
       </p:cxnSp>
       <p:sp>
         <p:nvSpPr>
-          <p:cNvPr id="1105364469" name="TextBox 20"/>
+          <p:cNvPr id="172392324" name="TextBox 20"/>
           <p:cNvSpPr txBox="1"/>
           <p:nvPr/>
         </p:nvSpPr>
@@ -46972,7 +46902,7 @@
       </p:sp>
       <p:sp>
         <p:nvSpPr>
-          <p:cNvPr id="1436562502" name="Slide Number Placeholder 1"/>
+          <p:cNvPr id="1819036590" name="Slide Number Placeholder 1"/>
           <p:cNvSpPr>
             <a:spLocks noGrp="1"/>
           </p:cNvSpPr>
@@ -47005,7 +46935,7 @@
       </p:sp>
       <p:sp>
         <p:nvSpPr>
-          <p:cNvPr id="762138622" name="Google Shape;90;p1"/>
+          <p:cNvPr id="1713154254" name="Google Shape;90;p1"/>
           <p:cNvSpPr txBox="1"/>
           <p:nvPr/>
         </p:nvSpPr>
@@ -47253,7 +47183,7 @@
       </p:grpSpPr>
       <p:cxnSp>
         <p:nvCxnSpPr>
-          <p:cNvPr id="301203454" name="直線接點 4"/>
+          <p:cNvPr id="802312730" name="直線接點 4"/>
           <p:cNvCxnSpPr/>
           <p:nvPr/>
         </p:nvCxnSpPr>
@@ -47288,7 +47218,7 @@
       </p:cxnSp>
       <p:sp>
         <p:nvSpPr>
-          <p:cNvPr id="1067303952" name="TextBox 20"/>
+          <p:cNvPr id="142557627" name="TextBox 20"/>
           <p:cNvSpPr txBox="1"/>
           <p:nvPr/>
         </p:nvSpPr>
@@ -47332,7 +47262,7 @@
       </p:sp>
       <p:sp>
         <p:nvSpPr>
-          <p:cNvPr id="318312732" name="Slide Number Placeholder 1"/>
+          <p:cNvPr id="1755824693" name="Slide Number Placeholder 1"/>
           <p:cNvSpPr>
             <a:spLocks noGrp="1"/>
           </p:cNvSpPr>
@@ -47365,7 +47295,7 @@
       </p:sp>
       <p:sp>
         <p:nvSpPr>
-          <p:cNvPr id="1298428916" name="Google Shape;90;p1"/>
+          <p:cNvPr id="219562106" name="Google Shape;90;p1"/>
           <p:cNvSpPr txBox="1"/>
           <p:nvPr/>
         </p:nvSpPr>
@@ -47613,7 +47543,7 @@
       </p:grpSpPr>
       <p:cxnSp>
         <p:nvCxnSpPr>
-          <p:cNvPr id="1249955034" name="直線接點 4"/>
+          <p:cNvPr id="268839237" name="直線接點 4"/>
           <p:cNvCxnSpPr/>
           <p:nvPr/>
         </p:nvCxnSpPr>
@@ -47648,7 +47578,7 @@
       </p:cxnSp>
       <p:sp>
         <p:nvSpPr>
-          <p:cNvPr id="901816566" name="TextBox 20"/>
+          <p:cNvPr id="1603037560" name="TextBox 20"/>
           <p:cNvSpPr txBox="1"/>
           <p:nvPr/>
         </p:nvSpPr>
@@ -47702,7 +47632,7 @@
       </p:sp>
       <p:sp>
         <p:nvSpPr>
-          <p:cNvPr id="1917617696" name="Slide Number Placeholder 1"/>
+          <p:cNvPr id="1441724706" name="Slide Number Placeholder 1"/>
           <p:cNvSpPr>
             <a:spLocks noGrp="1"/>
           </p:cNvSpPr>
@@ -47735,7 +47665,7 @@
       </p:sp>
       <p:sp>
         <p:nvSpPr>
-          <p:cNvPr id="453603138" name="Google Shape;90;p1"/>
+          <p:cNvPr id="1136826441" name="Google Shape;90;p1"/>
           <p:cNvSpPr txBox="1"/>
           <p:nvPr/>
         </p:nvSpPr>
@@ -47983,7 +47913,7 @@
       </p:grpSpPr>
       <p:cxnSp>
         <p:nvCxnSpPr>
-          <p:cNvPr id="1134976990" name="直線接點 4"/>
+          <p:cNvPr id="2133807939" name="直線接點 4"/>
           <p:cNvCxnSpPr/>
           <p:nvPr/>
         </p:nvCxnSpPr>
@@ -48018,7 +47948,7 @@
       </p:cxnSp>
       <p:sp>
         <p:nvSpPr>
-          <p:cNvPr id="619875436" name="TextBox 20"/>
+          <p:cNvPr id="945721886" name="TextBox 20"/>
           <p:cNvSpPr txBox="1"/>
           <p:nvPr/>
         </p:nvSpPr>
@@ -48062,7 +47992,7 @@
       </p:sp>
       <p:sp>
         <p:nvSpPr>
-          <p:cNvPr id="1802402246" name="TextBox 23"/>
+          <p:cNvPr id="1762677735" name="TextBox 23"/>
           <p:cNvSpPr txBox="1"/>
           <p:nvPr/>
         </p:nvSpPr>
@@ -48097,7 +48027,7 @@
       </p:sp>
       <p:sp>
         <p:nvSpPr>
-          <p:cNvPr id="1779008739" name="Slide Number Placeholder 1"/>
+          <p:cNvPr id="1696671081" name="Slide Number Placeholder 1"/>
           <p:cNvSpPr>
             <a:spLocks noGrp="1"/>
           </p:cNvSpPr>
@@ -48130,7 +48060,7 @@
       </p:sp>
       <p:sp>
         <p:nvSpPr>
-          <p:cNvPr id="910214988" name="Google Shape;90;p1"/>
+          <p:cNvPr id="1264845065" name="Google Shape;90;p1"/>
           <p:cNvSpPr txBox="1"/>
           <p:nvPr/>
         </p:nvSpPr>
@@ -48378,7 +48308,7 @@
       </p:grpSpPr>
       <p:cxnSp>
         <p:nvCxnSpPr>
-          <p:cNvPr id="1139327255" name="直線接點 4"/>
+          <p:cNvPr id="1016635993" name="直線接點 4"/>
           <p:cNvCxnSpPr/>
           <p:nvPr/>
         </p:nvCxnSpPr>
@@ -48413,7 +48343,7 @@
       </p:cxnSp>
       <p:sp>
         <p:nvSpPr>
-          <p:cNvPr id="823783378" name="TextBox 2"/>
+          <p:cNvPr id="1062209093" name="TextBox 2"/>
           <p:cNvSpPr txBox="1"/>
           <p:nvPr/>
         </p:nvSpPr>
@@ -48450,7 +48380,7 @@
       </p:sp>
       <p:sp>
         <p:nvSpPr>
-          <p:cNvPr id="1959235123" name="Google Shape;90;p1"/>
+          <p:cNvPr id="696545473" name="Google Shape;90;p1"/>
           <p:cNvSpPr txBox="1"/>
           <p:nvPr/>
         </p:nvSpPr>
@@ -48655,7 +48585,7 @@
       </p:sp>
       <p:sp>
         <p:nvSpPr>
-          <p:cNvPr id="16051372" name="Google Shape;20;p18"/>
+          <p:cNvPr id="1061267941" name="Google Shape;20;p18"/>
           <p:cNvSpPr txBox="1">
             <a:spLocks noGrp="1"/>
           </p:cNvSpPr>
@@ -48809,7 +48739,7 @@
       </p:grpSpPr>
       <p:cxnSp>
         <p:nvCxnSpPr>
-          <p:cNvPr id="1113370307" name="直線接點 4"/>
+          <p:cNvPr id="1881268975" name="直線接點 4"/>
           <p:cNvCxnSpPr/>
           <p:nvPr/>
         </p:nvCxnSpPr>
@@ -48844,7 +48774,7 @@
       </p:cxnSp>
       <p:sp>
         <p:nvSpPr>
-          <p:cNvPr id="27523030" name="TextBox 20"/>
+          <p:cNvPr id="1332070462" name="TextBox 20"/>
           <p:cNvSpPr txBox="1"/>
           <p:nvPr/>
         </p:nvSpPr>
@@ -48903,7 +48833,7 @@
       </p:sp>
       <p:sp>
         <p:nvSpPr>
-          <p:cNvPr id="2041646553" name="TextBox 23"/>
+          <p:cNvPr id="825028000" name="TextBox 23"/>
           <p:cNvSpPr txBox="1"/>
           <p:nvPr/>
         </p:nvSpPr>
@@ -48940,7 +48870,7 @@
       </p:sp>
       <p:sp>
         <p:nvSpPr>
-          <p:cNvPr id="738730848" name="Slide Number Placeholder 1"/>
+          <p:cNvPr id="1649572043" name="Slide Number Placeholder 1"/>
           <p:cNvSpPr>
             <a:spLocks noGrp="1"/>
           </p:cNvSpPr>
@@ -48973,7 +48903,7 @@
       </p:sp>
       <p:sp>
         <p:nvSpPr>
-          <p:cNvPr id="963197070" name="Google Shape;90;p1"/>
+          <p:cNvPr id="666474941" name="Google Shape;90;p1"/>
           <p:cNvSpPr txBox="1"/>
           <p:nvPr/>
         </p:nvSpPr>
@@ -49178,7 +49108,7 @@
       </p:sp>
       <p:graphicFrame>
         <p:nvGraphicFramePr>
-          <p:cNvPr id="899556800" name=""/>
+          <p:cNvPr id="146084878" name=""/>
           <p:cNvGraphicFramePr>
             <a:graphicFrameLocks xmlns:a="http://schemas.openxmlformats.org/drawingml/2006/main"/>
           </p:cNvGraphicFramePr>
@@ -53772,7 +53702,7 @@
       </p:grpSpPr>
       <p:cxnSp>
         <p:nvCxnSpPr>
-          <p:cNvPr id="285500376" name="直線接點 4"/>
+          <p:cNvPr id="1429450989" name="直線接點 4"/>
           <p:cNvCxnSpPr/>
           <p:nvPr/>
         </p:nvCxnSpPr>
@@ -53807,7 +53737,7 @@
       </p:cxnSp>
       <p:sp>
         <p:nvSpPr>
-          <p:cNvPr id="140730277" name="TextBox 20"/>
+          <p:cNvPr id="526634167" name="TextBox 20"/>
           <p:cNvSpPr txBox="1"/>
           <p:nvPr/>
         </p:nvSpPr>
@@ -53855,7 +53785,7 @@
       </p:sp>
       <p:sp>
         <p:nvSpPr>
-          <p:cNvPr id="690566191" name="TextBox 1"/>
+          <p:cNvPr id="1499298792" name="TextBox 1"/>
           <p:cNvSpPr txBox="1"/>
           <p:nvPr/>
         </p:nvSpPr>
@@ -54735,7 +54665,7 @@
       </p:sp>
       <p:sp>
         <p:nvSpPr>
-          <p:cNvPr id="1861993365" name="Slide Number Placeholder 2"/>
+          <p:cNvPr id="2006411312" name="Slide Number Placeholder 2"/>
           <p:cNvSpPr>
             <a:spLocks noGrp="1"/>
           </p:cNvSpPr>
@@ -54768,7 +54698,7 @@
       </p:sp>
       <p:sp>
         <p:nvSpPr>
-          <p:cNvPr id="1292361655" name="Google Shape;90;p1"/>
+          <p:cNvPr id="659937247" name="Google Shape;90;p1"/>
           <p:cNvSpPr txBox="1"/>
           <p:nvPr/>
         </p:nvSpPr>
@@ -55016,7 +54946,7 @@
       </p:grpSpPr>
       <p:cxnSp>
         <p:nvCxnSpPr>
-          <p:cNvPr id="1576267944" name="直線接點 4"/>
+          <p:cNvPr id="998628479" name="直線接點 4"/>
           <p:cNvCxnSpPr/>
           <p:nvPr/>
         </p:nvCxnSpPr>
@@ -55051,7 +54981,7 @@
       </p:cxnSp>
       <p:sp>
         <p:nvSpPr>
-          <p:cNvPr id="559312214" name="TextBox 20"/>
+          <p:cNvPr id="432446134" name="TextBox 20"/>
           <p:cNvSpPr txBox="1"/>
           <p:nvPr/>
         </p:nvSpPr>
@@ -55110,7 +55040,7 @@
       </p:sp>
       <p:sp>
         <p:nvSpPr>
-          <p:cNvPr id="1711549230" name="Slide Number Placeholder 2"/>
+          <p:cNvPr id="1270058120" name="Slide Number Placeholder 2"/>
           <p:cNvSpPr>
             <a:spLocks noGrp="1"/>
           </p:cNvSpPr>
@@ -55143,7 +55073,7 @@
       </p:sp>
       <p:sp>
         <p:nvSpPr>
-          <p:cNvPr id="236735718" name="Google Shape;90;p1"/>
+          <p:cNvPr id="1285234243" name="Google Shape;90;p1"/>
           <p:cNvSpPr txBox="1"/>
           <p:nvPr/>
         </p:nvSpPr>
@@ -55348,7 +55278,7 @@
       </p:sp>
       <p:sp>
         <p:nvSpPr>
-          <p:cNvPr id="1988989123" name="TextBox 1"/>
+          <p:cNvPr id="1378548406" name="TextBox 1"/>
           <p:cNvSpPr txBox="1"/>
           <p:nvPr/>
         </p:nvSpPr>
@@ -55922,7 +55852,7 @@
       </p:grpSpPr>
       <p:cxnSp>
         <p:nvCxnSpPr>
-          <p:cNvPr id="1207611325" name="直線接點 4"/>
+          <p:cNvPr id="1275276103" name="直線接點 4"/>
           <p:cNvCxnSpPr/>
           <p:nvPr/>
         </p:nvCxnSpPr>
@@ -55957,7 +55887,7 @@
       </p:cxnSp>
       <p:sp>
         <p:nvSpPr>
-          <p:cNvPr id="184507363" name="TextBox 20"/>
+          <p:cNvPr id="1499517405" name="TextBox 20"/>
           <p:cNvSpPr txBox="1"/>
           <p:nvPr/>
         </p:nvSpPr>
@@ -56016,7 +55946,7 @@
       </p:sp>
       <p:sp>
         <p:nvSpPr>
-          <p:cNvPr id="593380828" name="Slide Number Placeholder 2"/>
+          <p:cNvPr id="1693788870" name="Slide Number Placeholder 2"/>
           <p:cNvSpPr>
             <a:spLocks noGrp="1"/>
           </p:cNvSpPr>
@@ -56049,7 +55979,7 @@
       </p:sp>
       <p:sp>
         <p:nvSpPr>
-          <p:cNvPr id="1151690087" name="Google Shape;90;p1"/>
+          <p:cNvPr id="2050670823" name="Google Shape;90;p1"/>
           <p:cNvSpPr txBox="1"/>
           <p:nvPr/>
         </p:nvSpPr>
@@ -56254,7 +56184,7 @@
       </p:sp>
       <p:sp>
         <p:nvSpPr>
-          <p:cNvPr id="1994287166" name="TextBox 1"/>
+          <p:cNvPr id="717047787" name="TextBox 1"/>
           <p:cNvSpPr txBox="1"/>
           <p:nvPr/>
         </p:nvSpPr>
@@ -56913,7 +56843,7 @@
       </p:grpSpPr>
       <p:cxnSp>
         <p:nvCxnSpPr>
-          <p:cNvPr id="91154884" name="直線接點 4"/>
+          <p:cNvPr id="1989785131" name="直線接點 4"/>
           <p:cNvCxnSpPr/>
           <p:nvPr/>
         </p:nvCxnSpPr>
@@ -56948,7 +56878,7 @@
       </p:cxnSp>
       <p:sp>
         <p:nvSpPr>
-          <p:cNvPr id="1853086167" name="TextBox 20"/>
+          <p:cNvPr id="850245789" name="TextBox 20"/>
           <p:cNvSpPr txBox="1"/>
           <p:nvPr/>
         </p:nvSpPr>
@@ -56992,7 +56922,7 @@
       </p:sp>
       <p:sp>
         <p:nvSpPr>
-          <p:cNvPr id="147112367" name="Google Shape;90;p1"/>
+          <p:cNvPr id="1823302140" name="Google Shape;90;p1"/>
           <p:cNvSpPr txBox="1"/>
           <p:nvPr/>
         </p:nvSpPr>
@@ -57197,7 +57127,7 @@
       </p:sp>
       <p:sp>
         <p:nvSpPr>
-          <p:cNvPr id="1126246330" name="Google Shape;20;p18"/>
+          <p:cNvPr id="1351609824" name="Google Shape;20;p18"/>
           <p:cNvSpPr txBox="1">
             <a:spLocks noGrp="1"/>
           </p:cNvSpPr>
@@ -57308,7 +57238,7 @@
       </p:sp>
       <p:sp>
         <p:nvSpPr>
-          <p:cNvPr id="1363386757" name=""/>
+          <p:cNvPr id="1686942834" name=""/>
           <p:cNvSpPr txBox="1"/>
           <p:nvPr/>
         </p:nvSpPr>
